--- a/سكشن 4 — اختبارات الفروض للمتوسط.pptx
+++ b/سكشن 4 — اختبارات الفروض للمتوسط.pptx
@@ -3389,12 +3389,12 @@
           <a:p>
             <a:pPr indent="0" marL="0" rtl="1" algn="r">
               <a:lnSpc>
-                <a:spcPts val="7200"/>
+                <a:spcPts val="6768"/>
               </a:lnSpc>
               <a:buNone/>
             </a:pPr>
             <a:r>
-              <a:rPr lang="ar-EG" sz="6000" b="1" dirty="0">
+              <a:rPr lang="ar-EG" sz="5650" b="1" dirty="0">
                 <a:solidFill>
                   <a:srgbClr val="F6F4EF"/>
                 </a:solidFill>
@@ -3404,7 +3404,7 @@
               </a:rPr>
               <a:t>اختبارات الفروض للمتوسط</a:t>
             </a:r>
-            <a:endParaRPr lang="ar-EG" sz="6000" dirty="0"/>
+            <a:endParaRPr lang="ar-EG" sz="5650" dirty="0"/>
           </a:p>
         </p:txBody>
       </p:sp>
@@ -6792,11 +6792,11 @@
                     <a:p>
                       <a:pPr indent="0" marL="0">
                         <a:lnSpc>
-                          <a:spcPts val="1680"/>
+                          <a:spcPts val="1579"/>
                         </a:lnSpc>
                         <a:buNone/>
                       </a:pPr>
-                      <a:endParaRPr lang="en-US" sz="1200" dirty="0">
+                      <a:endParaRPr lang="en-US" sz="1150" dirty="0">
                         <a:latin typeface="Tahoma" charset="0"/>
                         <a:ea typeface="Tahoma" charset="0"/>
                         <a:cs typeface="Tahoma" charset="0"/>
@@ -6840,12 +6840,12 @@
                     <a:p>
                       <a:pPr algn="ctr" indent="0" marL="0">
                         <a:lnSpc>
-                          <a:spcPts val="1680"/>
+                          <a:spcPts val="1579"/>
                         </a:lnSpc>
                         <a:buNone/>
                       </a:pPr>
                       <a:r>
-                        <a:rPr lang="en-US" sz="1200" b="1" dirty="0">
+                        <a:rPr lang="en-US" sz="1150" b="1" dirty="0">
                           <a:solidFill>
                             <a:srgbClr val="F6F4EF"/>
                           </a:solidFill>
@@ -6855,7 +6855,7 @@
                         </a:rPr>
                         <a:t>N</a:t>
                       </a:r>
-                      <a:endParaRPr lang="en-US" sz="1200" dirty="0">
+                      <a:endParaRPr lang="en-US" sz="1150" dirty="0">
                         <a:latin typeface="Tahoma" charset="0"/>
                         <a:ea typeface="Tahoma" charset="0"/>
                         <a:cs typeface="Tahoma" charset="0"/>
@@ -6905,12 +6905,12 @@
                     <a:p>
                       <a:pPr algn="ctr" indent="0" marL="0">
                         <a:lnSpc>
-                          <a:spcPts val="1680"/>
+                          <a:spcPts val="1579"/>
                         </a:lnSpc>
                         <a:buNone/>
                       </a:pPr>
                       <a:r>
-                        <a:rPr lang="en-US" sz="1200" b="1" dirty="0">
+                        <a:rPr lang="en-US" sz="1150" b="1" dirty="0">
                           <a:solidFill>
                             <a:srgbClr val="F6F4EF"/>
                           </a:solidFill>
@@ -6920,7 +6920,7 @@
                         </a:rPr>
                         <a:t>Mean</a:t>
                       </a:r>
-                      <a:endParaRPr lang="en-US" sz="1200" dirty="0">
+                      <a:endParaRPr lang="en-US" sz="1150" dirty="0">
                         <a:latin typeface="Tahoma" charset="0"/>
                         <a:ea typeface="Tahoma" charset="0"/>
                         <a:cs typeface="Tahoma" charset="0"/>
@@ -6970,12 +6970,12 @@
                     <a:p>
                       <a:pPr algn="ctr" indent="0" marL="0">
                         <a:lnSpc>
-                          <a:spcPts val="1680"/>
+                          <a:spcPts val="1579"/>
                         </a:lnSpc>
                         <a:buNone/>
                       </a:pPr>
                       <a:r>
-                        <a:rPr lang="en-US" sz="1200" b="1" dirty="0">
+                        <a:rPr lang="en-US" sz="1150" b="1" dirty="0">
                           <a:solidFill>
                             <a:srgbClr val="F6F4EF"/>
                           </a:solidFill>
@@ -6985,7 +6985,7 @@
                         </a:rPr>
                         <a:t>Std. Deviation</a:t>
                       </a:r>
-                      <a:endParaRPr lang="en-US" sz="1200" dirty="0">
+                      <a:endParaRPr lang="en-US" sz="1150" dirty="0">
                         <a:latin typeface="Tahoma" charset="0"/>
                         <a:ea typeface="Tahoma" charset="0"/>
                         <a:cs typeface="Tahoma" charset="0"/>
@@ -7035,12 +7035,12 @@
                     <a:p>
                       <a:pPr algn="ctr" indent="0" marL="0">
                         <a:lnSpc>
-                          <a:spcPts val="1680"/>
+                          <a:spcPts val="1579"/>
                         </a:lnSpc>
                         <a:buNone/>
                       </a:pPr>
                       <a:r>
-                        <a:rPr lang="en-US" sz="1200" b="1" dirty="0">
+                        <a:rPr lang="en-US" sz="1150" b="1" dirty="0">
                           <a:solidFill>
                             <a:srgbClr val="F6F4EF"/>
                           </a:solidFill>
@@ -7050,7 +7050,7 @@
                         </a:rPr>
                         <a:t>Std. Error Mean</a:t>
                       </a:r>
-                      <a:endParaRPr lang="en-US" sz="1200" dirty="0">
+                      <a:endParaRPr lang="en-US" sz="1150" dirty="0">
                         <a:latin typeface="Tahoma" charset="0"/>
                         <a:ea typeface="Tahoma" charset="0"/>
                         <a:cs typeface="Tahoma" charset="0"/>
@@ -7102,12 +7102,12 @@
                     <a:p>
                       <a:pPr indent="0" marL="0">
                         <a:lnSpc>
-                          <a:spcPts val="1680"/>
+                          <a:spcPts val="1579"/>
                         </a:lnSpc>
                         <a:buNone/>
                       </a:pPr>
                       <a:r>
-                        <a:rPr lang="en-US" sz="1200" dirty="0">
+                        <a:rPr lang="en-US" sz="1150" dirty="0">
                           <a:solidFill>
                             <a:srgbClr val="14233A"/>
                           </a:solidFill>
@@ -7117,7 +7117,7 @@
                         </a:rPr>
                         <a:t>hours</a:t>
                       </a:r>
-                      <a:endParaRPr lang="en-US" sz="1200" dirty="0">
+                      <a:endParaRPr lang="en-US" sz="1150" dirty="0">
                         <a:latin typeface="Tahoma" charset="0"/>
                         <a:ea typeface="Tahoma" charset="0"/>
                         <a:cs typeface="Tahoma" charset="0"/>
@@ -7167,12 +7167,12 @@
                     <a:p>
                       <a:pPr algn="ctr" indent="0" marL="0">
                         <a:lnSpc>
-                          <a:spcPts val="1680"/>
+                          <a:spcPts val="1579"/>
                         </a:lnSpc>
                         <a:buNone/>
                       </a:pPr>
                       <a:r>
-                        <a:rPr lang="en-US" sz="1200" dirty="0">
+                        <a:rPr lang="en-US" sz="1150" dirty="0">
                           <a:solidFill>
                             <a:srgbClr val="14233A"/>
                           </a:solidFill>
@@ -7182,7 +7182,7 @@
                         </a:rPr>
                         <a:t>10</a:t>
                       </a:r>
-                      <a:endParaRPr lang="en-US" sz="1200" dirty="0">
+                      <a:endParaRPr lang="en-US" sz="1150" dirty="0">
                         <a:latin typeface="Tahoma" charset="0"/>
                         <a:ea typeface="Tahoma" charset="0"/>
                         <a:cs typeface="Tahoma" charset="0"/>
@@ -7238,12 +7238,12 @@
                     <a:p>
                       <a:pPr algn="ctr" indent="0" marL="0">
                         <a:lnSpc>
-                          <a:spcPts val="1680"/>
+                          <a:spcPts val="1579"/>
                         </a:lnSpc>
                         <a:buNone/>
                       </a:pPr>
                       <a:r>
-                        <a:rPr lang="en-US" sz="1200" dirty="0">
+                        <a:rPr lang="en-US" sz="1150" dirty="0">
                           <a:solidFill>
                             <a:srgbClr val="14233A"/>
                           </a:solidFill>
@@ -7253,7 +7253,7 @@
                         </a:rPr>
                         <a:t>20.40</a:t>
                       </a:r>
-                      <a:endParaRPr lang="en-US" sz="1200" dirty="0">
+                      <a:endParaRPr lang="en-US" sz="1150" dirty="0">
                         <a:latin typeface="Tahoma" charset="0"/>
                         <a:ea typeface="Tahoma" charset="0"/>
                         <a:cs typeface="Tahoma" charset="0"/>
@@ -7309,12 +7309,12 @@
                     <a:p>
                       <a:pPr algn="ctr" indent="0" marL="0">
                         <a:lnSpc>
-                          <a:spcPts val="1680"/>
+                          <a:spcPts val="1579"/>
                         </a:lnSpc>
                         <a:buNone/>
                       </a:pPr>
                       <a:r>
-                        <a:rPr lang="en-US" sz="1200" dirty="0">
+                        <a:rPr lang="en-US" sz="1150" dirty="0">
                           <a:solidFill>
                             <a:srgbClr val="14233A"/>
                           </a:solidFill>
@@ -7324,7 +7324,7 @@
                         </a:rPr>
                         <a:t>4.926</a:t>
                       </a:r>
-                      <a:endParaRPr lang="en-US" sz="1200" dirty="0">
+                      <a:endParaRPr lang="en-US" sz="1150" dirty="0">
                         <a:latin typeface="Tahoma" charset="0"/>
                         <a:ea typeface="Tahoma" charset="0"/>
                         <a:cs typeface="Tahoma" charset="0"/>
@@ -7380,12 +7380,12 @@
                     <a:p>
                       <a:pPr algn="ctr" indent="0" marL="0">
                         <a:lnSpc>
-                          <a:spcPts val="1680"/>
+                          <a:spcPts val="1579"/>
                         </a:lnSpc>
                         <a:buNone/>
                       </a:pPr>
                       <a:r>
-                        <a:rPr lang="en-US" sz="1200" dirty="0">
+                        <a:rPr lang="en-US" sz="1150" dirty="0">
                           <a:solidFill>
                             <a:srgbClr val="14233A"/>
                           </a:solidFill>
@@ -7395,7 +7395,7 @@
                         </a:rPr>
                         <a:t>1.558</a:t>
                       </a:r>
-                      <a:endParaRPr lang="en-US" sz="1200" dirty="0">
+                      <a:endParaRPr lang="en-US" sz="1150" dirty="0">
                         <a:latin typeface="Tahoma" charset="0"/>
                         <a:ea typeface="Tahoma" charset="0"/>
                         <a:cs typeface="Tahoma" charset="0"/>
@@ -7657,11 +7657,11 @@
                     <a:p>
                       <a:pPr indent="0" marL="0">
                         <a:lnSpc>
-                          <a:spcPts val="1680"/>
+                          <a:spcPts val="1579"/>
                         </a:lnSpc>
                         <a:buNone/>
                       </a:pPr>
-                      <a:endParaRPr lang="en-US" sz="1200" dirty="0">
+                      <a:endParaRPr lang="en-US" sz="1150" dirty="0">
                         <a:latin typeface="Tahoma" charset="0"/>
                         <a:ea typeface="Tahoma" charset="0"/>
                         <a:cs typeface="Tahoma" charset="0"/>
@@ -7705,12 +7705,12 @@
                     <a:p>
                       <a:pPr algn="ctr" indent="0" marL="0">
                         <a:lnSpc>
-                          <a:spcPts val="1680"/>
+                          <a:spcPts val="1579"/>
                         </a:lnSpc>
                         <a:buNone/>
                       </a:pPr>
                       <a:r>
-                        <a:rPr lang="en-US" sz="1200" b="1" dirty="0">
+                        <a:rPr lang="en-US" sz="1150" b="1" dirty="0">
                           <a:solidFill>
                             <a:srgbClr val="F6F4EF"/>
                           </a:solidFill>
@@ -7720,7 +7720,7 @@
                         </a:rPr>
                         <a:t>t</a:t>
                       </a:r>
-                      <a:endParaRPr lang="en-US" sz="1200" dirty="0">
+                      <a:endParaRPr lang="en-US" sz="1150" dirty="0">
                         <a:latin typeface="Tahoma" charset="0"/>
                         <a:ea typeface="Tahoma" charset="0"/>
                         <a:cs typeface="Tahoma" charset="0"/>
@@ -7770,12 +7770,12 @@
                     <a:p>
                       <a:pPr algn="ctr" indent="0" marL="0">
                         <a:lnSpc>
-                          <a:spcPts val="1680"/>
+                          <a:spcPts val="1579"/>
                         </a:lnSpc>
                         <a:buNone/>
                       </a:pPr>
                       <a:r>
-                        <a:rPr lang="en-US" sz="1200" b="1" dirty="0">
+                        <a:rPr lang="en-US" sz="1150" b="1" dirty="0">
                           <a:solidFill>
                             <a:srgbClr val="F6F4EF"/>
                           </a:solidFill>
@@ -7785,7 +7785,7 @@
                         </a:rPr>
                         <a:t>df</a:t>
                       </a:r>
-                      <a:endParaRPr lang="en-US" sz="1200" dirty="0">
+                      <a:endParaRPr lang="en-US" sz="1150" dirty="0">
                         <a:latin typeface="Tahoma" charset="0"/>
                         <a:ea typeface="Tahoma" charset="0"/>
                         <a:cs typeface="Tahoma" charset="0"/>
@@ -7835,12 +7835,12 @@
                     <a:p>
                       <a:pPr algn="ctr" indent="0" marL="0">
                         <a:lnSpc>
-                          <a:spcPts val="1680"/>
+                          <a:spcPts val="1579"/>
                         </a:lnSpc>
                         <a:buNone/>
                       </a:pPr>
                       <a:r>
-                        <a:rPr lang="en-US" sz="1200" b="1" dirty="0">
+                        <a:rPr lang="en-US" sz="1150" b="1" dirty="0">
                           <a:solidFill>
                             <a:srgbClr val="F6F4EF"/>
                           </a:solidFill>
@@ -7850,7 +7850,7 @@
                         </a:rPr>
                         <a:t>Sig. (2-tailed)</a:t>
                       </a:r>
-                      <a:endParaRPr lang="en-US" sz="1200" dirty="0">
+                      <a:endParaRPr lang="en-US" sz="1150" dirty="0">
                         <a:latin typeface="Tahoma" charset="0"/>
                         <a:ea typeface="Tahoma" charset="0"/>
                         <a:cs typeface="Tahoma" charset="0"/>
@@ -7900,12 +7900,12 @@
                     <a:p>
                       <a:pPr algn="ctr" indent="0" marL="0">
                         <a:lnSpc>
-                          <a:spcPts val="1680"/>
+                          <a:spcPts val="1579"/>
                         </a:lnSpc>
                         <a:buNone/>
                       </a:pPr>
                       <a:r>
-                        <a:rPr lang="en-US" sz="1200" b="1" dirty="0">
+                        <a:rPr lang="en-US" sz="1150" b="1" dirty="0">
                           <a:solidFill>
                             <a:srgbClr val="F6F4EF"/>
                           </a:solidFill>
@@ -7915,7 +7915,7 @@
                         </a:rPr>
                         <a:t>Mean Difference</a:t>
                       </a:r>
-                      <a:endParaRPr lang="en-US" sz="1200" dirty="0">
+                      <a:endParaRPr lang="en-US" sz="1150" dirty="0">
                         <a:latin typeface="Tahoma" charset="0"/>
                         <a:ea typeface="Tahoma" charset="0"/>
                         <a:cs typeface="Tahoma" charset="0"/>
@@ -7965,12 +7965,12 @@
                     <a:p>
                       <a:pPr algn="ctr" indent="0" marL="0">
                         <a:lnSpc>
-                          <a:spcPts val="1680"/>
+                          <a:spcPts val="1579"/>
                         </a:lnSpc>
                         <a:buNone/>
                       </a:pPr>
                       <a:r>
-                        <a:rPr lang="en-US" sz="1200" b="1" dirty="0">
+                        <a:rPr lang="en-US" sz="1150" b="1" dirty="0">
                           <a:solidFill>
                             <a:srgbClr val="F6F4EF"/>
                           </a:solidFill>
@@ -7980,7 +7980,7 @@
                         </a:rPr>
                         <a:t>95% CI Lower</a:t>
                       </a:r>
-                      <a:endParaRPr lang="en-US" sz="1200" dirty="0">
+                      <a:endParaRPr lang="en-US" sz="1150" dirty="0">
                         <a:latin typeface="Tahoma" charset="0"/>
                         <a:ea typeface="Tahoma" charset="0"/>
                         <a:cs typeface="Tahoma" charset="0"/>
@@ -8030,12 +8030,12 @@
                     <a:p>
                       <a:pPr algn="ctr" indent="0" marL="0">
                         <a:lnSpc>
-                          <a:spcPts val="1680"/>
+                          <a:spcPts val="1579"/>
                         </a:lnSpc>
                         <a:buNone/>
                       </a:pPr>
                       <a:r>
-                        <a:rPr lang="en-US" sz="1200" b="1" dirty="0">
+                        <a:rPr lang="en-US" sz="1150" b="1" dirty="0">
                           <a:solidFill>
                             <a:srgbClr val="F6F4EF"/>
                           </a:solidFill>
@@ -8045,7 +8045,7 @@
                         </a:rPr>
                         <a:t>95% CI Upper</a:t>
                       </a:r>
-                      <a:endParaRPr lang="en-US" sz="1200" dirty="0">
+                      <a:endParaRPr lang="en-US" sz="1150" dirty="0">
                         <a:latin typeface="Tahoma" charset="0"/>
                         <a:ea typeface="Tahoma" charset="0"/>
                         <a:cs typeface="Tahoma" charset="0"/>
@@ -8097,12 +8097,12 @@
                     <a:p>
                       <a:pPr indent="0" marL="0">
                         <a:lnSpc>
-                          <a:spcPts val="1680"/>
+                          <a:spcPts val="1579"/>
                         </a:lnSpc>
                         <a:buNone/>
                       </a:pPr>
                       <a:r>
-                        <a:rPr lang="en-US" sz="1200" dirty="0">
+                        <a:rPr lang="en-US" sz="1150" dirty="0">
                           <a:solidFill>
                             <a:srgbClr val="14233A"/>
                           </a:solidFill>
@@ -8112,7 +8112,7 @@
                         </a:rPr>
                         <a:t>hours</a:t>
                       </a:r>
-                      <a:endParaRPr lang="en-US" sz="1200" dirty="0">
+                      <a:endParaRPr lang="en-US" sz="1150" dirty="0">
                         <a:latin typeface="Tahoma" charset="0"/>
                         <a:ea typeface="Tahoma" charset="0"/>
                         <a:cs typeface="Tahoma" charset="0"/>
@@ -8162,12 +8162,12 @@
                     <a:p>
                       <a:pPr algn="ctr" indent="0" marL="0">
                         <a:lnSpc>
-                          <a:spcPts val="1680"/>
+                          <a:spcPts val="1579"/>
                         </a:lnSpc>
                         <a:buNone/>
                       </a:pPr>
                       <a:r>
-                        <a:rPr lang="en-US" sz="1200" dirty="0">
+                        <a:rPr lang="en-US" sz="1150" dirty="0">
                           <a:solidFill>
                             <a:srgbClr val="14233A"/>
                           </a:solidFill>
@@ -8177,7 +8177,7 @@
                         </a:rPr>
                         <a:t>.257</a:t>
                       </a:r>
-                      <a:endParaRPr lang="en-US" sz="1200" dirty="0">
+                      <a:endParaRPr lang="en-US" sz="1150" dirty="0">
                         <a:latin typeface="Tahoma" charset="0"/>
                         <a:ea typeface="Tahoma" charset="0"/>
                         <a:cs typeface="Tahoma" charset="0"/>
@@ -8233,12 +8233,12 @@
                     <a:p>
                       <a:pPr algn="ctr" indent="0" marL="0">
                         <a:lnSpc>
-                          <a:spcPts val="1680"/>
+                          <a:spcPts val="1579"/>
                         </a:lnSpc>
                         <a:buNone/>
                       </a:pPr>
                       <a:r>
-                        <a:rPr lang="en-US" sz="1200" dirty="0">
+                        <a:rPr lang="en-US" sz="1150" dirty="0">
                           <a:solidFill>
                             <a:srgbClr val="14233A"/>
                           </a:solidFill>
@@ -8248,7 +8248,7 @@
                         </a:rPr>
                         <a:t>9</a:t>
                       </a:r>
-                      <a:endParaRPr lang="en-US" sz="1200" dirty="0">
+                      <a:endParaRPr lang="en-US" sz="1150" dirty="0">
                         <a:latin typeface="Tahoma" charset="0"/>
                         <a:ea typeface="Tahoma" charset="0"/>
                         <a:cs typeface="Tahoma" charset="0"/>
@@ -8304,12 +8304,12 @@
                     <a:p>
                       <a:pPr algn="ctr" indent="0" marL="0">
                         <a:lnSpc>
-                          <a:spcPts val="1680"/>
+                          <a:spcPts val="1579"/>
                         </a:lnSpc>
                         <a:buNone/>
                       </a:pPr>
                       <a:r>
-                        <a:rPr lang="en-US" sz="1200" dirty="0">
+                        <a:rPr lang="en-US" sz="1150" dirty="0">
                           <a:solidFill>
                             <a:srgbClr val="9A5B00"/>
                           </a:solidFill>
@@ -8319,7 +8319,7 @@
                         </a:rPr>
                         <a:t>.803</a:t>
                       </a:r>
-                      <a:endParaRPr lang="en-US" sz="1200" dirty="0">
+                      <a:endParaRPr lang="en-US" sz="1150" dirty="0">
                         <a:latin typeface="Tahoma" charset="0"/>
                         <a:ea typeface="Tahoma" charset="0"/>
                         <a:cs typeface="Tahoma" charset="0"/>
@@ -8375,12 +8375,12 @@
                     <a:p>
                       <a:pPr algn="ctr" indent="0" marL="0">
                         <a:lnSpc>
-                          <a:spcPts val="1680"/>
+                          <a:spcPts val="1579"/>
                         </a:lnSpc>
                         <a:buNone/>
                       </a:pPr>
                       <a:r>
-                        <a:rPr lang="en-US" sz="1200" dirty="0">
+                        <a:rPr lang="en-US" sz="1150" dirty="0">
                           <a:solidFill>
                             <a:srgbClr val="14233A"/>
                           </a:solidFill>
@@ -8390,7 +8390,7 @@
                         </a:rPr>
                         <a:t>.400</a:t>
                       </a:r>
-                      <a:endParaRPr lang="en-US" sz="1200" dirty="0">
+                      <a:endParaRPr lang="en-US" sz="1150" dirty="0">
                         <a:latin typeface="Tahoma" charset="0"/>
                         <a:ea typeface="Tahoma" charset="0"/>
                         <a:cs typeface="Tahoma" charset="0"/>
@@ -8446,12 +8446,12 @@
                     <a:p>
                       <a:pPr algn="ctr" indent="0" marL="0">
                         <a:lnSpc>
-                          <a:spcPts val="1680"/>
+                          <a:spcPts val="1579"/>
                         </a:lnSpc>
                         <a:buNone/>
                       </a:pPr>
                       <a:r>
-                        <a:rPr lang="en-US" sz="1200" dirty="0">
+                        <a:rPr lang="en-US" sz="1150" dirty="0">
                           <a:solidFill>
                             <a:srgbClr val="14233A"/>
                           </a:solidFill>
@@ -8461,7 +8461,7 @@
                         </a:rPr>
                         <a:t>-3.12</a:t>
                       </a:r>
-                      <a:endParaRPr lang="en-US" sz="1200" dirty="0">
+                      <a:endParaRPr lang="en-US" sz="1150" dirty="0">
                         <a:latin typeface="Tahoma" charset="0"/>
                         <a:ea typeface="Tahoma" charset="0"/>
                         <a:cs typeface="Tahoma" charset="0"/>
@@ -8517,12 +8517,12 @@
                     <a:p>
                       <a:pPr algn="ctr" indent="0" marL="0">
                         <a:lnSpc>
-                          <a:spcPts val="1680"/>
+                          <a:spcPts val="1579"/>
                         </a:lnSpc>
                         <a:buNone/>
                       </a:pPr>
                       <a:r>
-                        <a:rPr lang="en-US" sz="1200" dirty="0">
+                        <a:rPr lang="en-US" sz="1150" dirty="0">
                           <a:solidFill>
                             <a:srgbClr val="14233A"/>
                           </a:solidFill>
@@ -8532,7 +8532,7 @@
                         </a:rPr>
                         <a:t>3.92</a:t>
                       </a:r>
-                      <a:endParaRPr lang="en-US" sz="1200" dirty="0">
+                      <a:endParaRPr lang="en-US" sz="1150" dirty="0">
                         <a:latin typeface="Tahoma" charset="0"/>
                         <a:ea typeface="Tahoma" charset="0"/>
                         <a:cs typeface="Tahoma" charset="0"/>
@@ -8789,6 +8789,200 @@
   <p:clrMapOvr>
     <a:masterClrMapping/>
   </p:clrMapOvr>
+  <p:timing>
+    <p:tnLst>
+      <p:par>
+        <p:cTn id="1" dur="indefinite" restart="never" nodeType="tmRoot">
+          <p:childTnLst>
+            <p:seq concurrent="1" nextAc="seek">
+              <p:cTn id="2" dur="indefinite" nodeType="mainSeq">
+                <p:childTnLst>
+                  <p:par>
+                    <p:cTn id="3" fill="hold">
+                      <p:stCondLst>
+                        <p:cond delay="indefinite"/>
+                      </p:stCondLst>
+                      <p:childTnLst>
+                        <p:par>
+                          <p:cTn id="4" fill="hold">
+                            <p:stCondLst>
+                              <p:cond delay="0"/>
+                            </p:stCondLst>
+                            <p:childTnLst>
+                              <p:par>
+                                <p:cTn id="5" presetID="10" presetClass="entr" presetSubtype="0" fill="hold" grpId="0" nodeType="clickEffect">
+                                  <p:stCondLst>
+                                    <p:cond delay="0"/>
+                                  </p:stCondLst>
+                                  <p:childTnLst>
+                                    <p:set>
+                                      <p:cBhvr>
+                                        <p:cTn id="105" dur="1" fill="hold">
+                                          <p:stCondLst>
+                                            <p:cond delay="0"/>
+                                          </p:stCondLst>
+                                        </p:cTn>
+                                        <p:tgtEl>
+                                          <p:spTgt spid="3"/>
+                                        </p:tgtEl>
+                                        <p:attrNameLst>
+                                          <p:attrName>style.visibility</p:attrName>
+                                        </p:attrNameLst>
+                                      </p:cBhvr>
+                                      <p:to>
+                                        <p:strVal val="visible"/>
+                                      </p:to>
+                                    </p:set>
+                                    <p:animEffect transition="in" filter="fade">
+                                      <p:cBhvr>
+                                        <p:cTn id="6" dur="500"/>
+                                        <p:tgtEl>
+                                          <p:spTgt spid="3"/>
+                                        </p:tgtEl>
+                                      </p:cBhvr>
+                                    </p:animEffect>
+                                  </p:childTnLst>
+                                </p:cTn>
+                              </p:par>
+                              <p:par>
+                                <p:cTn id="7" presetID="10" presetClass="entr" presetSubtype="0" fill="hold" grpId="0" nodeType="withEffect">
+                                  <p:stCondLst>
+                                    <p:cond delay="0"/>
+                                  </p:stCondLst>
+                                  <p:childTnLst>
+                                    <p:set>
+                                      <p:cBhvr>
+                                        <p:cTn id="107" dur="1" fill="hold">
+                                          <p:stCondLst>
+                                            <p:cond delay="0"/>
+                                          </p:stCondLst>
+                                        </p:cTn>
+                                        <p:tgtEl>
+                                          <p:spTgt spid="16"/>
+                                        </p:tgtEl>
+                                        <p:attrNameLst>
+                                          <p:attrName>style.visibility</p:attrName>
+                                        </p:attrNameLst>
+                                      </p:cBhvr>
+                                      <p:to>
+                                        <p:strVal val="visible"/>
+                                      </p:to>
+                                    </p:set>
+                                    <p:animEffect transition="in" filter="fade">
+                                      <p:cBhvr>
+                                        <p:cTn id="8" dur="500"/>
+                                        <p:tgtEl>
+                                          <p:spTgt spid="16"/>
+                                        </p:tgtEl>
+                                      </p:cBhvr>
+                                    </p:animEffect>
+                                  </p:childTnLst>
+                                </p:cTn>
+                              </p:par>
+                              <p:par>
+                                <p:cTn id="9" presetID="10" presetClass="entr" presetSubtype="0" fill="hold" grpId="0" nodeType="withEffect">
+                                  <p:stCondLst>
+                                    <p:cond delay="0"/>
+                                  </p:stCondLst>
+                                  <p:childTnLst>
+                                    <p:set>
+                                      <p:cBhvr>
+                                        <p:cTn id="109" dur="1" fill="hold">
+                                          <p:stCondLst>
+                                            <p:cond delay="0"/>
+                                          </p:stCondLst>
+                                        </p:cTn>
+                                        <p:tgtEl>
+                                          <p:spTgt spid="17"/>
+                                        </p:tgtEl>
+                                        <p:attrNameLst>
+                                          <p:attrName>style.visibility</p:attrName>
+                                        </p:attrNameLst>
+                                      </p:cBhvr>
+                                      <p:to>
+                                        <p:strVal val="visible"/>
+                                      </p:to>
+                                    </p:set>
+                                    <p:animEffect transition="in" filter="fade">
+                                      <p:cBhvr>
+                                        <p:cTn id="10" dur="500"/>
+                                        <p:tgtEl>
+                                          <p:spTgt spid="17"/>
+                                        </p:tgtEl>
+                                      </p:cBhvr>
+                                    </p:animEffect>
+                                  </p:childTnLst>
+                                </p:cTn>
+                              </p:par>
+                              <p:par>
+                                <p:cTn id="11" presetID="10" presetClass="entr" presetSubtype="0" fill="hold" grpId="0" nodeType="withEffect">
+                                  <p:stCondLst>
+                                    <p:cond delay="0"/>
+                                  </p:stCondLst>
+                                  <p:childTnLst>
+                                    <p:set>
+                                      <p:cBhvr>
+                                        <p:cTn id="111" dur="1" fill="hold">
+                                          <p:stCondLst>
+                                            <p:cond delay="0"/>
+                                          </p:stCondLst>
+                                        </p:cTn>
+                                        <p:tgtEl>
+                                          <p:spTgt spid="18"/>
+                                        </p:tgtEl>
+                                        <p:attrNameLst>
+                                          <p:attrName>style.visibility</p:attrName>
+                                        </p:attrNameLst>
+                                      </p:cBhvr>
+                                      <p:to>
+                                        <p:strVal val="visible"/>
+                                      </p:to>
+                                    </p:set>
+                                    <p:animEffect transition="in" filter="fade">
+                                      <p:cBhvr>
+                                        <p:cTn id="12" dur="500"/>
+                                        <p:tgtEl>
+                                          <p:spTgt spid="18"/>
+                                        </p:tgtEl>
+                                      </p:cBhvr>
+                                    </p:animEffect>
+                                  </p:childTnLst>
+                                </p:cTn>
+                              </p:par>
+                            </p:childTnLst>
+                          </p:cTn>
+                        </p:par>
+                      </p:childTnLst>
+                    </p:cTn>
+                  </p:par>
+                </p:childTnLst>
+              </p:cTn>
+              <p:prevCondLst>
+                <p:cond evt="onPrev" delay="0">
+                  <p:tgtEl>
+                    <p:sldTgt/>
+                  </p:tgtEl>
+                </p:cond>
+              </p:prevCondLst>
+              <p:nextCondLst>
+                <p:cond evt="onNext" delay="0">
+                  <p:tgtEl>
+                    <p:sldTgt/>
+                  </p:tgtEl>
+                </p:cond>
+              </p:nextCondLst>
+            </p:seq>
+          </p:childTnLst>
+        </p:cTn>
+      </p:par>
+    </p:tnLst>
+    <p:bldLst>
+      <p:bldP spid="3" grpId="0" animBg="1"/>
+      <p:bldP spid="16" grpId="0" animBg="1"/>
+      <p:bldP spid="17" grpId="0" animBg="1"/>
+      <p:bldP spid="18" grpId="0" animBg="1"/>
+    </p:bldLst>
+  </p:timing>
 </p:sld>
 </file>
 
@@ -8929,12 +9123,12 @@
           <a:p>
             <a:pPr indent="0" marL="0" rtl="1" algn="r">
               <a:lnSpc>
-                <a:spcPts val="2175"/>
+                <a:spcPts val="2110"/>
               </a:lnSpc>
               <a:buNone/>
             </a:pPr>
             <a:r>
-              <a:rPr lang="ar-EG" sz="1500" dirty="0">
+              <a:rPr lang="ar-EG" sz="1450" dirty="0">
                 <a:solidFill>
                   <a:srgbClr val="14233A"/>
                 </a:solidFill>
@@ -8944,7 +9138,7 @@
               </a:rPr>
               <a:t>الإدارة تسأل: هل اتجاه الطلاب يختلف عن المحايد (3)؟ اخترنا عشوائيًا 12 طالبًا ممن أجابوا الاستبيان، وهذه درجة اتجاه كل منهم.</a:t>
             </a:r>
-            <a:endParaRPr lang="ar-EG" sz="1500" dirty="0"/>
+            <a:endParaRPr lang="ar-EG" sz="1450" dirty="0"/>
           </a:p>
         </p:txBody>
       </p:sp>
@@ -9107,12 +9301,12 @@
                     <a:p>
                       <a:pPr algn="ctr" indent="0" marL="0">
                         <a:lnSpc>
-                          <a:spcPts val="1820"/>
+                          <a:spcPts val="1765"/>
                         </a:lnSpc>
                         <a:buNone/>
                       </a:pPr>
                       <a:r>
-                        <a:rPr lang="en-US" sz="1300" b="1" dirty="0">
+                        <a:rPr lang="en-US" sz="1250" b="1" dirty="0">
                           <a:solidFill>
                             <a:srgbClr val="F6F4EF"/>
                           </a:solidFill>
@@ -9122,7 +9316,7 @@
                         </a:rPr>
                         <a:t>12</a:t>
                       </a:r>
-                      <a:endParaRPr lang="en-US" sz="1300" dirty="0">
+                      <a:endParaRPr lang="en-US" sz="1250" dirty="0">
                         <a:latin typeface="Tahoma" charset="0"/>
                         <a:ea typeface="Tahoma" charset="0"/>
                         <a:cs typeface="Tahoma" charset="0"/>
@@ -9166,12 +9360,12 @@
                     <a:p>
                       <a:pPr algn="ctr" indent="0" marL="0">
                         <a:lnSpc>
-                          <a:spcPts val="1820"/>
+                          <a:spcPts val="1765"/>
                         </a:lnSpc>
                         <a:buNone/>
                       </a:pPr>
                       <a:r>
-                        <a:rPr lang="en-US" sz="1300" b="1" dirty="0">
+                        <a:rPr lang="en-US" sz="1250" b="1" dirty="0">
                           <a:solidFill>
                             <a:srgbClr val="F6F4EF"/>
                           </a:solidFill>
@@ -9181,7 +9375,7 @@
                         </a:rPr>
                         <a:t>11</a:t>
                       </a:r>
-                      <a:endParaRPr lang="en-US" sz="1300" dirty="0">
+                      <a:endParaRPr lang="en-US" sz="1250" dirty="0">
                         <a:latin typeface="Tahoma" charset="0"/>
                         <a:ea typeface="Tahoma" charset="0"/>
                         <a:cs typeface="Tahoma" charset="0"/>
@@ -9231,12 +9425,12 @@
                     <a:p>
                       <a:pPr algn="ctr" indent="0" marL="0">
                         <a:lnSpc>
-                          <a:spcPts val="1820"/>
+                          <a:spcPts val="1765"/>
                         </a:lnSpc>
                         <a:buNone/>
                       </a:pPr>
                       <a:r>
-                        <a:rPr lang="en-US" sz="1300" b="1" dirty="0">
+                        <a:rPr lang="en-US" sz="1250" b="1" dirty="0">
                           <a:solidFill>
                             <a:srgbClr val="F6F4EF"/>
                           </a:solidFill>
@@ -9246,7 +9440,7 @@
                         </a:rPr>
                         <a:t>10</a:t>
                       </a:r>
-                      <a:endParaRPr lang="en-US" sz="1300" dirty="0">
+                      <a:endParaRPr lang="en-US" sz="1250" dirty="0">
                         <a:latin typeface="Tahoma" charset="0"/>
                         <a:ea typeface="Tahoma" charset="0"/>
                         <a:cs typeface="Tahoma" charset="0"/>
@@ -9296,12 +9490,12 @@
                     <a:p>
                       <a:pPr algn="ctr" indent="0" marL="0">
                         <a:lnSpc>
-                          <a:spcPts val="1820"/>
+                          <a:spcPts val="1765"/>
                         </a:lnSpc>
                         <a:buNone/>
                       </a:pPr>
                       <a:r>
-                        <a:rPr lang="en-US" sz="1300" b="1" dirty="0">
+                        <a:rPr lang="en-US" sz="1250" b="1" dirty="0">
                           <a:solidFill>
                             <a:srgbClr val="F6F4EF"/>
                           </a:solidFill>
@@ -9311,7 +9505,7 @@
                         </a:rPr>
                         <a:t>9</a:t>
                       </a:r>
-                      <a:endParaRPr lang="en-US" sz="1300" dirty="0">
+                      <a:endParaRPr lang="en-US" sz="1250" dirty="0">
                         <a:latin typeface="Tahoma" charset="0"/>
                         <a:ea typeface="Tahoma" charset="0"/>
                         <a:cs typeface="Tahoma" charset="0"/>
@@ -9361,12 +9555,12 @@
                     <a:p>
                       <a:pPr algn="ctr" indent="0" marL="0">
                         <a:lnSpc>
-                          <a:spcPts val="1820"/>
+                          <a:spcPts val="1765"/>
                         </a:lnSpc>
                         <a:buNone/>
                       </a:pPr>
                       <a:r>
-                        <a:rPr lang="en-US" sz="1300" b="1" dirty="0">
+                        <a:rPr lang="en-US" sz="1250" b="1" dirty="0">
                           <a:solidFill>
                             <a:srgbClr val="F6F4EF"/>
                           </a:solidFill>
@@ -9376,7 +9570,7 @@
                         </a:rPr>
                         <a:t>8</a:t>
                       </a:r>
-                      <a:endParaRPr lang="en-US" sz="1300" dirty="0">
+                      <a:endParaRPr lang="en-US" sz="1250" dirty="0">
                         <a:latin typeface="Tahoma" charset="0"/>
                         <a:ea typeface="Tahoma" charset="0"/>
                         <a:cs typeface="Tahoma" charset="0"/>
@@ -9426,12 +9620,12 @@
                     <a:p>
                       <a:pPr algn="ctr" indent="0" marL="0">
                         <a:lnSpc>
-                          <a:spcPts val="1820"/>
+                          <a:spcPts val="1765"/>
                         </a:lnSpc>
                         <a:buNone/>
                       </a:pPr>
                       <a:r>
-                        <a:rPr lang="en-US" sz="1300" b="1" dirty="0">
+                        <a:rPr lang="en-US" sz="1250" b="1" dirty="0">
                           <a:solidFill>
                             <a:srgbClr val="F6F4EF"/>
                           </a:solidFill>
@@ -9441,7 +9635,7 @@
                         </a:rPr>
                         <a:t>7</a:t>
                       </a:r>
-                      <a:endParaRPr lang="en-US" sz="1300" dirty="0">
+                      <a:endParaRPr lang="en-US" sz="1250" dirty="0">
                         <a:latin typeface="Tahoma" charset="0"/>
                         <a:ea typeface="Tahoma" charset="0"/>
                         <a:cs typeface="Tahoma" charset="0"/>
@@ -9491,12 +9685,12 @@
                     <a:p>
                       <a:pPr algn="ctr" indent="0" marL="0">
                         <a:lnSpc>
-                          <a:spcPts val="1820"/>
+                          <a:spcPts val="1765"/>
                         </a:lnSpc>
                         <a:buNone/>
                       </a:pPr>
                       <a:r>
-                        <a:rPr lang="en-US" sz="1300" b="1" dirty="0">
+                        <a:rPr lang="en-US" sz="1250" b="1" dirty="0">
                           <a:solidFill>
                             <a:srgbClr val="F6F4EF"/>
                           </a:solidFill>
@@ -9506,7 +9700,7 @@
                         </a:rPr>
                         <a:t>6</a:t>
                       </a:r>
-                      <a:endParaRPr lang="en-US" sz="1300" dirty="0">
+                      <a:endParaRPr lang="en-US" sz="1250" dirty="0">
                         <a:latin typeface="Tahoma" charset="0"/>
                         <a:ea typeface="Tahoma" charset="0"/>
                         <a:cs typeface="Tahoma" charset="0"/>
@@ -9556,12 +9750,12 @@
                     <a:p>
                       <a:pPr algn="ctr" indent="0" marL="0">
                         <a:lnSpc>
-                          <a:spcPts val="1820"/>
+                          <a:spcPts val="1765"/>
                         </a:lnSpc>
                         <a:buNone/>
                       </a:pPr>
                       <a:r>
-                        <a:rPr lang="en-US" sz="1300" b="1" dirty="0">
+                        <a:rPr lang="en-US" sz="1250" b="1" dirty="0">
                           <a:solidFill>
                             <a:srgbClr val="F6F4EF"/>
                           </a:solidFill>
@@ -9571,7 +9765,7 @@
                         </a:rPr>
                         <a:t>5</a:t>
                       </a:r>
-                      <a:endParaRPr lang="en-US" sz="1300" dirty="0">
+                      <a:endParaRPr lang="en-US" sz="1250" dirty="0">
                         <a:latin typeface="Tahoma" charset="0"/>
                         <a:ea typeface="Tahoma" charset="0"/>
                         <a:cs typeface="Tahoma" charset="0"/>
@@ -9621,12 +9815,12 @@
                     <a:p>
                       <a:pPr algn="ctr" indent="0" marL="0">
                         <a:lnSpc>
-                          <a:spcPts val="1820"/>
+                          <a:spcPts val="1765"/>
                         </a:lnSpc>
                         <a:buNone/>
                       </a:pPr>
                       <a:r>
-                        <a:rPr lang="en-US" sz="1300" b="1" dirty="0">
+                        <a:rPr lang="en-US" sz="1250" b="1" dirty="0">
                           <a:solidFill>
                             <a:srgbClr val="F6F4EF"/>
                           </a:solidFill>
@@ -9636,7 +9830,7 @@
                         </a:rPr>
                         <a:t>4</a:t>
                       </a:r>
-                      <a:endParaRPr lang="en-US" sz="1300" dirty="0">
+                      <a:endParaRPr lang="en-US" sz="1250" dirty="0">
                         <a:latin typeface="Tahoma" charset="0"/>
                         <a:ea typeface="Tahoma" charset="0"/>
                         <a:cs typeface="Tahoma" charset="0"/>
@@ -9686,12 +9880,12 @@
                     <a:p>
                       <a:pPr algn="ctr" indent="0" marL="0">
                         <a:lnSpc>
-                          <a:spcPts val="1820"/>
+                          <a:spcPts val="1765"/>
                         </a:lnSpc>
                         <a:buNone/>
                       </a:pPr>
                       <a:r>
-                        <a:rPr lang="en-US" sz="1300" b="1" dirty="0">
+                        <a:rPr lang="en-US" sz="1250" b="1" dirty="0">
                           <a:solidFill>
                             <a:srgbClr val="F6F4EF"/>
                           </a:solidFill>
@@ -9701,7 +9895,7 @@
                         </a:rPr>
                         <a:t>3</a:t>
                       </a:r>
-                      <a:endParaRPr lang="en-US" sz="1300" dirty="0">
+                      <a:endParaRPr lang="en-US" sz="1250" dirty="0">
                         <a:latin typeface="Tahoma" charset="0"/>
                         <a:ea typeface="Tahoma" charset="0"/>
                         <a:cs typeface="Tahoma" charset="0"/>
@@ -9751,12 +9945,12 @@
                     <a:p>
                       <a:pPr algn="ctr" indent="0" marL="0">
                         <a:lnSpc>
-                          <a:spcPts val="1820"/>
+                          <a:spcPts val="1765"/>
                         </a:lnSpc>
                         <a:buNone/>
                       </a:pPr>
                       <a:r>
-                        <a:rPr lang="en-US" sz="1300" b="1" dirty="0">
+                        <a:rPr lang="en-US" sz="1250" b="1" dirty="0">
                           <a:solidFill>
                             <a:srgbClr val="F6F4EF"/>
                           </a:solidFill>
@@ -9766,7 +9960,7 @@
                         </a:rPr>
                         <a:t>2</a:t>
                       </a:r>
-                      <a:endParaRPr lang="en-US" sz="1300" dirty="0">
+                      <a:endParaRPr lang="en-US" sz="1250" dirty="0">
                         <a:latin typeface="Tahoma" charset="0"/>
                         <a:ea typeface="Tahoma" charset="0"/>
                         <a:cs typeface="Tahoma" charset="0"/>
@@ -9816,12 +10010,12 @@
                     <a:p>
                       <a:pPr algn="ctr" indent="0" marL="0">
                         <a:lnSpc>
-                          <a:spcPts val="1820"/>
+                          <a:spcPts val="1765"/>
                         </a:lnSpc>
                         <a:buNone/>
                       </a:pPr>
                       <a:r>
-                        <a:rPr lang="en-US" sz="1300" b="1" dirty="0">
+                        <a:rPr lang="en-US" sz="1250" b="1" dirty="0">
                           <a:solidFill>
                             <a:srgbClr val="F6F4EF"/>
                           </a:solidFill>
@@ -9831,7 +10025,7 @@
                         </a:rPr>
                         <a:t>1</a:t>
                       </a:r>
-                      <a:endParaRPr lang="en-US" sz="1300" dirty="0">
+                      <a:endParaRPr lang="en-US" sz="1250" dirty="0">
                         <a:latin typeface="Tahoma" charset="0"/>
                         <a:ea typeface="Tahoma" charset="0"/>
                         <a:cs typeface="Tahoma" charset="0"/>
@@ -9881,12 +10075,12 @@
                     <a:p>
                       <a:pPr indent="0" marL="0" rtl="1" algn="r">
                         <a:lnSpc>
-                          <a:spcPts val="1820"/>
+                          <a:spcPts val="1765"/>
                         </a:lnSpc>
                         <a:buNone/>
                       </a:pPr>
                       <a:r>
-                        <a:rPr lang="ar-EG" sz="1300" b="1" dirty="0">
+                        <a:rPr lang="ar-EG" sz="1250" b="1" dirty="0">
                           <a:solidFill>
                             <a:srgbClr val="F6F4EF"/>
                           </a:solidFill>
@@ -9896,7 +10090,7 @@
                         </a:rPr>
                         <a:t>الطالب</a:t>
                       </a:r>
-                      <a:endParaRPr lang="ar-EG" sz="1300" dirty="0">
+                      <a:endParaRPr lang="ar-EG" sz="1250" dirty="0">
                         <a:latin typeface="Tahoma" charset="0"/>
                         <a:ea typeface="Tahoma" charset="0"/>
                         <a:cs typeface="Tahoma" charset="0"/>
@@ -9948,12 +10142,12 @@
                     <a:p>
                       <a:pPr algn="ctr" indent="0" marL="0">
                         <a:lnSpc>
-                          <a:spcPts val="1820"/>
+                          <a:spcPts val="1765"/>
                         </a:lnSpc>
                         <a:buNone/>
                       </a:pPr>
                       <a:r>
-                        <a:rPr lang="en-US" sz="1300" dirty="0">
+                        <a:rPr lang="en-US" sz="1250" dirty="0">
                           <a:solidFill>
                             <a:srgbClr val="14233A"/>
                           </a:solidFill>
@@ -9963,7 +10157,7 @@
                         </a:rPr>
                         <a:t>3.4</a:t>
                       </a:r>
-                      <a:endParaRPr lang="en-US" sz="1300" dirty="0">
+                      <a:endParaRPr lang="en-US" sz="1250" dirty="0">
                         <a:latin typeface="Tahoma" charset="0"/>
                         <a:ea typeface="Tahoma" charset="0"/>
                         <a:cs typeface="Tahoma" charset="0"/>
@@ -10013,12 +10207,12 @@
                     <a:p>
                       <a:pPr algn="ctr" indent="0" marL="0">
                         <a:lnSpc>
-                          <a:spcPts val="1820"/>
+                          <a:spcPts val="1765"/>
                         </a:lnSpc>
                         <a:buNone/>
                       </a:pPr>
                       <a:r>
-                        <a:rPr lang="en-US" sz="1300" dirty="0">
+                        <a:rPr lang="en-US" sz="1250" dirty="0">
                           <a:solidFill>
                             <a:srgbClr val="14233A"/>
                           </a:solidFill>
@@ -10028,7 +10222,7 @@
                         </a:rPr>
                         <a:t>4.6</a:t>
                       </a:r>
-                      <a:endParaRPr lang="en-US" sz="1300" dirty="0">
+                      <a:endParaRPr lang="en-US" sz="1250" dirty="0">
                         <a:latin typeface="Tahoma" charset="0"/>
                         <a:ea typeface="Tahoma" charset="0"/>
                         <a:cs typeface="Tahoma" charset="0"/>
@@ -10084,12 +10278,12 @@
                     <a:p>
                       <a:pPr algn="ctr" indent="0" marL="0">
                         <a:lnSpc>
-                          <a:spcPts val="1820"/>
+                          <a:spcPts val="1765"/>
                         </a:lnSpc>
                         <a:buNone/>
                       </a:pPr>
                       <a:r>
-                        <a:rPr lang="en-US" sz="1300" dirty="0">
+                        <a:rPr lang="en-US" sz="1250" dirty="0">
                           <a:solidFill>
                             <a:srgbClr val="14233A"/>
                           </a:solidFill>
@@ -10099,7 +10293,7 @@
                         </a:rPr>
                         <a:t>3.2</a:t>
                       </a:r>
-                      <a:endParaRPr lang="en-US" sz="1300" dirty="0">
+                      <a:endParaRPr lang="en-US" sz="1250" dirty="0">
                         <a:latin typeface="Tahoma" charset="0"/>
                         <a:ea typeface="Tahoma" charset="0"/>
                         <a:cs typeface="Tahoma" charset="0"/>
@@ -10155,12 +10349,12 @@
                     <a:p>
                       <a:pPr algn="ctr" indent="0" marL="0">
                         <a:lnSpc>
-                          <a:spcPts val="1820"/>
+                          <a:spcPts val="1765"/>
                         </a:lnSpc>
                         <a:buNone/>
                       </a:pPr>
                       <a:r>
-                        <a:rPr lang="en-US" sz="1300" dirty="0">
+                        <a:rPr lang="en-US" sz="1250" dirty="0">
                           <a:solidFill>
                             <a:srgbClr val="14233A"/>
                           </a:solidFill>
@@ -10170,7 +10364,7 @@
                         </a:rPr>
                         <a:t>3.8</a:t>
                       </a:r>
-                      <a:endParaRPr lang="en-US" sz="1300" dirty="0">
+                      <a:endParaRPr lang="en-US" sz="1250" dirty="0">
                         <a:latin typeface="Tahoma" charset="0"/>
                         <a:ea typeface="Tahoma" charset="0"/>
                         <a:cs typeface="Tahoma" charset="0"/>
@@ -10226,12 +10420,12 @@
                     <a:p>
                       <a:pPr algn="ctr" indent="0" marL="0">
                         <a:lnSpc>
-                          <a:spcPts val="1820"/>
+                          <a:spcPts val="1765"/>
                         </a:lnSpc>
                         <a:buNone/>
                       </a:pPr>
                       <a:r>
-                        <a:rPr lang="en-US" sz="1300" dirty="0">
+                        <a:rPr lang="en-US" sz="1250" dirty="0">
                           <a:solidFill>
                             <a:srgbClr val="14233A"/>
                           </a:solidFill>
@@ -10241,7 +10435,7 @@
                         </a:rPr>
                         <a:t>3.0</a:t>
                       </a:r>
-                      <a:endParaRPr lang="en-US" sz="1300" dirty="0">
+                      <a:endParaRPr lang="en-US" sz="1250" dirty="0">
                         <a:latin typeface="Tahoma" charset="0"/>
                         <a:ea typeface="Tahoma" charset="0"/>
                         <a:cs typeface="Tahoma" charset="0"/>
@@ -10297,12 +10491,12 @@
                     <a:p>
                       <a:pPr algn="ctr" indent="0" marL="0">
                         <a:lnSpc>
-                          <a:spcPts val="1820"/>
+                          <a:spcPts val="1765"/>
                         </a:lnSpc>
                         <a:buNone/>
                       </a:pPr>
                       <a:r>
-                        <a:rPr lang="en-US" sz="1300" dirty="0">
+                        <a:rPr lang="en-US" sz="1250" dirty="0">
                           <a:solidFill>
                             <a:srgbClr val="14233A"/>
                           </a:solidFill>
@@ -10312,7 +10506,7 @@
                         </a:rPr>
                         <a:t>4.4</a:t>
                       </a:r>
-                      <a:endParaRPr lang="en-US" sz="1300" dirty="0">
+                      <a:endParaRPr lang="en-US" sz="1250" dirty="0">
                         <a:latin typeface="Tahoma" charset="0"/>
                         <a:ea typeface="Tahoma" charset="0"/>
                         <a:cs typeface="Tahoma" charset="0"/>
@@ -10368,12 +10562,12 @@
                     <a:p>
                       <a:pPr algn="ctr" indent="0" marL="0">
                         <a:lnSpc>
-                          <a:spcPts val="1820"/>
+                          <a:spcPts val="1765"/>
                         </a:lnSpc>
                         <a:buNone/>
                       </a:pPr>
                       <a:r>
-                        <a:rPr lang="en-US" sz="1300" dirty="0">
+                        <a:rPr lang="en-US" sz="1250" dirty="0">
                           <a:solidFill>
                             <a:srgbClr val="14233A"/>
                           </a:solidFill>
@@ -10383,7 +10577,7 @@
                         </a:rPr>
                         <a:t>3.6</a:t>
                       </a:r>
-                      <a:endParaRPr lang="en-US" sz="1300" dirty="0">
+                      <a:endParaRPr lang="en-US" sz="1250" dirty="0">
                         <a:latin typeface="Tahoma" charset="0"/>
                         <a:ea typeface="Tahoma" charset="0"/>
                         <a:cs typeface="Tahoma" charset="0"/>
@@ -10439,12 +10633,12 @@
                     <a:p>
                       <a:pPr algn="ctr" indent="0" marL="0">
                         <a:lnSpc>
-                          <a:spcPts val="1820"/>
+                          <a:spcPts val="1765"/>
                         </a:lnSpc>
                         <a:buNone/>
                       </a:pPr>
                       <a:r>
-                        <a:rPr lang="en-US" sz="1300" dirty="0">
+                        <a:rPr lang="en-US" sz="1250" dirty="0">
                           <a:solidFill>
                             <a:srgbClr val="14233A"/>
                           </a:solidFill>
@@ -10454,7 +10648,7 @@
                         </a:rPr>
                         <a:t>4.0</a:t>
                       </a:r>
-                      <a:endParaRPr lang="en-US" sz="1300" dirty="0">
+                      <a:endParaRPr lang="en-US" sz="1250" dirty="0">
                         <a:latin typeface="Tahoma" charset="0"/>
                         <a:ea typeface="Tahoma" charset="0"/>
                         <a:cs typeface="Tahoma" charset="0"/>
@@ -10510,12 +10704,12 @@
                     <a:p>
                       <a:pPr algn="ctr" indent="0" marL="0">
                         <a:lnSpc>
-                          <a:spcPts val="1820"/>
+                          <a:spcPts val="1765"/>
                         </a:lnSpc>
                         <a:buNone/>
                       </a:pPr>
                       <a:r>
-                        <a:rPr lang="en-US" sz="1300" dirty="0">
+                        <a:rPr lang="en-US" sz="1250" dirty="0">
                           <a:solidFill>
                             <a:srgbClr val="14233A"/>
                           </a:solidFill>
@@ -10525,7 +10719,7 @@
                         </a:rPr>
                         <a:t>2.8</a:t>
                       </a:r>
-                      <a:endParaRPr lang="en-US" sz="1300" dirty="0">
+                      <a:endParaRPr lang="en-US" sz="1250" dirty="0">
                         <a:latin typeface="Tahoma" charset="0"/>
                         <a:ea typeface="Tahoma" charset="0"/>
                         <a:cs typeface="Tahoma" charset="0"/>
@@ -10581,12 +10775,12 @@
                     <a:p>
                       <a:pPr algn="ctr" indent="0" marL="0">
                         <a:lnSpc>
-                          <a:spcPts val="1820"/>
+                          <a:spcPts val="1765"/>
                         </a:lnSpc>
                         <a:buNone/>
                       </a:pPr>
                       <a:r>
-                        <a:rPr lang="en-US" sz="1300" dirty="0">
+                        <a:rPr lang="en-US" sz="1250" dirty="0">
                           <a:solidFill>
                             <a:srgbClr val="14233A"/>
                           </a:solidFill>
@@ -10596,7 +10790,7 @@
                         </a:rPr>
                         <a:t>3.4</a:t>
                       </a:r>
-                      <a:endParaRPr lang="en-US" sz="1300" dirty="0">
+                      <a:endParaRPr lang="en-US" sz="1250" dirty="0">
                         <a:latin typeface="Tahoma" charset="0"/>
                         <a:ea typeface="Tahoma" charset="0"/>
                         <a:cs typeface="Tahoma" charset="0"/>
@@ -10652,12 +10846,12 @@
                     <a:p>
                       <a:pPr algn="ctr" indent="0" marL="0">
                         <a:lnSpc>
-                          <a:spcPts val="1820"/>
+                          <a:spcPts val="1765"/>
                         </a:lnSpc>
                         <a:buNone/>
                       </a:pPr>
                       <a:r>
-                        <a:rPr lang="en-US" sz="1300" dirty="0">
+                        <a:rPr lang="en-US" sz="1250" dirty="0">
                           <a:solidFill>
                             <a:srgbClr val="14233A"/>
                           </a:solidFill>
@@ -10667,7 +10861,7 @@
                         </a:rPr>
                         <a:t>4.2</a:t>
                       </a:r>
-                      <a:endParaRPr lang="en-US" sz="1300" dirty="0">
+                      <a:endParaRPr lang="en-US" sz="1250" dirty="0">
                         <a:latin typeface="Tahoma" charset="0"/>
                         <a:ea typeface="Tahoma" charset="0"/>
                         <a:cs typeface="Tahoma" charset="0"/>
@@ -10723,12 +10917,12 @@
                     <a:p>
                       <a:pPr algn="ctr" indent="0" marL="0">
                         <a:lnSpc>
-                          <a:spcPts val="1820"/>
+                          <a:spcPts val="1765"/>
                         </a:lnSpc>
                         <a:buNone/>
                       </a:pPr>
                       <a:r>
-                        <a:rPr lang="en-US" sz="1300" dirty="0">
+                        <a:rPr lang="en-US" sz="1250" dirty="0">
                           <a:solidFill>
                             <a:srgbClr val="14233A"/>
                           </a:solidFill>
@@ -10738,7 +10932,7 @@
                         </a:rPr>
                         <a:t>3.8</a:t>
                       </a:r>
-                      <a:endParaRPr lang="en-US" sz="1300" dirty="0">
+                      <a:endParaRPr lang="en-US" sz="1250" dirty="0">
                         <a:latin typeface="Tahoma" charset="0"/>
                         <a:ea typeface="Tahoma" charset="0"/>
                         <a:cs typeface="Tahoma" charset="0"/>
@@ -10794,12 +10988,12 @@
                     <a:p>
                       <a:pPr indent="0" marL="0" rtl="1" algn="r">
                         <a:lnSpc>
-                          <a:spcPts val="1820"/>
+                          <a:spcPts val="1765"/>
                         </a:lnSpc>
                         <a:buNone/>
                       </a:pPr>
                       <a:r>
-                        <a:rPr lang="ar-EG" sz="1300" dirty="0">
+                        <a:rPr lang="ar-EG" sz="1250" dirty="0">
                           <a:solidFill>
                             <a:srgbClr val="14233A"/>
                           </a:solidFill>
@@ -10809,7 +11003,7 @@
                         </a:rPr>
                         <a:t>درجة الاتجاه نحو التعليم الإلكتروني (attitude)</a:t>
                       </a:r>
-                      <a:endParaRPr lang="ar-EG" sz="1300" dirty="0">
+                      <a:endParaRPr lang="ar-EG" sz="1250" dirty="0">
                         <a:latin typeface="Tahoma" charset="0"/>
                         <a:ea typeface="Tahoma" charset="0"/>
                         <a:cs typeface="Tahoma" charset="0"/>
@@ -11700,11 +11894,11 @@
                     <a:p>
                       <a:pPr indent="0" marL="0">
                         <a:lnSpc>
-                          <a:spcPts val="1680"/>
+                          <a:spcPts val="1579"/>
                         </a:lnSpc>
                         <a:buNone/>
                       </a:pPr>
-                      <a:endParaRPr lang="en-US" sz="1200" dirty="0">
+                      <a:endParaRPr lang="en-US" sz="1150" dirty="0">
                         <a:latin typeface="Tahoma" charset="0"/>
                         <a:ea typeface="Tahoma" charset="0"/>
                         <a:cs typeface="Tahoma" charset="0"/>
@@ -11748,12 +11942,12 @@
                     <a:p>
                       <a:pPr algn="ctr" indent="0" marL="0">
                         <a:lnSpc>
-                          <a:spcPts val="1680"/>
+                          <a:spcPts val="1579"/>
                         </a:lnSpc>
                         <a:buNone/>
                       </a:pPr>
                       <a:r>
-                        <a:rPr lang="en-US" sz="1200" b="1" dirty="0">
+                        <a:rPr lang="en-US" sz="1150" b="1" dirty="0">
                           <a:solidFill>
                             <a:srgbClr val="F6F4EF"/>
                           </a:solidFill>
@@ -11763,7 +11957,7 @@
                         </a:rPr>
                         <a:t>N</a:t>
                       </a:r>
-                      <a:endParaRPr lang="en-US" sz="1200" dirty="0">
+                      <a:endParaRPr lang="en-US" sz="1150" dirty="0">
                         <a:latin typeface="Tahoma" charset="0"/>
                         <a:ea typeface="Tahoma" charset="0"/>
                         <a:cs typeface="Tahoma" charset="0"/>
@@ -11813,12 +12007,12 @@
                     <a:p>
                       <a:pPr algn="ctr" indent="0" marL="0">
                         <a:lnSpc>
-                          <a:spcPts val="1680"/>
+                          <a:spcPts val="1579"/>
                         </a:lnSpc>
                         <a:buNone/>
                       </a:pPr>
                       <a:r>
-                        <a:rPr lang="en-US" sz="1200" b="1" dirty="0">
+                        <a:rPr lang="en-US" sz="1150" b="1" dirty="0">
                           <a:solidFill>
                             <a:srgbClr val="F6F4EF"/>
                           </a:solidFill>
@@ -11828,7 +12022,7 @@
                         </a:rPr>
                         <a:t>Mean</a:t>
                       </a:r>
-                      <a:endParaRPr lang="en-US" sz="1200" dirty="0">
+                      <a:endParaRPr lang="en-US" sz="1150" dirty="0">
                         <a:latin typeface="Tahoma" charset="0"/>
                         <a:ea typeface="Tahoma" charset="0"/>
                         <a:cs typeface="Tahoma" charset="0"/>
@@ -11878,12 +12072,12 @@
                     <a:p>
                       <a:pPr algn="ctr" indent="0" marL="0">
                         <a:lnSpc>
-                          <a:spcPts val="1680"/>
+                          <a:spcPts val="1579"/>
                         </a:lnSpc>
                         <a:buNone/>
                       </a:pPr>
                       <a:r>
-                        <a:rPr lang="en-US" sz="1200" b="1" dirty="0">
+                        <a:rPr lang="en-US" sz="1150" b="1" dirty="0">
                           <a:solidFill>
                             <a:srgbClr val="F6F4EF"/>
                           </a:solidFill>
@@ -11893,7 +12087,7 @@
                         </a:rPr>
                         <a:t>Std. Deviation</a:t>
                       </a:r>
-                      <a:endParaRPr lang="en-US" sz="1200" dirty="0">
+                      <a:endParaRPr lang="en-US" sz="1150" dirty="0">
                         <a:latin typeface="Tahoma" charset="0"/>
                         <a:ea typeface="Tahoma" charset="0"/>
                         <a:cs typeface="Tahoma" charset="0"/>
@@ -11943,12 +12137,12 @@
                     <a:p>
                       <a:pPr algn="ctr" indent="0" marL="0">
                         <a:lnSpc>
-                          <a:spcPts val="1680"/>
+                          <a:spcPts val="1579"/>
                         </a:lnSpc>
                         <a:buNone/>
                       </a:pPr>
                       <a:r>
-                        <a:rPr lang="en-US" sz="1200" b="1" dirty="0">
+                        <a:rPr lang="en-US" sz="1150" b="1" dirty="0">
                           <a:solidFill>
                             <a:srgbClr val="F6F4EF"/>
                           </a:solidFill>
@@ -11958,7 +12152,7 @@
                         </a:rPr>
                         <a:t>Std. Error Mean</a:t>
                       </a:r>
-                      <a:endParaRPr lang="en-US" sz="1200" dirty="0">
+                      <a:endParaRPr lang="en-US" sz="1150" dirty="0">
                         <a:latin typeface="Tahoma" charset="0"/>
                         <a:ea typeface="Tahoma" charset="0"/>
                         <a:cs typeface="Tahoma" charset="0"/>
@@ -12010,12 +12204,12 @@
                     <a:p>
                       <a:pPr indent="0" marL="0">
                         <a:lnSpc>
-                          <a:spcPts val="1680"/>
+                          <a:spcPts val="1579"/>
                         </a:lnSpc>
                         <a:buNone/>
                       </a:pPr>
                       <a:r>
-                        <a:rPr lang="en-US" sz="1200" dirty="0">
+                        <a:rPr lang="en-US" sz="1150" dirty="0">
                           <a:solidFill>
                             <a:srgbClr val="14233A"/>
                           </a:solidFill>
@@ -12025,7 +12219,7 @@
                         </a:rPr>
                         <a:t>attitude</a:t>
                       </a:r>
-                      <a:endParaRPr lang="en-US" sz="1200" dirty="0">
+                      <a:endParaRPr lang="en-US" sz="1150" dirty="0">
                         <a:latin typeface="Tahoma" charset="0"/>
                         <a:ea typeface="Tahoma" charset="0"/>
                         <a:cs typeface="Tahoma" charset="0"/>
@@ -12075,12 +12269,12 @@
                     <a:p>
                       <a:pPr algn="ctr" indent="0" marL="0">
                         <a:lnSpc>
-                          <a:spcPts val="1680"/>
+                          <a:spcPts val="1579"/>
                         </a:lnSpc>
                         <a:buNone/>
                       </a:pPr>
                       <a:r>
-                        <a:rPr lang="en-US" sz="1200" dirty="0">
+                        <a:rPr lang="en-US" sz="1150" dirty="0">
                           <a:solidFill>
                             <a:srgbClr val="14233A"/>
                           </a:solidFill>
@@ -12090,7 +12284,7 @@
                         </a:rPr>
                         <a:t>12</a:t>
                       </a:r>
-                      <a:endParaRPr lang="en-US" sz="1200" dirty="0">
+                      <a:endParaRPr lang="en-US" sz="1150" dirty="0">
                         <a:latin typeface="Tahoma" charset="0"/>
                         <a:ea typeface="Tahoma" charset="0"/>
                         <a:cs typeface="Tahoma" charset="0"/>
@@ -12146,12 +12340,12 @@
                     <a:p>
                       <a:pPr algn="ctr" indent="0" marL="0">
                         <a:lnSpc>
-                          <a:spcPts val="1680"/>
+                          <a:spcPts val="1579"/>
                         </a:lnSpc>
                         <a:buNone/>
                       </a:pPr>
                       <a:r>
-                        <a:rPr lang="en-US" sz="1200" dirty="0">
+                        <a:rPr lang="en-US" sz="1150" dirty="0">
                           <a:solidFill>
                             <a:srgbClr val="14233A"/>
                           </a:solidFill>
@@ -12161,7 +12355,7 @@
                         </a:rPr>
                         <a:t>3.68</a:t>
                       </a:r>
-                      <a:endParaRPr lang="en-US" sz="1200" dirty="0">
+                      <a:endParaRPr lang="en-US" sz="1150" dirty="0">
                         <a:latin typeface="Tahoma" charset="0"/>
                         <a:ea typeface="Tahoma" charset="0"/>
                         <a:cs typeface="Tahoma" charset="0"/>
@@ -12217,12 +12411,12 @@
                     <a:p>
                       <a:pPr algn="ctr" indent="0" marL="0">
                         <a:lnSpc>
-                          <a:spcPts val="1680"/>
+                          <a:spcPts val="1579"/>
                         </a:lnSpc>
                         <a:buNone/>
                       </a:pPr>
                       <a:r>
-                        <a:rPr lang="en-US" sz="1200" dirty="0">
+                        <a:rPr lang="en-US" sz="1150" dirty="0">
                           <a:solidFill>
                             <a:srgbClr val="14233A"/>
                           </a:solidFill>
@@ -12232,7 +12426,7 @@
                         </a:rPr>
                         <a:t>.556</a:t>
                       </a:r>
-                      <a:endParaRPr lang="en-US" sz="1200" dirty="0">
+                      <a:endParaRPr lang="en-US" sz="1150" dirty="0">
                         <a:latin typeface="Tahoma" charset="0"/>
                         <a:ea typeface="Tahoma" charset="0"/>
                         <a:cs typeface="Tahoma" charset="0"/>
@@ -12288,12 +12482,12 @@
                     <a:p>
                       <a:pPr algn="ctr" indent="0" marL="0">
                         <a:lnSpc>
-                          <a:spcPts val="1680"/>
+                          <a:spcPts val="1579"/>
                         </a:lnSpc>
                         <a:buNone/>
                       </a:pPr>
                       <a:r>
-                        <a:rPr lang="en-US" sz="1200" dirty="0">
+                        <a:rPr lang="en-US" sz="1150" dirty="0">
                           <a:solidFill>
                             <a:srgbClr val="14233A"/>
                           </a:solidFill>
@@ -12303,7 +12497,7 @@
                         </a:rPr>
                         <a:t>.160</a:t>
                       </a:r>
-                      <a:endParaRPr lang="en-US" sz="1200" dirty="0">
+                      <a:endParaRPr lang="en-US" sz="1150" dirty="0">
                         <a:latin typeface="Tahoma" charset="0"/>
                         <a:ea typeface="Tahoma" charset="0"/>
                         <a:cs typeface="Tahoma" charset="0"/>
@@ -12565,11 +12759,11 @@
                     <a:p>
                       <a:pPr indent="0" marL="0">
                         <a:lnSpc>
-                          <a:spcPts val="1680"/>
+                          <a:spcPts val="1579"/>
                         </a:lnSpc>
                         <a:buNone/>
                       </a:pPr>
-                      <a:endParaRPr lang="en-US" sz="1200" dirty="0">
+                      <a:endParaRPr lang="en-US" sz="1150" dirty="0">
                         <a:latin typeface="Tahoma" charset="0"/>
                         <a:ea typeface="Tahoma" charset="0"/>
                         <a:cs typeface="Tahoma" charset="0"/>
@@ -12613,12 +12807,12 @@
                     <a:p>
                       <a:pPr algn="ctr" indent="0" marL="0">
                         <a:lnSpc>
-                          <a:spcPts val="1680"/>
+                          <a:spcPts val="1579"/>
                         </a:lnSpc>
                         <a:buNone/>
                       </a:pPr>
                       <a:r>
-                        <a:rPr lang="en-US" sz="1200" b="1" dirty="0">
+                        <a:rPr lang="en-US" sz="1150" b="1" dirty="0">
                           <a:solidFill>
                             <a:srgbClr val="F6F4EF"/>
                           </a:solidFill>
@@ -12628,7 +12822,7 @@
                         </a:rPr>
                         <a:t>t</a:t>
                       </a:r>
-                      <a:endParaRPr lang="en-US" sz="1200" dirty="0">
+                      <a:endParaRPr lang="en-US" sz="1150" dirty="0">
                         <a:latin typeface="Tahoma" charset="0"/>
                         <a:ea typeface="Tahoma" charset="0"/>
                         <a:cs typeface="Tahoma" charset="0"/>
@@ -12678,12 +12872,12 @@
                     <a:p>
                       <a:pPr algn="ctr" indent="0" marL="0">
                         <a:lnSpc>
-                          <a:spcPts val="1680"/>
+                          <a:spcPts val="1579"/>
                         </a:lnSpc>
                         <a:buNone/>
                       </a:pPr>
                       <a:r>
-                        <a:rPr lang="en-US" sz="1200" b="1" dirty="0">
+                        <a:rPr lang="en-US" sz="1150" b="1" dirty="0">
                           <a:solidFill>
                             <a:srgbClr val="F6F4EF"/>
                           </a:solidFill>
@@ -12693,7 +12887,7 @@
                         </a:rPr>
                         <a:t>df</a:t>
                       </a:r>
-                      <a:endParaRPr lang="en-US" sz="1200" dirty="0">
+                      <a:endParaRPr lang="en-US" sz="1150" dirty="0">
                         <a:latin typeface="Tahoma" charset="0"/>
                         <a:ea typeface="Tahoma" charset="0"/>
                         <a:cs typeface="Tahoma" charset="0"/>
@@ -12743,12 +12937,12 @@
                     <a:p>
                       <a:pPr algn="ctr" indent="0" marL="0">
                         <a:lnSpc>
-                          <a:spcPts val="1680"/>
+                          <a:spcPts val="1579"/>
                         </a:lnSpc>
                         <a:buNone/>
                       </a:pPr>
                       <a:r>
-                        <a:rPr lang="en-US" sz="1200" b="1" dirty="0">
+                        <a:rPr lang="en-US" sz="1150" b="1" dirty="0">
                           <a:solidFill>
                             <a:srgbClr val="F6F4EF"/>
                           </a:solidFill>
@@ -12758,7 +12952,7 @@
                         </a:rPr>
                         <a:t>Sig. (2-tailed)</a:t>
                       </a:r>
-                      <a:endParaRPr lang="en-US" sz="1200" dirty="0">
+                      <a:endParaRPr lang="en-US" sz="1150" dirty="0">
                         <a:latin typeface="Tahoma" charset="0"/>
                         <a:ea typeface="Tahoma" charset="0"/>
                         <a:cs typeface="Tahoma" charset="0"/>
@@ -12808,12 +13002,12 @@
                     <a:p>
                       <a:pPr algn="ctr" indent="0" marL="0">
                         <a:lnSpc>
-                          <a:spcPts val="1680"/>
+                          <a:spcPts val="1579"/>
                         </a:lnSpc>
                         <a:buNone/>
                       </a:pPr>
                       <a:r>
-                        <a:rPr lang="en-US" sz="1200" b="1" dirty="0">
+                        <a:rPr lang="en-US" sz="1150" b="1" dirty="0">
                           <a:solidFill>
                             <a:srgbClr val="F6F4EF"/>
                           </a:solidFill>
@@ -12823,7 +13017,7 @@
                         </a:rPr>
                         <a:t>Mean Difference</a:t>
                       </a:r>
-                      <a:endParaRPr lang="en-US" sz="1200" dirty="0">
+                      <a:endParaRPr lang="en-US" sz="1150" dirty="0">
                         <a:latin typeface="Tahoma" charset="0"/>
                         <a:ea typeface="Tahoma" charset="0"/>
                         <a:cs typeface="Tahoma" charset="0"/>
@@ -12873,12 +13067,12 @@
                     <a:p>
                       <a:pPr algn="ctr" indent="0" marL="0">
                         <a:lnSpc>
-                          <a:spcPts val="1680"/>
+                          <a:spcPts val="1579"/>
                         </a:lnSpc>
                         <a:buNone/>
                       </a:pPr>
                       <a:r>
-                        <a:rPr lang="en-US" sz="1200" b="1" dirty="0">
+                        <a:rPr lang="en-US" sz="1150" b="1" dirty="0">
                           <a:solidFill>
                             <a:srgbClr val="F6F4EF"/>
                           </a:solidFill>
@@ -12888,7 +13082,7 @@
                         </a:rPr>
                         <a:t>95% CI Lower</a:t>
                       </a:r>
-                      <a:endParaRPr lang="en-US" sz="1200" dirty="0">
+                      <a:endParaRPr lang="en-US" sz="1150" dirty="0">
                         <a:latin typeface="Tahoma" charset="0"/>
                         <a:ea typeface="Tahoma" charset="0"/>
                         <a:cs typeface="Tahoma" charset="0"/>
@@ -12938,12 +13132,12 @@
                     <a:p>
                       <a:pPr algn="ctr" indent="0" marL="0">
                         <a:lnSpc>
-                          <a:spcPts val="1680"/>
+                          <a:spcPts val="1579"/>
                         </a:lnSpc>
                         <a:buNone/>
                       </a:pPr>
                       <a:r>
-                        <a:rPr lang="en-US" sz="1200" b="1" dirty="0">
+                        <a:rPr lang="en-US" sz="1150" b="1" dirty="0">
                           <a:solidFill>
                             <a:srgbClr val="F6F4EF"/>
                           </a:solidFill>
@@ -12953,7 +13147,7 @@
                         </a:rPr>
                         <a:t>95% CI Upper</a:t>
                       </a:r>
-                      <a:endParaRPr lang="en-US" sz="1200" dirty="0">
+                      <a:endParaRPr lang="en-US" sz="1150" dirty="0">
                         <a:latin typeface="Tahoma" charset="0"/>
                         <a:ea typeface="Tahoma" charset="0"/>
                         <a:cs typeface="Tahoma" charset="0"/>
@@ -13005,12 +13199,12 @@
                     <a:p>
                       <a:pPr indent="0" marL="0">
                         <a:lnSpc>
-                          <a:spcPts val="1680"/>
+                          <a:spcPts val="1579"/>
                         </a:lnSpc>
                         <a:buNone/>
                       </a:pPr>
                       <a:r>
-                        <a:rPr lang="en-US" sz="1200" dirty="0">
+                        <a:rPr lang="en-US" sz="1150" dirty="0">
                           <a:solidFill>
                             <a:srgbClr val="14233A"/>
                           </a:solidFill>
@@ -13020,7 +13214,7 @@
                         </a:rPr>
                         <a:t>attitude</a:t>
                       </a:r>
-                      <a:endParaRPr lang="en-US" sz="1200" dirty="0">
+                      <a:endParaRPr lang="en-US" sz="1150" dirty="0">
                         <a:latin typeface="Tahoma" charset="0"/>
                         <a:ea typeface="Tahoma" charset="0"/>
                         <a:cs typeface="Tahoma" charset="0"/>
@@ -13070,12 +13264,12 @@
                     <a:p>
                       <a:pPr algn="ctr" indent="0" marL="0">
                         <a:lnSpc>
-                          <a:spcPts val="1680"/>
+                          <a:spcPts val="1579"/>
                         </a:lnSpc>
                         <a:buNone/>
                       </a:pPr>
                       <a:r>
-                        <a:rPr lang="en-US" sz="1200" dirty="0">
+                        <a:rPr lang="en-US" sz="1150" dirty="0">
                           <a:solidFill>
                             <a:srgbClr val="14233A"/>
                           </a:solidFill>
@@ -13085,7 +13279,7 @@
                         </a:rPr>
                         <a:t>4.260</a:t>
                       </a:r>
-                      <a:endParaRPr lang="en-US" sz="1200" dirty="0">
+                      <a:endParaRPr lang="en-US" sz="1150" dirty="0">
                         <a:latin typeface="Tahoma" charset="0"/>
                         <a:ea typeface="Tahoma" charset="0"/>
                         <a:cs typeface="Tahoma" charset="0"/>
@@ -13141,12 +13335,12 @@
                     <a:p>
                       <a:pPr algn="ctr" indent="0" marL="0">
                         <a:lnSpc>
-                          <a:spcPts val="1680"/>
+                          <a:spcPts val="1579"/>
                         </a:lnSpc>
                         <a:buNone/>
                       </a:pPr>
                       <a:r>
-                        <a:rPr lang="en-US" sz="1200" dirty="0">
+                        <a:rPr lang="en-US" sz="1150" dirty="0">
                           <a:solidFill>
                             <a:srgbClr val="14233A"/>
                           </a:solidFill>
@@ -13156,7 +13350,7 @@
                         </a:rPr>
                         <a:t>11</a:t>
                       </a:r>
-                      <a:endParaRPr lang="en-US" sz="1200" dirty="0">
+                      <a:endParaRPr lang="en-US" sz="1150" dirty="0">
                         <a:latin typeface="Tahoma" charset="0"/>
                         <a:ea typeface="Tahoma" charset="0"/>
                         <a:cs typeface="Tahoma" charset="0"/>
@@ -13212,12 +13406,12 @@
                     <a:p>
                       <a:pPr algn="ctr" indent="0" marL="0">
                         <a:lnSpc>
-                          <a:spcPts val="1680"/>
+                          <a:spcPts val="1579"/>
                         </a:lnSpc>
                         <a:buNone/>
                       </a:pPr>
                       <a:r>
-                        <a:rPr lang="en-US" sz="1200" dirty="0">
+                        <a:rPr lang="en-US" sz="1150" dirty="0">
                           <a:solidFill>
                             <a:srgbClr val="9A5B00"/>
                           </a:solidFill>
@@ -13227,7 +13421,7 @@
                         </a:rPr>
                         <a:t>.001</a:t>
                       </a:r>
-                      <a:endParaRPr lang="en-US" sz="1200" dirty="0">
+                      <a:endParaRPr lang="en-US" sz="1150" dirty="0">
                         <a:latin typeface="Tahoma" charset="0"/>
                         <a:ea typeface="Tahoma" charset="0"/>
                         <a:cs typeface="Tahoma" charset="0"/>
@@ -13283,12 +13477,12 @@
                     <a:p>
                       <a:pPr algn="ctr" indent="0" marL="0">
                         <a:lnSpc>
-                          <a:spcPts val="1680"/>
+                          <a:spcPts val="1579"/>
                         </a:lnSpc>
                         <a:buNone/>
                       </a:pPr>
                       <a:r>
-                        <a:rPr lang="en-US" sz="1200" dirty="0">
+                        <a:rPr lang="en-US" sz="1150" dirty="0">
                           <a:solidFill>
                             <a:srgbClr val="14233A"/>
                           </a:solidFill>
@@ -13298,7 +13492,7 @@
                         </a:rPr>
                         <a:t>.683</a:t>
                       </a:r>
-                      <a:endParaRPr lang="en-US" sz="1200" dirty="0">
+                      <a:endParaRPr lang="en-US" sz="1150" dirty="0">
                         <a:latin typeface="Tahoma" charset="0"/>
                         <a:ea typeface="Tahoma" charset="0"/>
                         <a:cs typeface="Tahoma" charset="0"/>
@@ -13354,12 +13548,12 @@
                     <a:p>
                       <a:pPr algn="ctr" indent="0" marL="0">
                         <a:lnSpc>
-                          <a:spcPts val="1680"/>
+                          <a:spcPts val="1579"/>
                         </a:lnSpc>
                         <a:buNone/>
                       </a:pPr>
                       <a:r>
-                        <a:rPr lang="en-US" sz="1200" dirty="0">
+                        <a:rPr lang="en-US" sz="1150" dirty="0">
                           <a:solidFill>
                             <a:srgbClr val="14233A"/>
                           </a:solidFill>
@@ -13369,7 +13563,7 @@
                         </a:rPr>
                         <a:t>.33</a:t>
                       </a:r>
-                      <a:endParaRPr lang="en-US" sz="1200" dirty="0">
+                      <a:endParaRPr lang="en-US" sz="1150" dirty="0">
                         <a:latin typeface="Tahoma" charset="0"/>
                         <a:ea typeface="Tahoma" charset="0"/>
                         <a:cs typeface="Tahoma" charset="0"/>
@@ -13425,12 +13619,12 @@
                     <a:p>
                       <a:pPr algn="ctr" indent="0" marL="0">
                         <a:lnSpc>
-                          <a:spcPts val="1680"/>
+                          <a:spcPts val="1579"/>
                         </a:lnSpc>
                         <a:buNone/>
                       </a:pPr>
                       <a:r>
-                        <a:rPr lang="en-US" sz="1200" dirty="0">
+                        <a:rPr lang="en-US" sz="1150" dirty="0">
                           <a:solidFill>
                             <a:srgbClr val="14233A"/>
                           </a:solidFill>
@@ -13440,7 +13634,7 @@
                         </a:rPr>
                         <a:t>1.04</a:t>
                       </a:r>
-                      <a:endParaRPr lang="en-US" sz="1200" dirty="0">
+                      <a:endParaRPr lang="en-US" sz="1150" dirty="0">
                         <a:latin typeface="Tahoma" charset="0"/>
                         <a:ea typeface="Tahoma" charset="0"/>
                         <a:cs typeface="Tahoma" charset="0"/>
@@ -13697,6 +13891,200 @@
   <p:clrMapOvr>
     <a:masterClrMapping/>
   </p:clrMapOvr>
+  <p:timing>
+    <p:tnLst>
+      <p:par>
+        <p:cTn id="1" dur="indefinite" restart="never" nodeType="tmRoot">
+          <p:childTnLst>
+            <p:seq concurrent="1" nextAc="seek">
+              <p:cTn id="2" dur="indefinite" nodeType="mainSeq">
+                <p:childTnLst>
+                  <p:par>
+                    <p:cTn id="3" fill="hold">
+                      <p:stCondLst>
+                        <p:cond delay="indefinite"/>
+                      </p:stCondLst>
+                      <p:childTnLst>
+                        <p:par>
+                          <p:cTn id="4" fill="hold">
+                            <p:stCondLst>
+                              <p:cond delay="0"/>
+                            </p:stCondLst>
+                            <p:childTnLst>
+                              <p:par>
+                                <p:cTn id="5" presetID="10" presetClass="entr" presetSubtype="0" fill="hold" grpId="0" nodeType="clickEffect">
+                                  <p:stCondLst>
+                                    <p:cond delay="0"/>
+                                  </p:stCondLst>
+                                  <p:childTnLst>
+                                    <p:set>
+                                      <p:cBhvr>
+                                        <p:cTn id="105" dur="1" fill="hold">
+                                          <p:stCondLst>
+                                            <p:cond delay="0"/>
+                                          </p:stCondLst>
+                                        </p:cTn>
+                                        <p:tgtEl>
+                                          <p:spTgt spid="3"/>
+                                        </p:tgtEl>
+                                        <p:attrNameLst>
+                                          <p:attrName>style.visibility</p:attrName>
+                                        </p:attrNameLst>
+                                      </p:cBhvr>
+                                      <p:to>
+                                        <p:strVal val="visible"/>
+                                      </p:to>
+                                    </p:set>
+                                    <p:animEffect transition="in" filter="fade">
+                                      <p:cBhvr>
+                                        <p:cTn id="6" dur="500"/>
+                                        <p:tgtEl>
+                                          <p:spTgt spid="3"/>
+                                        </p:tgtEl>
+                                      </p:cBhvr>
+                                    </p:animEffect>
+                                  </p:childTnLst>
+                                </p:cTn>
+                              </p:par>
+                              <p:par>
+                                <p:cTn id="7" presetID="10" presetClass="entr" presetSubtype="0" fill="hold" grpId="0" nodeType="withEffect">
+                                  <p:stCondLst>
+                                    <p:cond delay="0"/>
+                                  </p:stCondLst>
+                                  <p:childTnLst>
+                                    <p:set>
+                                      <p:cBhvr>
+                                        <p:cTn id="107" dur="1" fill="hold">
+                                          <p:stCondLst>
+                                            <p:cond delay="0"/>
+                                          </p:stCondLst>
+                                        </p:cTn>
+                                        <p:tgtEl>
+                                          <p:spTgt spid="16"/>
+                                        </p:tgtEl>
+                                        <p:attrNameLst>
+                                          <p:attrName>style.visibility</p:attrName>
+                                        </p:attrNameLst>
+                                      </p:cBhvr>
+                                      <p:to>
+                                        <p:strVal val="visible"/>
+                                      </p:to>
+                                    </p:set>
+                                    <p:animEffect transition="in" filter="fade">
+                                      <p:cBhvr>
+                                        <p:cTn id="8" dur="500"/>
+                                        <p:tgtEl>
+                                          <p:spTgt spid="16"/>
+                                        </p:tgtEl>
+                                      </p:cBhvr>
+                                    </p:animEffect>
+                                  </p:childTnLst>
+                                </p:cTn>
+                              </p:par>
+                              <p:par>
+                                <p:cTn id="9" presetID="10" presetClass="entr" presetSubtype="0" fill="hold" grpId="0" nodeType="withEffect">
+                                  <p:stCondLst>
+                                    <p:cond delay="0"/>
+                                  </p:stCondLst>
+                                  <p:childTnLst>
+                                    <p:set>
+                                      <p:cBhvr>
+                                        <p:cTn id="109" dur="1" fill="hold">
+                                          <p:stCondLst>
+                                            <p:cond delay="0"/>
+                                          </p:stCondLst>
+                                        </p:cTn>
+                                        <p:tgtEl>
+                                          <p:spTgt spid="17"/>
+                                        </p:tgtEl>
+                                        <p:attrNameLst>
+                                          <p:attrName>style.visibility</p:attrName>
+                                        </p:attrNameLst>
+                                      </p:cBhvr>
+                                      <p:to>
+                                        <p:strVal val="visible"/>
+                                      </p:to>
+                                    </p:set>
+                                    <p:animEffect transition="in" filter="fade">
+                                      <p:cBhvr>
+                                        <p:cTn id="10" dur="500"/>
+                                        <p:tgtEl>
+                                          <p:spTgt spid="17"/>
+                                        </p:tgtEl>
+                                      </p:cBhvr>
+                                    </p:animEffect>
+                                  </p:childTnLst>
+                                </p:cTn>
+                              </p:par>
+                              <p:par>
+                                <p:cTn id="11" presetID="10" presetClass="entr" presetSubtype="0" fill="hold" grpId="0" nodeType="withEffect">
+                                  <p:stCondLst>
+                                    <p:cond delay="0"/>
+                                  </p:stCondLst>
+                                  <p:childTnLst>
+                                    <p:set>
+                                      <p:cBhvr>
+                                        <p:cTn id="111" dur="1" fill="hold">
+                                          <p:stCondLst>
+                                            <p:cond delay="0"/>
+                                          </p:stCondLst>
+                                        </p:cTn>
+                                        <p:tgtEl>
+                                          <p:spTgt spid="18"/>
+                                        </p:tgtEl>
+                                        <p:attrNameLst>
+                                          <p:attrName>style.visibility</p:attrName>
+                                        </p:attrNameLst>
+                                      </p:cBhvr>
+                                      <p:to>
+                                        <p:strVal val="visible"/>
+                                      </p:to>
+                                    </p:set>
+                                    <p:animEffect transition="in" filter="fade">
+                                      <p:cBhvr>
+                                        <p:cTn id="12" dur="500"/>
+                                        <p:tgtEl>
+                                          <p:spTgt spid="18"/>
+                                        </p:tgtEl>
+                                      </p:cBhvr>
+                                    </p:animEffect>
+                                  </p:childTnLst>
+                                </p:cTn>
+                              </p:par>
+                            </p:childTnLst>
+                          </p:cTn>
+                        </p:par>
+                      </p:childTnLst>
+                    </p:cTn>
+                  </p:par>
+                </p:childTnLst>
+              </p:cTn>
+              <p:prevCondLst>
+                <p:cond evt="onPrev" delay="0">
+                  <p:tgtEl>
+                    <p:sldTgt/>
+                  </p:tgtEl>
+                </p:cond>
+              </p:prevCondLst>
+              <p:nextCondLst>
+                <p:cond evt="onNext" delay="0">
+                  <p:tgtEl>
+                    <p:sldTgt/>
+                  </p:tgtEl>
+                </p:cond>
+              </p:nextCondLst>
+            </p:seq>
+          </p:childTnLst>
+        </p:cTn>
+      </p:par>
+    </p:tnLst>
+    <p:bldLst>
+      <p:bldP spid="3" grpId="0" animBg="1"/>
+      <p:bldP spid="16" grpId="0" animBg="1"/>
+      <p:bldP spid="17" grpId="0" animBg="1"/>
+      <p:bldP spid="18" grpId="0" animBg="1"/>
+    </p:bldLst>
+  </p:timing>
 </p:sld>
 </file>
 
@@ -18249,12 +18637,12 @@
                     <a:p>
                       <a:pPr indent="0" marL="0">
                         <a:lnSpc>
-                          <a:spcPts val="1475"/>
+                          <a:spcPts val="1386"/>
                         </a:lnSpc>
                         <a:buNone/>
                       </a:pPr>
                       <a:r>
-                        <a:rPr lang="en-US" sz="1054" b="1" dirty="0">
+                        <a:rPr lang="en-US" sz="1000" b="1" dirty="0">
                           <a:solidFill>
                             <a:srgbClr val="F6F4EF"/>
                           </a:solidFill>
@@ -18264,7 +18652,7 @@
                         </a:rPr>
                         <a:t>Pair 1</a:t>
                       </a:r>
-                      <a:endParaRPr lang="en-US" sz="1054" dirty="0">
+                      <a:endParaRPr lang="en-US" sz="1000" dirty="0">
                         <a:latin typeface="Tahoma" charset="0"/>
                         <a:ea typeface="Tahoma" charset="0"/>
                         <a:cs typeface="Tahoma" charset="0"/>
@@ -18308,12 +18696,12 @@
                     <a:p>
                       <a:pPr algn="ctr" indent="0" marL="0">
                         <a:lnSpc>
-                          <a:spcPts val="1475"/>
+                          <a:spcPts val="1386"/>
                         </a:lnSpc>
                         <a:buNone/>
                       </a:pPr>
                       <a:r>
-                        <a:rPr lang="en-US" sz="1054" b="1" dirty="0">
+                        <a:rPr lang="en-US" sz="1000" b="1" dirty="0">
                           <a:solidFill>
                             <a:srgbClr val="F6F4EF"/>
                           </a:solidFill>
@@ -18323,7 +18711,7 @@
                         </a:rPr>
                         <a:t>Mean</a:t>
                       </a:r>
-                      <a:endParaRPr lang="en-US" sz="1054" dirty="0">
+                      <a:endParaRPr lang="en-US" sz="1000" dirty="0">
                         <a:latin typeface="Tahoma" charset="0"/>
                         <a:ea typeface="Tahoma" charset="0"/>
                         <a:cs typeface="Tahoma" charset="0"/>
@@ -18373,12 +18761,12 @@
                     <a:p>
                       <a:pPr algn="ctr" indent="0" marL="0">
                         <a:lnSpc>
-                          <a:spcPts val="1475"/>
+                          <a:spcPts val="1386"/>
                         </a:lnSpc>
                         <a:buNone/>
                       </a:pPr>
                       <a:r>
-                        <a:rPr lang="en-US" sz="1054" b="1" dirty="0">
+                        <a:rPr lang="en-US" sz="1000" b="1" dirty="0">
                           <a:solidFill>
                             <a:srgbClr val="F6F4EF"/>
                           </a:solidFill>
@@ -18388,7 +18776,7 @@
                         </a:rPr>
                         <a:t>N</a:t>
                       </a:r>
-                      <a:endParaRPr lang="en-US" sz="1054" dirty="0">
+                      <a:endParaRPr lang="en-US" sz="1000" dirty="0">
                         <a:latin typeface="Tahoma" charset="0"/>
                         <a:ea typeface="Tahoma" charset="0"/>
                         <a:cs typeface="Tahoma" charset="0"/>
@@ -18438,12 +18826,12 @@
                     <a:p>
                       <a:pPr algn="ctr" indent="0" marL="0">
                         <a:lnSpc>
-                          <a:spcPts val="1475"/>
+                          <a:spcPts val="1386"/>
                         </a:lnSpc>
                         <a:buNone/>
                       </a:pPr>
                       <a:r>
-                        <a:rPr lang="en-US" sz="1054" b="1" dirty="0">
+                        <a:rPr lang="en-US" sz="1000" b="1" dirty="0">
                           <a:solidFill>
                             <a:srgbClr val="F6F4EF"/>
                           </a:solidFill>
@@ -18453,7 +18841,7 @@
                         </a:rPr>
                         <a:t>Std. Deviation</a:t>
                       </a:r>
-                      <a:endParaRPr lang="en-US" sz="1054" dirty="0">
+                      <a:endParaRPr lang="en-US" sz="1000" dirty="0">
                         <a:latin typeface="Tahoma" charset="0"/>
                         <a:ea typeface="Tahoma" charset="0"/>
                         <a:cs typeface="Tahoma" charset="0"/>
@@ -18503,12 +18891,12 @@
                     <a:p>
                       <a:pPr algn="ctr" indent="0" marL="0">
                         <a:lnSpc>
-                          <a:spcPts val="1475"/>
+                          <a:spcPts val="1386"/>
                         </a:lnSpc>
                         <a:buNone/>
                       </a:pPr>
                       <a:r>
-                        <a:rPr lang="en-US" sz="1054" b="1" dirty="0">
+                        <a:rPr lang="en-US" sz="1000" b="1" dirty="0">
                           <a:solidFill>
                             <a:srgbClr val="F6F4EF"/>
                           </a:solidFill>
@@ -18518,7 +18906,7 @@
                         </a:rPr>
                         <a:t>Std. Error Mean</a:t>
                       </a:r>
-                      <a:endParaRPr lang="en-US" sz="1054" dirty="0">
+                      <a:endParaRPr lang="en-US" sz="1000" dirty="0">
                         <a:latin typeface="Tahoma" charset="0"/>
                         <a:ea typeface="Tahoma" charset="0"/>
                         <a:cs typeface="Tahoma" charset="0"/>
@@ -18570,12 +18958,12 @@
                     <a:p>
                       <a:pPr indent="0" marL="0">
                         <a:lnSpc>
-                          <a:spcPts val="1475"/>
+                          <a:spcPts val="1386"/>
                         </a:lnSpc>
                         <a:buNone/>
                       </a:pPr>
                       <a:r>
-                        <a:rPr lang="en-US" sz="1054" dirty="0">
+                        <a:rPr lang="en-US" sz="1000" dirty="0">
                           <a:solidFill>
                             <a:srgbClr val="14233A"/>
                           </a:solidFill>
@@ -18585,7 +18973,7 @@
                         </a:rPr>
                         <a:t>before</a:t>
                       </a:r>
-                      <a:endParaRPr lang="en-US" sz="1054" dirty="0">
+                      <a:endParaRPr lang="en-US" sz="1000" dirty="0">
                         <a:latin typeface="Tahoma" charset="0"/>
                         <a:ea typeface="Tahoma" charset="0"/>
                         <a:cs typeface="Tahoma" charset="0"/>
@@ -18635,12 +19023,12 @@
                     <a:p>
                       <a:pPr algn="ctr" indent="0" marL="0">
                         <a:lnSpc>
-                          <a:spcPts val="1475"/>
+                          <a:spcPts val="1386"/>
                         </a:lnSpc>
                         <a:buNone/>
                       </a:pPr>
                       <a:r>
-                        <a:rPr lang="en-US" sz="1054" dirty="0">
+                        <a:rPr lang="en-US" sz="1000" dirty="0">
                           <a:solidFill>
                             <a:srgbClr val="14233A"/>
                           </a:solidFill>
@@ -18650,7 +19038,7 @@
                         </a:rPr>
                         <a:t>20.17</a:t>
                       </a:r>
-                      <a:endParaRPr lang="en-US" sz="1054" dirty="0">
+                      <a:endParaRPr lang="en-US" sz="1000" dirty="0">
                         <a:latin typeface="Tahoma" charset="0"/>
                         <a:ea typeface="Tahoma" charset="0"/>
                         <a:cs typeface="Tahoma" charset="0"/>
@@ -18706,12 +19094,12 @@
                     <a:p>
                       <a:pPr algn="ctr" indent="0" marL="0">
                         <a:lnSpc>
-                          <a:spcPts val="1475"/>
+                          <a:spcPts val="1386"/>
                         </a:lnSpc>
                         <a:buNone/>
                       </a:pPr>
                       <a:r>
-                        <a:rPr lang="en-US" sz="1054" dirty="0">
+                        <a:rPr lang="en-US" sz="1000" dirty="0">
                           <a:solidFill>
                             <a:srgbClr val="14233A"/>
                           </a:solidFill>
@@ -18721,7 +19109,7 @@
                         </a:rPr>
                         <a:t>6</a:t>
                       </a:r>
-                      <a:endParaRPr lang="en-US" sz="1054" dirty="0">
+                      <a:endParaRPr lang="en-US" sz="1000" dirty="0">
                         <a:latin typeface="Tahoma" charset="0"/>
                         <a:ea typeface="Tahoma" charset="0"/>
                         <a:cs typeface="Tahoma" charset="0"/>
@@ -18777,12 +19165,12 @@
                     <a:p>
                       <a:pPr algn="ctr" indent="0" marL="0">
                         <a:lnSpc>
-                          <a:spcPts val="1475"/>
+                          <a:spcPts val="1386"/>
                         </a:lnSpc>
                         <a:buNone/>
                       </a:pPr>
                       <a:r>
-                        <a:rPr lang="en-US" sz="1054" dirty="0">
+                        <a:rPr lang="en-US" sz="1000" dirty="0">
                           <a:solidFill>
                             <a:srgbClr val="14233A"/>
                           </a:solidFill>
@@ -18792,7 +19180,7 @@
                         </a:rPr>
                         <a:t>4.070</a:t>
                       </a:r>
-                      <a:endParaRPr lang="en-US" sz="1054" dirty="0">
+                      <a:endParaRPr lang="en-US" sz="1000" dirty="0">
                         <a:latin typeface="Tahoma" charset="0"/>
                         <a:ea typeface="Tahoma" charset="0"/>
                         <a:cs typeface="Tahoma" charset="0"/>
@@ -18848,12 +19236,12 @@
                     <a:p>
                       <a:pPr algn="ctr" indent="0" marL="0">
                         <a:lnSpc>
-                          <a:spcPts val="1475"/>
+                          <a:spcPts val="1386"/>
                         </a:lnSpc>
                         <a:buNone/>
                       </a:pPr>
                       <a:r>
-                        <a:rPr lang="en-US" sz="1054" dirty="0">
+                        <a:rPr lang="en-US" sz="1000" dirty="0">
                           <a:solidFill>
                             <a:srgbClr val="14233A"/>
                           </a:solidFill>
@@ -18863,7 +19251,7 @@
                         </a:rPr>
                         <a:t>1.662</a:t>
                       </a:r>
-                      <a:endParaRPr lang="en-US" sz="1054" dirty="0">
+                      <a:endParaRPr lang="en-US" sz="1000" dirty="0">
                         <a:latin typeface="Tahoma" charset="0"/>
                         <a:ea typeface="Tahoma" charset="0"/>
                         <a:cs typeface="Tahoma" charset="0"/>
@@ -18921,12 +19309,12 @@
                     <a:p>
                       <a:pPr indent="0" marL="0">
                         <a:lnSpc>
-                          <a:spcPts val="1475"/>
+                          <a:spcPts val="1386"/>
                         </a:lnSpc>
                         <a:buNone/>
                       </a:pPr>
                       <a:r>
-                        <a:rPr lang="en-US" sz="1054" dirty="0">
+                        <a:rPr lang="en-US" sz="1000" dirty="0">
                           <a:solidFill>
                             <a:srgbClr val="14233A"/>
                           </a:solidFill>
@@ -18936,7 +19324,7 @@
                         </a:rPr>
                         <a:t>after</a:t>
                       </a:r>
-                      <a:endParaRPr lang="en-US" sz="1054" dirty="0">
+                      <a:endParaRPr lang="en-US" sz="1000" dirty="0">
                         <a:latin typeface="Tahoma" charset="0"/>
                         <a:ea typeface="Tahoma" charset="0"/>
                         <a:cs typeface="Tahoma" charset="0"/>
@@ -18986,12 +19374,12 @@
                     <a:p>
                       <a:pPr algn="ctr" indent="0" marL="0">
                         <a:lnSpc>
-                          <a:spcPts val="1475"/>
+                          <a:spcPts val="1386"/>
                         </a:lnSpc>
                         <a:buNone/>
                       </a:pPr>
                       <a:r>
-                        <a:rPr lang="en-US" sz="1054" dirty="0">
+                        <a:rPr lang="en-US" sz="1000" dirty="0">
                           <a:solidFill>
                             <a:srgbClr val="14233A"/>
                           </a:solidFill>
@@ -19001,7 +19389,7 @@
                         </a:rPr>
                         <a:t>18.67</a:t>
                       </a:r>
-                      <a:endParaRPr lang="en-US" sz="1054" dirty="0">
+                      <a:endParaRPr lang="en-US" sz="1000" dirty="0">
                         <a:latin typeface="Tahoma" charset="0"/>
                         <a:ea typeface="Tahoma" charset="0"/>
                         <a:cs typeface="Tahoma" charset="0"/>
@@ -19057,12 +19445,12 @@
                     <a:p>
                       <a:pPr algn="ctr" indent="0" marL="0">
                         <a:lnSpc>
-                          <a:spcPts val="1475"/>
+                          <a:spcPts val="1386"/>
                         </a:lnSpc>
                         <a:buNone/>
                       </a:pPr>
                       <a:r>
-                        <a:rPr lang="en-US" sz="1054" dirty="0">
+                        <a:rPr lang="en-US" sz="1000" dirty="0">
                           <a:solidFill>
                             <a:srgbClr val="14233A"/>
                           </a:solidFill>
@@ -19072,7 +19460,7 @@
                         </a:rPr>
                         <a:t>6</a:t>
                       </a:r>
-                      <a:endParaRPr lang="en-US" sz="1054" dirty="0">
+                      <a:endParaRPr lang="en-US" sz="1000" dirty="0">
                         <a:latin typeface="Tahoma" charset="0"/>
                         <a:ea typeface="Tahoma" charset="0"/>
                         <a:cs typeface="Tahoma" charset="0"/>
@@ -19128,12 +19516,12 @@
                     <a:p>
                       <a:pPr algn="ctr" indent="0" marL="0">
                         <a:lnSpc>
-                          <a:spcPts val="1475"/>
+                          <a:spcPts val="1386"/>
                         </a:lnSpc>
                         <a:buNone/>
                       </a:pPr>
                       <a:r>
-                        <a:rPr lang="en-US" sz="1054" dirty="0">
+                        <a:rPr lang="en-US" sz="1000" dirty="0">
                           <a:solidFill>
                             <a:srgbClr val="14233A"/>
                           </a:solidFill>
@@ -19143,7 +19531,7 @@
                         </a:rPr>
                         <a:t>4.719</a:t>
                       </a:r>
-                      <a:endParaRPr lang="en-US" sz="1054" dirty="0">
+                      <a:endParaRPr lang="en-US" sz="1000" dirty="0">
                         <a:latin typeface="Tahoma" charset="0"/>
                         <a:ea typeface="Tahoma" charset="0"/>
                         <a:cs typeface="Tahoma" charset="0"/>
@@ -19199,12 +19587,12 @@
                     <a:p>
                       <a:pPr algn="ctr" indent="0" marL="0">
                         <a:lnSpc>
-                          <a:spcPts val="1475"/>
+                          <a:spcPts val="1386"/>
                         </a:lnSpc>
                         <a:buNone/>
                       </a:pPr>
                       <a:r>
-                        <a:rPr lang="en-US" sz="1054" dirty="0">
+                        <a:rPr lang="en-US" sz="1000" dirty="0">
                           <a:solidFill>
                             <a:srgbClr val="14233A"/>
                           </a:solidFill>
@@ -19214,7 +19602,7 @@
                         </a:rPr>
                         <a:t>1.926</a:t>
                       </a:r>
-                      <a:endParaRPr lang="en-US" sz="1054" dirty="0">
+                      <a:endParaRPr lang="en-US" sz="1000" dirty="0">
                         <a:latin typeface="Tahoma" charset="0"/>
                         <a:ea typeface="Tahoma" charset="0"/>
                         <a:cs typeface="Tahoma" charset="0"/>
@@ -19478,12 +19866,12 @@
                     <a:p>
                       <a:pPr indent="0" marL="0">
                         <a:lnSpc>
-                          <a:spcPts val="1480"/>
+                          <a:spcPts val="1391"/>
                         </a:lnSpc>
                         <a:buNone/>
                       </a:pPr>
                       <a:r>
-                        <a:rPr lang="en-US" sz="1058" b="1" dirty="0">
+                        <a:rPr lang="en-US" sz="1000" b="1" dirty="0">
                           <a:solidFill>
                             <a:srgbClr val="F6F4EF"/>
                           </a:solidFill>
@@ -19493,7 +19881,7 @@
                         </a:rPr>
                         <a:t>Pair 1</a:t>
                       </a:r>
-                      <a:endParaRPr lang="en-US" sz="1058" dirty="0">
+                      <a:endParaRPr lang="en-US" sz="1000" dirty="0">
                         <a:latin typeface="Tahoma" charset="0"/>
                         <a:ea typeface="Tahoma" charset="0"/>
                         <a:cs typeface="Tahoma" charset="0"/>
@@ -19537,12 +19925,12 @@
                     <a:p>
                       <a:pPr algn="ctr" indent="0" marL="0">
                         <a:lnSpc>
-                          <a:spcPts val="1480"/>
+                          <a:spcPts val="1391"/>
                         </a:lnSpc>
                         <a:buNone/>
                       </a:pPr>
                       <a:r>
-                        <a:rPr lang="en-US" sz="1058" b="1" dirty="0">
+                        <a:rPr lang="en-US" sz="1000" b="1" dirty="0">
                           <a:solidFill>
                             <a:srgbClr val="F6F4EF"/>
                           </a:solidFill>
@@ -19552,7 +19940,7 @@
                         </a:rPr>
                         <a:t>Mean</a:t>
                       </a:r>
-                      <a:endParaRPr lang="en-US" sz="1058" dirty="0">
+                      <a:endParaRPr lang="en-US" sz="1000" dirty="0">
                         <a:latin typeface="Tahoma" charset="0"/>
                         <a:ea typeface="Tahoma" charset="0"/>
                         <a:cs typeface="Tahoma" charset="0"/>
@@ -19602,12 +19990,12 @@
                     <a:p>
                       <a:pPr algn="ctr" indent="0" marL="0">
                         <a:lnSpc>
-                          <a:spcPts val="1480"/>
+                          <a:spcPts val="1391"/>
                         </a:lnSpc>
                         <a:buNone/>
                       </a:pPr>
                       <a:r>
-                        <a:rPr lang="en-US" sz="1058" b="1" dirty="0">
+                        <a:rPr lang="en-US" sz="1000" b="1" dirty="0">
                           <a:solidFill>
                             <a:srgbClr val="F6F4EF"/>
                           </a:solidFill>
@@ -19617,7 +20005,7 @@
                         </a:rPr>
                         <a:t>Std. Deviation</a:t>
                       </a:r>
-                      <a:endParaRPr lang="en-US" sz="1058" dirty="0">
+                      <a:endParaRPr lang="en-US" sz="1000" dirty="0">
                         <a:latin typeface="Tahoma" charset="0"/>
                         <a:ea typeface="Tahoma" charset="0"/>
                         <a:cs typeface="Tahoma" charset="0"/>
@@ -19667,12 +20055,12 @@
                     <a:p>
                       <a:pPr algn="ctr" indent="0" marL="0">
                         <a:lnSpc>
-                          <a:spcPts val="1480"/>
+                          <a:spcPts val="1391"/>
                         </a:lnSpc>
                         <a:buNone/>
                       </a:pPr>
                       <a:r>
-                        <a:rPr lang="en-US" sz="1058" b="1" dirty="0">
+                        <a:rPr lang="en-US" sz="1000" b="1" dirty="0">
                           <a:solidFill>
                             <a:srgbClr val="F6F4EF"/>
                           </a:solidFill>
@@ -19682,7 +20070,7 @@
                         </a:rPr>
                         <a:t>Std. Error Mean</a:t>
                       </a:r>
-                      <a:endParaRPr lang="en-US" sz="1058" dirty="0">
+                      <a:endParaRPr lang="en-US" sz="1000" dirty="0">
                         <a:latin typeface="Tahoma" charset="0"/>
                         <a:ea typeface="Tahoma" charset="0"/>
                         <a:cs typeface="Tahoma" charset="0"/>
@@ -19732,12 +20120,12 @@
                     <a:p>
                       <a:pPr algn="ctr" indent="0" marL="0">
                         <a:lnSpc>
-                          <a:spcPts val="1480"/>
+                          <a:spcPts val="1391"/>
                         </a:lnSpc>
                         <a:buNone/>
                       </a:pPr>
                       <a:r>
-                        <a:rPr lang="en-US" sz="1058" b="1" dirty="0">
+                        <a:rPr lang="en-US" sz="1000" b="1" dirty="0">
                           <a:solidFill>
                             <a:srgbClr val="F6F4EF"/>
                           </a:solidFill>
@@ -19747,7 +20135,7 @@
                         </a:rPr>
                         <a:t>95% CI Lower</a:t>
                       </a:r>
-                      <a:endParaRPr lang="en-US" sz="1058" dirty="0">
+                      <a:endParaRPr lang="en-US" sz="1000" dirty="0">
                         <a:latin typeface="Tahoma" charset="0"/>
                         <a:ea typeface="Tahoma" charset="0"/>
                         <a:cs typeface="Tahoma" charset="0"/>
@@ -19797,12 +20185,12 @@
                     <a:p>
                       <a:pPr algn="ctr" indent="0" marL="0">
                         <a:lnSpc>
-                          <a:spcPts val="1480"/>
+                          <a:spcPts val="1391"/>
                         </a:lnSpc>
                         <a:buNone/>
                       </a:pPr>
                       <a:r>
-                        <a:rPr lang="en-US" sz="1058" b="1" dirty="0">
+                        <a:rPr lang="en-US" sz="1000" b="1" dirty="0">
                           <a:solidFill>
                             <a:srgbClr val="F6F4EF"/>
                           </a:solidFill>
@@ -19812,7 +20200,7 @@
                         </a:rPr>
                         <a:t>95% CI Upper</a:t>
                       </a:r>
-                      <a:endParaRPr lang="en-US" sz="1058" dirty="0">
+                      <a:endParaRPr lang="en-US" sz="1000" dirty="0">
                         <a:latin typeface="Tahoma" charset="0"/>
                         <a:ea typeface="Tahoma" charset="0"/>
                         <a:cs typeface="Tahoma" charset="0"/>
@@ -19862,12 +20250,12 @@
                     <a:p>
                       <a:pPr algn="ctr" indent="0" marL="0">
                         <a:lnSpc>
-                          <a:spcPts val="1480"/>
+                          <a:spcPts val="1391"/>
                         </a:lnSpc>
                         <a:buNone/>
                       </a:pPr>
                       <a:r>
-                        <a:rPr lang="en-US" sz="1058" b="1" dirty="0">
+                        <a:rPr lang="en-US" sz="1000" b="1" dirty="0">
                           <a:solidFill>
                             <a:srgbClr val="F6F4EF"/>
                           </a:solidFill>
@@ -19877,7 +20265,7 @@
                         </a:rPr>
                         <a:t>t</a:t>
                       </a:r>
-                      <a:endParaRPr lang="en-US" sz="1058" dirty="0">
+                      <a:endParaRPr lang="en-US" sz="1000" dirty="0">
                         <a:latin typeface="Tahoma" charset="0"/>
                         <a:ea typeface="Tahoma" charset="0"/>
                         <a:cs typeface="Tahoma" charset="0"/>
@@ -19927,12 +20315,12 @@
                     <a:p>
                       <a:pPr algn="ctr" indent="0" marL="0">
                         <a:lnSpc>
-                          <a:spcPts val="1480"/>
+                          <a:spcPts val="1391"/>
                         </a:lnSpc>
                         <a:buNone/>
                       </a:pPr>
                       <a:r>
-                        <a:rPr lang="en-US" sz="1058" b="1" dirty="0">
+                        <a:rPr lang="en-US" sz="1000" b="1" dirty="0">
                           <a:solidFill>
                             <a:srgbClr val="F6F4EF"/>
                           </a:solidFill>
@@ -19942,7 +20330,7 @@
                         </a:rPr>
                         <a:t>df</a:t>
                       </a:r>
-                      <a:endParaRPr lang="en-US" sz="1058" dirty="0">
+                      <a:endParaRPr lang="en-US" sz="1000" dirty="0">
                         <a:latin typeface="Tahoma" charset="0"/>
                         <a:ea typeface="Tahoma" charset="0"/>
                         <a:cs typeface="Tahoma" charset="0"/>
@@ -19992,12 +20380,12 @@
                     <a:p>
                       <a:pPr algn="ctr" indent="0" marL="0">
                         <a:lnSpc>
-                          <a:spcPts val="1480"/>
+                          <a:spcPts val="1391"/>
                         </a:lnSpc>
                         <a:buNone/>
                       </a:pPr>
                       <a:r>
-                        <a:rPr lang="en-US" sz="1058" b="1" dirty="0">
+                        <a:rPr lang="en-US" sz="1000" b="1" dirty="0">
                           <a:solidFill>
                             <a:srgbClr val="F6F4EF"/>
                           </a:solidFill>
@@ -20007,7 +20395,7 @@
                         </a:rPr>
                         <a:t>Sig. (2-tailed)</a:t>
                       </a:r>
-                      <a:endParaRPr lang="en-US" sz="1058" dirty="0">
+                      <a:endParaRPr lang="en-US" sz="1000" dirty="0">
                         <a:latin typeface="Tahoma" charset="0"/>
                         <a:ea typeface="Tahoma" charset="0"/>
                         <a:cs typeface="Tahoma" charset="0"/>
@@ -20059,12 +20447,12 @@
                     <a:p>
                       <a:pPr indent="0" marL="0">
                         <a:lnSpc>
-                          <a:spcPts val="1480"/>
+                          <a:spcPts val="1391"/>
                         </a:lnSpc>
                         <a:buNone/>
                       </a:pPr>
                       <a:r>
-                        <a:rPr lang="en-US" sz="1058" dirty="0">
+                        <a:rPr lang="en-US" sz="1000" dirty="0">
                           <a:solidFill>
                             <a:srgbClr val="14233A"/>
                           </a:solidFill>
@@ -20074,7 +20462,7 @@
                         </a:rPr>
                         <a:t>before - after</a:t>
                       </a:r>
-                      <a:endParaRPr lang="en-US" sz="1058" dirty="0">
+                      <a:endParaRPr lang="en-US" sz="1000" dirty="0">
                         <a:latin typeface="Tahoma" charset="0"/>
                         <a:ea typeface="Tahoma" charset="0"/>
                         <a:cs typeface="Tahoma" charset="0"/>
@@ -20124,12 +20512,12 @@
                     <a:p>
                       <a:pPr algn="ctr" indent="0" marL="0">
                         <a:lnSpc>
-                          <a:spcPts val="1480"/>
+                          <a:spcPts val="1391"/>
                         </a:lnSpc>
                         <a:buNone/>
                       </a:pPr>
                       <a:r>
-                        <a:rPr lang="en-US" sz="1058" dirty="0">
+                        <a:rPr lang="en-US" sz="1000" dirty="0">
                           <a:solidFill>
                             <a:srgbClr val="14233A"/>
                           </a:solidFill>
@@ -20139,7 +20527,7 @@
                         </a:rPr>
                         <a:t>1.500</a:t>
                       </a:r>
-                      <a:endParaRPr lang="en-US" sz="1058" dirty="0">
+                      <a:endParaRPr lang="en-US" sz="1000" dirty="0">
                         <a:latin typeface="Tahoma" charset="0"/>
                         <a:ea typeface="Tahoma" charset="0"/>
                         <a:cs typeface="Tahoma" charset="0"/>
@@ -20195,12 +20583,12 @@
                     <a:p>
                       <a:pPr algn="ctr" indent="0" marL="0">
                         <a:lnSpc>
-                          <a:spcPts val="1480"/>
+                          <a:spcPts val="1391"/>
                         </a:lnSpc>
                         <a:buNone/>
                       </a:pPr>
                       <a:r>
-                        <a:rPr lang="en-US" sz="1058" dirty="0">
+                        <a:rPr lang="en-US" sz="1000" dirty="0">
                           <a:solidFill>
                             <a:srgbClr val="14233A"/>
                           </a:solidFill>
@@ -20210,7 +20598,7 @@
                         </a:rPr>
                         <a:t>2.345</a:t>
                       </a:r>
-                      <a:endParaRPr lang="en-US" sz="1058" dirty="0">
+                      <a:endParaRPr lang="en-US" sz="1000" dirty="0">
                         <a:latin typeface="Tahoma" charset="0"/>
                         <a:ea typeface="Tahoma" charset="0"/>
                         <a:cs typeface="Tahoma" charset="0"/>
@@ -20266,12 +20654,12 @@
                     <a:p>
                       <a:pPr algn="ctr" indent="0" marL="0">
                         <a:lnSpc>
-                          <a:spcPts val="1480"/>
+                          <a:spcPts val="1391"/>
                         </a:lnSpc>
                         <a:buNone/>
                       </a:pPr>
                       <a:r>
-                        <a:rPr lang="en-US" sz="1058" dirty="0">
+                        <a:rPr lang="en-US" sz="1000" dirty="0">
                           <a:solidFill>
                             <a:srgbClr val="14233A"/>
                           </a:solidFill>
@@ -20281,7 +20669,7 @@
                         </a:rPr>
                         <a:t>.957</a:t>
                       </a:r>
-                      <a:endParaRPr lang="en-US" sz="1058" dirty="0">
+                      <a:endParaRPr lang="en-US" sz="1000" dirty="0">
                         <a:latin typeface="Tahoma" charset="0"/>
                         <a:ea typeface="Tahoma" charset="0"/>
                         <a:cs typeface="Tahoma" charset="0"/>
@@ -20337,12 +20725,12 @@
                     <a:p>
                       <a:pPr algn="ctr" indent="0" marL="0">
                         <a:lnSpc>
-                          <a:spcPts val="1480"/>
+                          <a:spcPts val="1391"/>
                         </a:lnSpc>
                         <a:buNone/>
                       </a:pPr>
                       <a:r>
-                        <a:rPr lang="en-US" sz="1058" dirty="0">
+                        <a:rPr lang="en-US" sz="1000" dirty="0">
                           <a:solidFill>
                             <a:srgbClr val="14233A"/>
                           </a:solidFill>
@@ -20352,7 +20740,7 @@
                         </a:rPr>
                         <a:t>-.961</a:t>
                       </a:r>
-                      <a:endParaRPr lang="en-US" sz="1058" dirty="0">
+                      <a:endParaRPr lang="en-US" sz="1000" dirty="0">
                         <a:latin typeface="Tahoma" charset="0"/>
                         <a:ea typeface="Tahoma" charset="0"/>
                         <a:cs typeface="Tahoma" charset="0"/>
@@ -20408,12 +20796,12 @@
                     <a:p>
                       <a:pPr algn="ctr" indent="0" marL="0">
                         <a:lnSpc>
-                          <a:spcPts val="1480"/>
+                          <a:spcPts val="1391"/>
                         </a:lnSpc>
                         <a:buNone/>
                       </a:pPr>
                       <a:r>
-                        <a:rPr lang="en-US" sz="1058" dirty="0">
+                        <a:rPr lang="en-US" sz="1000" dirty="0">
                           <a:solidFill>
                             <a:srgbClr val="14233A"/>
                           </a:solidFill>
@@ -20423,7 +20811,7 @@
                         </a:rPr>
                         <a:t>3.961</a:t>
                       </a:r>
-                      <a:endParaRPr lang="en-US" sz="1058" dirty="0">
+                      <a:endParaRPr lang="en-US" sz="1000" dirty="0">
                         <a:latin typeface="Tahoma" charset="0"/>
                         <a:ea typeface="Tahoma" charset="0"/>
                         <a:cs typeface="Tahoma" charset="0"/>
@@ -20479,12 +20867,12 @@
                     <a:p>
                       <a:pPr algn="ctr" indent="0" marL="0">
                         <a:lnSpc>
-                          <a:spcPts val="1480"/>
+                          <a:spcPts val="1391"/>
                         </a:lnSpc>
                         <a:buNone/>
                       </a:pPr>
                       <a:r>
-                        <a:rPr lang="en-US" sz="1058" dirty="0">
+                        <a:rPr lang="en-US" sz="1000" dirty="0">
                           <a:solidFill>
                             <a:srgbClr val="14233A"/>
                           </a:solidFill>
@@ -20494,7 +20882,7 @@
                         </a:rPr>
                         <a:t>1.567</a:t>
                       </a:r>
-                      <a:endParaRPr lang="en-US" sz="1058" dirty="0">
+                      <a:endParaRPr lang="en-US" sz="1000" dirty="0">
                         <a:latin typeface="Tahoma" charset="0"/>
                         <a:ea typeface="Tahoma" charset="0"/>
                         <a:cs typeface="Tahoma" charset="0"/>
@@ -20550,12 +20938,12 @@
                     <a:p>
                       <a:pPr algn="ctr" indent="0" marL="0">
                         <a:lnSpc>
-                          <a:spcPts val="1480"/>
+                          <a:spcPts val="1391"/>
                         </a:lnSpc>
                         <a:buNone/>
                       </a:pPr>
                       <a:r>
-                        <a:rPr lang="en-US" sz="1058" dirty="0">
+                        <a:rPr lang="en-US" sz="1000" dirty="0">
                           <a:solidFill>
                             <a:srgbClr val="14233A"/>
                           </a:solidFill>
@@ -20565,7 +20953,7 @@
                         </a:rPr>
                         <a:t>5</a:t>
                       </a:r>
-                      <a:endParaRPr lang="en-US" sz="1058" dirty="0">
+                      <a:endParaRPr lang="en-US" sz="1000" dirty="0">
                         <a:latin typeface="Tahoma" charset="0"/>
                         <a:ea typeface="Tahoma" charset="0"/>
                         <a:cs typeface="Tahoma" charset="0"/>
@@ -20621,12 +21009,12 @@
                     <a:p>
                       <a:pPr algn="ctr" indent="0" marL="0">
                         <a:lnSpc>
-                          <a:spcPts val="1480"/>
+                          <a:spcPts val="1391"/>
                         </a:lnSpc>
                         <a:buNone/>
                       </a:pPr>
                       <a:r>
-                        <a:rPr lang="en-US" sz="1058" dirty="0">
+                        <a:rPr lang="en-US" sz="1000" dirty="0">
                           <a:solidFill>
                             <a:srgbClr val="9A5B00"/>
                           </a:solidFill>
@@ -20636,7 +21024,7 @@
                         </a:rPr>
                         <a:t>.178</a:t>
                       </a:r>
-                      <a:endParaRPr lang="en-US" sz="1058" dirty="0">
+                      <a:endParaRPr lang="en-US" sz="1000" dirty="0">
                         <a:latin typeface="Tahoma" charset="0"/>
                         <a:ea typeface="Tahoma" charset="0"/>
                         <a:cs typeface="Tahoma" charset="0"/>
@@ -20893,6 +21281,200 @@
   <p:clrMapOvr>
     <a:masterClrMapping/>
   </p:clrMapOvr>
+  <p:timing>
+    <p:tnLst>
+      <p:par>
+        <p:cTn id="1" dur="indefinite" restart="never" nodeType="tmRoot">
+          <p:childTnLst>
+            <p:seq concurrent="1" nextAc="seek">
+              <p:cTn id="2" dur="indefinite" nodeType="mainSeq">
+                <p:childTnLst>
+                  <p:par>
+                    <p:cTn id="3" fill="hold">
+                      <p:stCondLst>
+                        <p:cond delay="indefinite"/>
+                      </p:stCondLst>
+                      <p:childTnLst>
+                        <p:par>
+                          <p:cTn id="4" fill="hold">
+                            <p:stCondLst>
+                              <p:cond delay="0"/>
+                            </p:stCondLst>
+                            <p:childTnLst>
+                              <p:par>
+                                <p:cTn id="5" presetID="10" presetClass="entr" presetSubtype="0" fill="hold" grpId="0" nodeType="clickEffect">
+                                  <p:stCondLst>
+                                    <p:cond delay="0"/>
+                                  </p:stCondLst>
+                                  <p:childTnLst>
+                                    <p:set>
+                                      <p:cBhvr>
+                                        <p:cTn id="105" dur="1" fill="hold">
+                                          <p:stCondLst>
+                                            <p:cond delay="0"/>
+                                          </p:stCondLst>
+                                        </p:cTn>
+                                        <p:tgtEl>
+                                          <p:spTgt spid="3"/>
+                                        </p:tgtEl>
+                                        <p:attrNameLst>
+                                          <p:attrName>style.visibility</p:attrName>
+                                        </p:attrNameLst>
+                                      </p:cBhvr>
+                                      <p:to>
+                                        <p:strVal val="visible"/>
+                                      </p:to>
+                                    </p:set>
+                                    <p:animEffect transition="in" filter="fade">
+                                      <p:cBhvr>
+                                        <p:cTn id="6" dur="500"/>
+                                        <p:tgtEl>
+                                          <p:spTgt spid="3"/>
+                                        </p:tgtEl>
+                                      </p:cBhvr>
+                                    </p:animEffect>
+                                  </p:childTnLst>
+                                </p:cTn>
+                              </p:par>
+                              <p:par>
+                                <p:cTn id="7" presetID="10" presetClass="entr" presetSubtype="0" fill="hold" grpId="0" nodeType="withEffect">
+                                  <p:stCondLst>
+                                    <p:cond delay="0"/>
+                                  </p:stCondLst>
+                                  <p:childTnLst>
+                                    <p:set>
+                                      <p:cBhvr>
+                                        <p:cTn id="107" dur="1" fill="hold">
+                                          <p:stCondLst>
+                                            <p:cond delay="0"/>
+                                          </p:stCondLst>
+                                        </p:cTn>
+                                        <p:tgtEl>
+                                          <p:spTgt spid="16"/>
+                                        </p:tgtEl>
+                                        <p:attrNameLst>
+                                          <p:attrName>style.visibility</p:attrName>
+                                        </p:attrNameLst>
+                                      </p:cBhvr>
+                                      <p:to>
+                                        <p:strVal val="visible"/>
+                                      </p:to>
+                                    </p:set>
+                                    <p:animEffect transition="in" filter="fade">
+                                      <p:cBhvr>
+                                        <p:cTn id="8" dur="500"/>
+                                        <p:tgtEl>
+                                          <p:spTgt spid="16"/>
+                                        </p:tgtEl>
+                                      </p:cBhvr>
+                                    </p:animEffect>
+                                  </p:childTnLst>
+                                </p:cTn>
+                              </p:par>
+                              <p:par>
+                                <p:cTn id="9" presetID="10" presetClass="entr" presetSubtype="0" fill="hold" grpId="0" nodeType="withEffect">
+                                  <p:stCondLst>
+                                    <p:cond delay="0"/>
+                                  </p:stCondLst>
+                                  <p:childTnLst>
+                                    <p:set>
+                                      <p:cBhvr>
+                                        <p:cTn id="109" dur="1" fill="hold">
+                                          <p:stCondLst>
+                                            <p:cond delay="0"/>
+                                          </p:stCondLst>
+                                        </p:cTn>
+                                        <p:tgtEl>
+                                          <p:spTgt spid="17"/>
+                                        </p:tgtEl>
+                                        <p:attrNameLst>
+                                          <p:attrName>style.visibility</p:attrName>
+                                        </p:attrNameLst>
+                                      </p:cBhvr>
+                                      <p:to>
+                                        <p:strVal val="visible"/>
+                                      </p:to>
+                                    </p:set>
+                                    <p:animEffect transition="in" filter="fade">
+                                      <p:cBhvr>
+                                        <p:cTn id="10" dur="500"/>
+                                        <p:tgtEl>
+                                          <p:spTgt spid="17"/>
+                                        </p:tgtEl>
+                                      </p:cBhvr>
+                                    </p:animEffect>
+                                  </p:childTnLst>
+                                </p:cTn>
+                              </p:par>
+                              <p:par>
+                                <p:cTn id="11" presetID="10" presetClass="entr" presetSubtype="0" fill="hold" grpId="0" nodeType="withEffect">
+                                  <p:stCondLst>
+                                    <p:cond delay="0"/>
+                                  </p:stCondLst>
+                                  <p:childTnLst>
+                                    <p:set>
+                                      <p:cBhvr>
+                                        <p:cTn id="111" dur="1" fill="hold">
+                                          <p:stCondLst>
+                                            <p:cond delay="0"/>
+                                          </p:stCondLst>
+                                        </p:cTn>
+                                        <p:tgtEl>
+                                          <p:spTgt spid="18"/>
+                                        </p:tgtEl>
+                                        <p:attrNameLst>
+                                          <p:attrName>style.visibility</p:attrName>
+                                        </p:attrNameLst>
+                                      </p:cBhvr>
+                                      <p:to>
+                                        <p:strVal val="visible"/>
+                                      </p:to>
+                                    </p:set>
+                                    <p:animEffect transition="in" filter="fade">
+                                      <p:cBhvr>
+                                        <p:cTn id="12" dur="500"/>
+                                        <p:tgtEl>
+                                          <p:spTgt spid="18"/>
+                                        </p:tgtEl>
+                                      </p:cBhvr>
+                                    </p:animEffect>
+                                  </p:childTnLst>
+                                </p:cTn>
+                              </p:par>
+                            </p:childTnLst>
+                          </p:cTn>
+                        </p:par>
+                      </p:childTnLst>
+                    </p:cTn>
+                  </p:par>
+                </p:childTnLst>
+              </p:cTn>
+              <p:prevCondLst>
+                <p:cond evt="onPrev" delay="0">
+                  <p:tgtEl>
+                    <p:sldTgt/>
+                  </p:tgtEl>
+                </p:cond>
+              </p:prevCondLst>
+              <p:nextCondLst>
+                <p:cond evt="onNext" delay="0">
+                  <p:tgtEl>
+                    <p:sldTgt/>
+                  </p:tgtEl>
+                </p:cond>
+              </p:nextCondLst>
+            </p:seq>
+          </p:childTnLst>
+        </p:cTn>
+      </p:par>
+    </p:tnLst>
+    <p:bldLst>
+      <p:bldP spid="3" grpId="0" animBg="1"/>
+      <p:bldP spid="16" grpId="0" animBg="1"/>
+      <p:bldP spid="17" grpId="0" animBg="1"/>
+      <p:bldP spid="18" grpId="0" animBg="1"/>
+    </p:bldLst>
+  </p:timing>
 </p:sld>
 </file>
 
@@ -20989,12 +21571,12 @@
           <a:p>
             <a:pPr indent="0" marL="0" rtl="1" algn="r">
               <a:lnSpc>
-                <a:spcPts val="5520"/>
+                <a:spcPts val="5023"/>
               </a:lnSpc>
               <a:buNone/>
             </a:pPr>
             <a:r>
-              <a:rPr lang="ar-EG" sz="4800" b="1" dirty="0">
+              <a:rPr lang="ar-EG" sz="4350" b="1" dirty="0">
                 <a:solidFill>
                   <a:srgbClr val="F6F4EF"/>
                 </a:solidFill>
@@ -21004,7 +21586,7 @@
               </a:rPr>
               <a:t>‎3.7 من 5: هل الطلاب مؤيدون فعلًا؟</a:t>
             </a:r>
-            <a:endParaRPr lang="ar-EG" sz="4800" dirty="0"/>
+            <a:endParaRPr lang="ar-EG" sz="4350" dirty="0"/>
           </a:p>
         </p:txBody>
       </p:sp>
@@ -21077,12 +21659,12 @@
           <a:p>
             <a:pPr indent="0" marL="0" rtl="1" algn="r">
               <a:lnSpc>
-                <a:spcPts val="3000"/>
+                <a:spcPts val="2730"/>
               </a:lnSpc>
               <a:buNone/>
             </a:pPr>
             <a:r>
-              <a:rPr lang="ar-EG" sz="2000" b="1" dirty="0">
+              <a:rPr lang="ar-EG" sz="1800" b="1" dirty="0">
                 <a:solidFill>
                   <a:srgbClr val="F6F4EF"/>
                 </a:solidFill>
@@ -21092,7 +21674,7 @@
               </a:rPr>
               <a:t>قبل أن نقول للإدارة «الطلاب مؤيدون» نحتاج اختبارًا يجيب: هل الفرق حقيقي أم صدفة؟</a:t>
             </a:r>
-            <a:endParaRPr lang="ar-EG" sz="2000" dirty="0"/>
+            <a:endParaRPr lang="ar-EG" sz="1800" dirty="0"/>
           </a:p>
         </p:txBody>
       </p:sp>
@@ -24193,12 +24775,12 @@
                     <a:p>
                       <a:pPr indent="0" marL="0">
                         <a:lnSpc>
-                          <a:spcPts val="1475"/>
+                          <a:spcPts val="1386"/>
                         </a:lnSpc>
                         <a:buNone/>
                       </a:pPr>
                       <a:r>
-                        <a:rPr lang="en-US" sz="1054" b="1" dirty="0">
+                        <a:rPr lang="en-US" sz="1000" b="1" dirty="0">
                           <a:solidFill>
                             <a:srgbClr val="F6F4EF"/>
                           </a:solidFill>
@@ -24208,7 +24790,7 @@
                         </a:rPr>
                         <a:t>Pair 1</a:t>
                       </a:r>
-                      <a:endParaRPr lang="en-US" sz="1054" dirty="0">
+                      <a:endParaRPr lang="en-US" sz="1000" dirty="0">
                         <a:latin typeface="Tahoma" charset="0"/>
                         <a:ea typeface="Tahoma" charset="0"/>
                         <a:cs typeface="Tahoma" charset="0"/>
@@ -24252,12 +24834,12 @@
                     <a:p>
                       <a:pPr algn="ctr" indent="0" marL="0">
                         <a:lnSpc>
-                          <a:spcPts val="1475"/>
+                          <a:spcPts val="1386"/>
                         </a:lnSpc>
                         <a:buNone/>
                       </a:pPr>
                       <a:r>
-                        <a:rPr lang="en-US" sz="1054" b="1" dirty="0">
+                        <a:rPr lang="en-US" sz="1000" b="1" dirty="0">
                           <a:solidFill>
                             <a:srgbClr val="F6F4EF"/>
                           </a:solidFill>
@@ -24267,7 +24849,7 @@
                         </a:rPr>
                         <a:t>Mean</a:t>
                       </a:r>
-                      <a:endParaRPr lang="en-US" sz="1054" dirty="0">
+                      <a:endParaRPr lang="en-US" sz="1000" dirty="0">
                         <a:latin typeface="Tahoma" charset="0"/>
                         <a:ea typeface="Tahoma" charset="0"/>
                         <a:cs typeface="Tahoma" charset="0"/>
@@ -24317,12 +24899,12 @@
                     <a:p>
                       <a:pPr algn="ctr" indent="0" marL="0">
                         <a:lnSpc>
-                          <a:spcPts val="1475"/>
+                          <a:spcPts val="1386"/>
                         </a:lnSpc>
                         <a:buNone/>
                       </a:pPr>
                       <a:r>
-                        <a:rPr lang="en-US" sz="1054" b="1" dirty="0">
+                        <a:rPr lang="en-US" sz="1000" b="1" dirty="0">
                           <a:solidFill>
                             <a:srgbClr val="F6F4EF"/>
                           </a:solidFill>
@@ -24332,7 +24914,7 @@
                         </a:rPr>
                         <a:t>N</a:t>
                       </a:r>
-                      <a:endParaRPr lang="en-US" sz="1054" dirty="0">
+                      <a:endParaRPr lang="en-US" sz="1000" dirty="0">
                         <a:latin typeface="Tahoma" charset="0"/>
                         <a:ea typeface="Tahoma" charset="0"/>
                         <a:cs typeface="Tahoma" charset="0"/>
@@ -24382,12 +24964,12 @@
                     <a:p>
                       <a:pPr algn="ctr" indent="0" marL="0">
                         <a:lnSpc>
-                          <a:spcPts val="1475"/>
+                          <a:spcPts val="1386"/>
                         </a:lnSpc>
                         <a:buNone/>
                       </a:pPr>
                       <a:r>
-                        <a:rPr lang="en-US" sz="1054" b="1" dirty="0">
+                        <a:rPr lang="en-US" sz="1000" b="1" dirty="0">
                           <a:solidFill>
                             <a:srgbClr val="F6F4EF"/>
                           </a:solidFill>
@@ -24397,7 +24979,7 @@
                         </a:rPr>
                         <a:t>Std. Deviation</a:t>
                       </a:r>
-                      <a:endParaRPr lang="en-US" sz="1054" dirty="0">
+                      <a:endParaRPr lang="en-US" sz="1000" dirty="0">
                         <a:latin typeface="Tahoma" charset="0"/>
                         <a:ea typeface="Tahoma" charset="0"/>
                         <a:cs typeface="Tahoma" charset="0"/>
@@ -24447,12 +25029,12 @@
                     <a:p>
                       <a:pPr algn="ctr" indent="0" marL="0">
                         <a:lnSpc>
-                          <a:spcPts val="1475"/>
+                          <a:spcPts val="1386"/>
                         </a:lnSpc>
                         <a:buNone/>
                       </a:pPr>
                       <a:r>
-                        <a:rPr lang="en-US" sz="1054" b="1" dirty="0">
+                        <a:rPr lang="en-US" sz="1000" b="1" dirty="0">
                           <a:solidFill>
                             <a:srgbClr val="F6F4EF"/>
                           </a:solidFill>
@@ -24462,7 +25044,7 @@
                         </a:rPr>
                         <a:t>Std. Error Mean</a:t>
                       </a:r>
-                      <a:endParaRPr lang="en-US" sz="1054" dirty="0">
+                      <a:endParaRPr lang="en-US" sz="1000" dirty="0">
                         <a:latin typeface="Tahoma" charset="0"/>
                         <a:ea typeface="Tahoma" charset="0"/>
                         <a:cs typeface="Tahoma" charset="0"/>
@@ -24514,12 +25096,12 @@
                     <a:p>
                       <a:pPr indent="0" marL="0">
                         <a:lnSpc>
-                          <a:spcPts val="1475"/>
+                          <a:spcPts val="1386"/>
                         </a:lnSpc>
                         <a:buNone/>
                       </a:pPr>
                       <a:r>
-                        <a:rPr lang="en-US" sz="1054" dirty="0">
+                        <a:rPr lang="en-US" sz="1000" dirty="0">
                           <a:solidFill>
                             <a:srgbClr val="14233A"/>
                           </a:solidFill>
@@ -24529,7 +25111,7 @@
                         </a:rPr>
                         <a:t>att_before</a:t>
                       </a:r>
-                      <a:endParaRPr lang="en-US" sz="1054" dirty="0">
+                      <a:endParaRPr lang="en-US" sz="1000" dirty="0">
                         <a:latin typeface="Tahoma" charset="0"/>
                         <a:ea typeface="Tahoma" charset="0"/>
                         <a:cs typeface="Tahoma" charset="0"/>
@@ -24579,12 +25161,12 @@
                     <a:p>
                       <a:pPr algn="ctr" indent="0" marL="0">
                         <a:lnSpc>
-                          <a:spcPts val="1475"/>
+                          <a:spcPts val="1386"/>
                         </a:lnSpc>
                         <a:buNone/>
                       </a:pPr>
                       <a:r>
-                        <a:rPr lang="en-US" sz="1054" dirty="0">
+                        <a:rPr lang="en-US" sz="1000" dirty="0">
                           <a:solidFill>
                             <a:srgbClr val="14233A"/>
                           </a:solidFill>
@@ -24594,7 +25176,7 @@
                         </a:rPr>
                         <a:t>2.80</a:t>
                       </a:r>
-                      <a:endParaRPr lang="en-US" sz="1054" dirty="0">
+                      <a:endParaRPr lang="en-US" sz="1000" dirty="0">
                         <a:latin typeface="Tahoma" charset="0"/>
                         <a:ea typeface="Tahoma" charset="0"/>
                         <a:cs typeface="Tahoma" charset="0"/>
@@ -24650,12 +25232,12 @@
                     <a:p>
                       <a:pPr algn="ctr" indent="0" marL="0">
                         <a:lnSpc>
-                          <a:spcPts val="1475"/>
+                          <a:spcPts val="1386"/>
                         </a:lnSpc>
                         <a:buNone/>
                       </a:pPr>
                       <a:r>
-                        <a:rPr lang="en-US" sz="1054" dirty="0">
+                        <a:rPr lang="en-US" sz="1000" dirty="0">
                           <a:solidFill>
                             <a:srgbClr val="14233A"/>
                           </a:solidFill>
@@ -24665,7 +25247,7 @@
                         </a:rPr>
                         <a:t>8</a:t>
                       </a:r>
-                      <a:endParaRPr lang="en-US" sz="1054" dirty="0">
+                      <a:endParaRPr lang="en-US" sz="1000" dirty="0">
                         <a:latin typeface="Tahoma" charset="0"/>
                         <a:ea typeface="Tahoma" charset="0"/>
                         <a:cs typeface="Tahoma" charset="0"/>
@@ -24721,12 +25303,12 @@
                     <a:p>
                       <a:pPr algn="ctr" indent="0" marL="0">
                         <a:lnSpc>
-                          <a:spcPts val="1475"/>
+                          <a:spcPts val="1386"/>
                         </a:lnSpc>
                         <a:buNone/>
                       </a:pPr>
                       <a:r>
-                        <a:rPr lang="en-US" sz="1054" dirty="0">
+                        <a:rPr lang="en-US" sz="1000" dirty="0">
                           <a:solidFill>
                             <a:srgbClr val="14233A"/>
                           </a:solidFill>
@@ -24736,7 +25318,7 @@
                         </a:rPr>
                         <a:t>.400</a:t>
                       </a:r>
-                      <a:endParaRPr lang="en-US" sz="1054" dirty="0">
+                      <a:endParaRPr lang="en-US" sz="1000" dirty="0">
                         <a:latin typeface="Tahoma" charset="0"/>
                         <a:ea typeface="Tahoma" charset="0"/>
                         <a:cs typeface="Tahoma" charset="0"/>
@@ -24792,12 +25374,12 @@
                     <a:p>
                       <a:pPr algn="ctr" indent="0" marL="0">
                         <a:lnSpc>
-                          <a:spcPts val="1475"/>
+                          <a:spcPts val="1386"/>
                         </a:lnSpc>
                         <a:buNone/>
                       </a:pPr>
                       <a:r>
-                        <a:rPr lang="en-US" sz="1054" dirty="0">
+                        <a:rPr lang="en-US" sz="1000" dirty="0">
                           <a:solidFill>
                             <a:srgbClr val="14233A"/>
                           </a:solidFill>
@@ -24807,7 +25389,7 @@
                         </a:rPr>
                         <a:t>.141</a:t>
                       </a:r>
-                      <a:endParaRPr lang="en-US" sz="1054" dirty="0">
+                      <a:endParaRPr lang="en-US" sz="1000" dirty="0">
                         <a:latin typeface="Tahoma" charset="0"/>
                         <a:ea typeface="Tahoma" charset="0"/>
                         <a:cs typeface="Tahoma" charset="0"/>
@@ -24865,12 +25447,12 @@
                     <a:p>
                       <a:pPr indent="0" marL="0">
                         <a:lnSpc>
-                          <a:spcPts val="1475"/>
+                          <a:spcPts val="1386"/>
                         </a:lnSpc>
                         <a:buNone/>
                       </a:pPr>
                       <a:r>
-                        <a:rPr lang="en-US" sz="1054" dirty="0">
+                        <a:rPr lang="en-US" sz="1000" dirty="0">
                           <a:solidFill>
                             <a:srgbClr val="14233A"/>
                           </a:solidFill>
@@ -24880,7 +25462,7 @@
                         </a:rPr>
                         <a:t>att_after</a:t>
                       </a:r>
-                      <a:endParaRPr lang="en-US" sz="1054" dirty="0">
+                      <a:endParaRPr lang="en-US" sz="1000" dirty="0">
                         <a:latin typeface="Tahoma" charset="0"/>
                         <a:ea typeface="Tahoma" charset="0"/>
                         <a:cs typeface="Tahoma" charset="0"/>
@@ -24930,12 +25512,12 @@
                     <a:p>
                       <a:pPr algn="ctr" indent="0" marL="0">
                         <a:lnSpc>
-                          <a:spcPts val="1475"/>
+                          <a:spcPts val="1386"/>
                         </a:lnSpc>
                         <a:buNone/>
                       </a:pPr>
                       <a:r>
-                        <a:rPr lang="en-US" sz="1054" dirty="0">
+                        <a:rPr lang="en-US" sz="1000" dirty="0">
                           <a:solidFill>
                             <a:srgbClr val="14233A"/>
                           </a:solidFill>
@@ -24945,7 +25527,7 @@
                         </a:rPr>
                         <a:t>3.35</a:t>
                       </a:r>
-                      <a:endParaRPr lang="en-US" sz="1054" dirty="0">
+                      <a:endParaRPr lang="en-US" sz="1000" dirty="0">
                         <a:latin typeface="Tahoma" charset="0"/>
                         <a:ea typeface="Tahoma" charset="0"/>
                         <a:cs typeface="Tahoma" charset="0"/>
@@ -25001,12 +25583,12 @@
                     <a:p>
                       <a:pPr algn="ctr" indent="0" marL="0">
                         <a:lnSpc>
-                          <a:spcPts val="1475"/>
+                          <a:spcPts val="1386"/>
                         </a:lnSpc>
                         <a:buNone/>
                       </a:pPr>
                       <a:r>
-                        <a:rPr lang="en-US" sz="1054" dirty="0">
+                        <a:rPr lang="en-US" sz="1000" dirty="0">
                           <a:solidFill>
                             <a:srgbClr val="14233A"/>
                           </a:solidFill>
@@ -25016,7 +25598,7 @@
                         </a:rPr>
                         <a:t>8</a:t>
                       </a:r>
-                      <a:endParaRPr lang="en-US" sz="1054" dirty="0">
+                      <a:endParaRPr lang="en-US" sz="1000" dirty="0">
                         <a:latin typeface="Tahoma" charset="0"/>
                         <a:ea typeface="Tahoma" charset="0"/>
                         <a:cs typeface="Tahoma" charset="0"/>
@@ -25072,12 +25654,12 @@
                     <a:p>
                       <a:pPr algn="ctr" indent="0" marL="0">
                         <a:lnSpc>
-                          <a:spcPts val="1475"/>
+                          <a:spcPts val="1386"/>
                         </a:lnSpc>
                         <a:buNone/>
                       </a:pPr>
                       <a:r>
-                        <a:rPr lang="en-US" sz="1054" dirty="0">
+                        <a:rPr lang="en-US" sz="1000" dirty="0">
                           <a:solidFill>
                             <a:srgbClr val="14233A"/>
                           </a:solidFill>
@@ -25087,7 +25669,7 @@
                         </a:rPr>
                         <a:t>.298</a:t>
                       </a:r>
-                      <a:endParaRPr lang="en-US" sz="1054" dirty="0">
+                      <a:endParaRPr lang="en-US" sz="1000" dirty="0">
                         <a:latin typeface="Tahoma" charset="0"/>
                         <a:ea typeface="Tahoma" charset="0"/>
                         <a:cs typeface="Tahoma" charset="0"/>
@@ -25143,12 +25725,12 @@
                     <a:p>
                       <a:pPr algn="ctr" indent="0" marL="0">
                         <a:lnSpc>
-                          <a:spcPts val="1475"/>
+                          <a:spcPts val="1386"/>
                         </a:lnSpc>
                         <a:buNone/>
                       </a:pPr>
                       <a:r>
-                        <a:rPr lang="en-US" sz="1054" dirty="0">
+                        <a:rPr lang="en-US" sz="1000" dirty="0">
                           <a:solidFill>
                             <a:srgbClr val="14233A"/>
                           </a:solidFill>
@@ -25158,7 +25740,7 @@
                         </a:rPr>
                         <a:t>.105</a:t>
                       </a:r>
-                      <a:endParaRPr lang="en-US" sz="1054" dirty="0">
+                      <a:endParaRPr lang="en-US" sz="1000" dirty="0">
                         <a:latin typeface="Tahoma" charset="0"/>
                         <a:ea typeface="Tahoma" charset="0"/>
                         <a:cs typeface="Tahoma" charset="0"/>
@@ -25422,12 +26004,12 @@
                     <a:p>
                       <a:pPr indent="0" marL="0">
                         <a:lnSpc>
-                          <a:spcPts val="1480"/>
+                          <a:spcPts val="1391"/>
                         </a:lnSpc>
                         <a:buNone/>
                       </a:pPr>
                       <a:r>
-                        <a:rPr lang="en-US" sz="1058" b="1" dirty="0">
+                        <a:rPr lang="en-US" sz="1000" b="1" dirty="0">
                           <a:solidFill>
                             <a:srgbClr val="F6F4EF"/>
                           </a:solidFill>
@@ -25437,7 +26019,7 @@
                         </a:rPr>
                         <a:t>Pair 1</a:t>
                       </a:r>
-                      <a:endParaRPr lang="en-US" sz="1058" dirty="0">
+                      <a:endParaRPr lang="en-US" sz="1000" dirty="0">
                         <a:latin typeface="Tahoma" charset="0"/>
                         <a:ea typeface="Tahoma" charset="0"/>
                         <a:cs typeface="Tahoma" charset="0"/>
@@ -25481,12 +26063,12 @@
                     <a:p>
                       <a:pPr algn="ctr" indent="0" marL="0">
                         <a:lnSpc>
-                          <a:spcPts val="1480"/>
+                          <a:spcPts val="1391"/>
                         </a:lnSpc>
                         <a:buNone/>
                       </a:pPr>
                       <a:r>
-                        <a:rPr lang="en-US" sz="1058" b="1" dirty="0">
+                        <a:rPr lang="en-US" sz="1000" b="1" dirty="0">
                           <a:solidFill>
                             <a:srgbClr val="F6F4EF"/>
                           </a:solidFill>
@@ -25496,7 +26078,7 @@
                         </a:rPr>
                         <a:t>Mean</a:t>
                       </a:r>
-                      <a:endParaRPr lang="en-US" sz="1058" dirty="0">
+                      <a:endParaRPr lang="en-US" sz="1000" dirty="0">
                         <a:latin typeface="Tahoma" charset="0"/>
                         <a:ea typeface="Tahoma" charset="0"/>
                         <a:cs typeface="Tahoma" charset="0"/>
@@ -25546,12 +26128,12 @@
                     <a:p>
                       <a:pPr algn="ctr" indent="0" marL="0">
                         <a:lnSpc>
-                          <a:spcPts val="1480"/>
+                          <a:spcPts val="1391"/>
                         </a:lnSpc>
                         <a:buNone/>
                       </a:pPr>
                       <a:r>
-                        <a:rPr lang="en-US" sz="1058" b="1" dirty="0">
+                        <a:rPr lang="en-US" sz="1000" b="1" dirty="0">
                           <a:solidFill>
                             <a:srgbClr val="F6F4EF"/>
                           </a:solidFill>
@@ -25561,7 +26143,7 @@
                         </a:rPr>
                         <a:t>Std. Deviation</a:t>
                       </a:r>
-                      <a:endParaRPr lang="en-US" sz="1058" dirty="0">
+                      <a:endParaRPr lang="en-US" sz="1000" dirty="0">
                         <a:latin typeface="Tahoma" charset="0"/>
                         <a:ea typeface="Tahoma" charset="0"/>
                         <a:cs typeface="Tahoma" charset="0"/>
@@ -25611,12 +26193,12 @@
                     <a:p>
                       <a:pPr algn="ctr" indent="0" marL="0">
                         <a:lnSpc>
-                          <a:spcPts val="1480"/>
+                          <a:spcPts val="1391"/>
                         </a:lnSpc>
                         <a:buNone/>
                       </a:pPr>
                       <a:r>
-                        <a:rPr lang="en-US" sz="1058" b="1" dirty="0">
+                        <a:rPr lang="en-US" sz="1000" b="1" dirty="0">
                           <a:solidFill>
                             <a:srgbClr val="F6F4EF"/>
                           </a:solidFill>
@@ -25626,7 +26208,7 @@
                         </a:rPr>
                         <a:t>Std. Error Mean</a:t>
                       </a:r>
-                      <a:endParaRPr lang="en-US" sz="1058" dirty="0">
+                      <a:endParaRPr lang="en-US" sz="1000" dirty="0">
                         <a:latin typeface="Tahoma" charset="0"/>
                         <a:ea typeface="Tahoma" charset="0"/>
                         <a:cs typeface="Tahoma" charset="0"/>
@@ -25676,12 +26258,12 @@
                     <a:p>
                       <a:pPr algn="ctr" indent="0" marL="0">
                         <a:lnSpc>
-                          <a:spcPts val="1480"/>
+                          <a:spcPts val="1391"/>
                         </a:lnSpc>
                         <a:buNone/>
                       </a:pPr>
                       <a:r>
-                        <a:rPr lang="en-US" sz="1058" b="1" dirty="0">
+                        <a:rPr lang="en-US" sz="1000" b="1" dirty="0">
                           <a:solidFill>
                             <a:srgbClr val="F6F4EF"/>
                           </a:solidFill>
@@ -25691,7 +26273,7 @@
                         </a:rPr>
                         <a:t>99% CI Lower</a:t>
                       </a:r>
-                      <a:endParaRPr lang="en-US" sz="1058" dirty="0">
+                      <a:endParaRPr lang="en-US" sz="1000" dirty="0">
                         <a:latin typeface="Tahoma" charset="0"/>
                         <a:ea typeface="Tahoma" charset="0"/>
                         <a:cs typeface="Tahoma" charset="0"/>
@@ -25741,12 +26323,12 @@
                     <a:p>
                       <a:pPr algn="ctr" indent="0" marL="0">
                         <a:lnSpc>
-                          <a:spcPts val="1480"/>
+                          <a:spcPts val="1391"/>
                         </a:lnSpc>
                         <a:buNone/>
                       </a:pPr>
                       <a:r>
-                        <a:rPr lang="en-US" sz="1058" b="1" dirty="0">
+                        <a:rPr lang="en-US" sz="1000" b="1" dirty="0">
                           <a:solidFill>
                             <a:srgbClr val="F6F4EF"/>
                           </a:solidFill>
@@ -25756,7 +26338,7 @@
                         </a:rPr>
                         <a:t>99% CI Upper</a:t>
                       </a:r>
-                      <a:endParaRPr lang="en-US" sz="1058" dirty="0">
+                      <a:endParaRPr lang="en-US" sz="1000" dirty="0">
                         <a:latin typeface="Tahoma" charset="0"/>
                         <a:ea typeface="Tahoma" charset="0"/>
                         <a:cs typeface="Tahoma" charset="0"/>
@@ -25806,12 +26388,12 @@
                     <a:p>
                       <a:pPr algn="ctr" indent="0" marL="0">
                         <a:lnSpc>
-                          <a:spcPts val="1480"/>
+                          <a:spcPts val="1391"/>
                         </a:lnSpc>
                         <a:buNone/>
                       </a:pPr>
                       <a:r>
-                        <a:rPr lang="en-US" sz="1058" b="1" dirty="0">
+                        <a:rPr lang="en-US" sz="1000" b="1" dirty="0">
                           <a:solidFill>
                             <a:srgbClr val="F6F4EF"/>
                           </a:solidFill>
@@ -25821,7 +26403,7 @@
                         </a:rPr>
                         <a:t>t</a:t>
                       </a:r>
-                      <a:endParaRPr lang="en-US" sz="1058" dirty="0">
+                      <a:endParaRPr lang="en-US" sz="1000" dirty="0">
                         <a:latin typeface="Tahoma" charset="0"/>
                         <a:ea typeface="Tahoma" charset="0"/>
                         <a:cs typeface="Tahoma" charset="0"/>
@@ -25871,12 +26453,12 @@
                     <a:p>
                       <a:pPr algn="ctr" indent="0" marL="0">
                         <a:lnSpc>
-                          <a:spcPts val="1480"/>
+                          <a:spcPts val="1391"/>
                         </a:lnSpc>
                         <a:buNone/>
                       </a:pPr>
                       <a:r>
-                        <a:rPr lang="en-US" sz="1058" b="1" dirty="0">
+                        <a:rPr lang="en-US" sz="1000" b="1" dirty="0">
                           <a:solidFill>
                             <a:srgbClr val="F6F4EF"/>
                           </a:solidFill>
@@ -25886,7 +26468,7 @@
                         </a:rPr>
                         <a:t>df</a:t>
                       </a:r>
-                      <a:endParaRPr lang="en-US" sz="1058" dirty="0">
+                      <a:endParaRPr lang="en-US" sz="1000" dirty="0">
                         <a:latin typeface="Tahoma" charset="0"/>
                         <a:ea typeface="Tahoma" charset="0"/>
                         <a:cs typeface="Tahoma" charset="0"/>
@@ -25936,12 +26518,12 @@
                     <a:p>
                       <a:pPr algn="ctr" indent="0" marL="0">
                         <a:lnSpc>
-                          <a:spcPts val="1480"/>
+                          <a:spcPts val="1391"/>
                         </a:lnSpc>
                         <a:buNone/>
                       </a:pPr>
                       <a:r>
-                        <a:rPr lang="en-US" sz="1058" b="1" dirty="0">
+                        <a:rPr lang="en-US" sz="1000" b="1" dirty="0">
                           <a:solidFill>
                             <a:srgbClr val="F6F4EF"/>
                           </a:solidFill>
@@ -25951,7 +26533,7 @@
                         </a:rPr>
                         <a:t>Sig. (2-tailed)</a:t>
                       </a:r>
-                      <a:endParaRPr lang="en-US" sz="1058" dirty="0">
+                      <a:endParaRPr lang="en-US" sz="1000" dirty="0">
                         <a:latin typeface="Tahoma" charset="0"/>
                         <a:ea typeface="Tahoma" charset="0"/>
                         <a:cs typeface="Tahoma" charset="0"/>
@@ -26003,12 +26585,12 @@
                     <a:p>
                       <a:pPr indent="0" marL="0">
                         <a:lnSpc>
-                          <a:spcPts val="1480"/>
+                          <a:spcPts val="1391"/>
                         </a:lnSpc>
                         <a:buNone/>
                       </a:pPr>
                       <a:r>
-                        <a:rPr lang="en-US" sz="1058" dirty="0">
+                        <a:rPr lang="en-US" sz="1000" dirty="0">
                           <a:solidFill>
                             <a:srgbClr val="14233A"/>
                           </a:solidFill>
@@ -26018,7 +26600,7 @@
                         </a:rPr>
                         <a:t>att_before - att_after</a:t>
                       </a:r>
-                      <a:endParaRPr lang="en-US" sz="1058" dirty="0">
+                      <a:endParaRPr lang="en-US" sz="1000" dirty="0">
                         <a:latin typeface="Tahoma" charset="0"/>
                         <a:ea typeface="Tahoma" charset="0"/>
                         <a:cs typeface="Tahoma" charset="0"/>
@@ -26068,12 +26650,12 @@
                     <a:p>
                       <a:pPr algn="ctr" indent="0" marL="0">
                         <a:lnSpc>
-                          <a:spcPts val="1480"/>
+                          <a:spcPts val="1391"/>
                         </a:lnSpc>
                         <a:buNone/>
                       </a:pPr>
                       <a:r>
-                        <a:rPr lang="en-US" sz="1058" dirty="0">
+                        <a:rPr lang="en-US" sz="1000" dirty="0">
                           <a:solidFill>
                             <a:srgbClr val="14233A"/>
                           </a:solidFill>
@@ -26083,7 +26665,7 @@
                         </a:rPr>
                         <a:t>-.550</a:t>
                       </a:r>
-                      <a:endParaRPr lang="en-US" sz="1058" dirty="0">
+                      <a:endParaRPr lang="en-US" sz="1000" dirty="0">
                         <a:latin typeface="Tahoma" charset="0"/>
                         <a:ea typeface="Tahoma" charset="0"/>
                         <a:cs typeface="Tahoma" charset="0"/>
@@ -26139,12 +26721,12 @@
                     <a:p>
                       <a:pPr algn="ctr" indent="0" marL="0">
                         <a:lnSpc>
-                          <a:spcPts val="1480"/>
+                          <a:spcPts val="1391"/>
                         </a:lnSpc>
                         <a:buNone/>
                       </a:pPr>
                       <a:r>
-                        <a:rPr lang="en-US" sz="1058" dirty="0">
+                        <a:rPr lang="en-US" sz="1000" dirty="0">
                           <a:solidFill>
                             <a:srgbClr val="14233A"/>
                           </a:solidFill>
@@ -26154,7 +26736,7 @@
                         </a:rPr>
                         <a:t>.256</a:t>
                       </a:r>
-                      <a:endParaRPr lang="en-US" sz="1058" dirty="0">
+                      <a:endParaRPr lang="en-US" sz="1000" dirty="0">
                         <a:latin typeface="Tahoma" charset="0"/>
                         <a:ea typeface="Tahoma" charset="0"/>
                         <a:cs typeface="Tahoma" charset="0"/>
@@ -26210,12 +26792,12 @@
                     <a:p>
                       <a:pPr algn="ctr" indent="0" marL="0">
                         <a:lnSpc>
-                          <a:spcPts val="1480"/>
+                          <a:spcPts val="1391"/>
                         </a:lnSpc>
                         <a:buNone/>
                       </a:pPr>
                       <a:r>
-                        <a:rPr lang="en-US" sz="1058" dirty="0">
+                        <a:rPr lang="en-US" sz="1000" dirty="0">
                           <a:solidFill>
                             <a:srgbClr val="14233A"/>
                           </a:solidFill>
@@ -26225,7 +26807,7 @@
                         </a:rPr>
                         <a:t>.091</a:t>
                       </a:r>
-                      <a:endParaRPr lang="en-US" sz="1058" dirty="0">
+                      <a:endParaRPr lang="en-US" sz="1000" dirty="0">
                         <a:latin typeface="Tahoma" charset="0"/>
                         <a:ea typeface="Tahoma" charset="0"/>
                         <a:cs typeface="Tahoma" charset="0"/>
@@ -26281,12 +26863,12 @@
                     <a:p>
                       <a:pPr algn="ctr" indent="0" marL="0">
                         <a:lnSpc>
-                          <a:spcPts val="1480"/>
+                          <a:spcPts val="1391"/>
                         </a:lnSpc>
                         <a:buNone/>
                       </a:pPr>
                       <a:r>
-                        <a:rPr lang="en-US" sz="1058" dirty="0">
+                        <a:rPr lang="en-US" sz="1000" dirty="0">
                           <a:solidFill>
                             <a:srgbClr val="14233A"/>
                           </a:solidFill>
@@ -26296,7 +26878,7 @@
                         </a:rPr>
                         <a:t>-.867</a:t>
                       </a:r>
-                      <a:endParaRPr lang="en-US" sz="1058" dirty="0">
+                      <a:endParaRPr lang="en-US" sz="1000" dirty="0">
                         <a:latin typeface="Tahoma" charset="0"/>
                         <a:ea typeface="Tahoma" charset="0"/>
                         <a:cs typeface="Tahoma" charset="0"/>
@@ -26352,12 +26934,12 @@
                     <a:p>
                       <a:pPr algn="ctr" indent="0" marL="0">
                         <a:lnSpc>
-                          <a:spcPts val="1480"/>
+                          <a:spcPts val="1391"/>
                         </a:lnSpc>
                         <a:buNone/>
                       </a:pPr>
                       <a:r>
-                        <a:rPr lang="en-US" sz="1058" dirty="0">
+                        <a:rPr lang="en-US" sz="1000" dirty="0">
                           <a:solidFill>
                             <a:srgbClr val="14233A"/>
                           </a:solidFill>
@@ -26367,7 +26949,7 @@
                         </a:rPr>
                         <a:t>-.233</a:t>
                       </a:r>
-                      <a:endParaRPr lang="en-US" sz="1058" dirty="0">
+                      <a:endParaRPr lang="en-US" sz="1000" dirty="0">
                         <a:latin typeface="Tahoma" charset="0"/>
                         <a:ea typeface="Tahoma" charset="0"/>
                         <a:cs typeface="Tahoma" charset="0"/>
@@ -26423,12 +27005,12 @@
                     <a:p>
                       <a:pPr algn="ctr" indent="0" marL="0">
                         <a:lnSpc>
-                          <a:spcPts val="1480"/>
+                          <a:spcPts val="1391"/>
                         </a:lnSpc>
                         <a:buNone/>
                       </a:pPr>
                       <a:r>
-                        <a:rPr lang="en-US" sz="1058" dirty="0">
+                        <a:rPr lang="en-US" sz="1000" dirty="0">
                           <a:solidFill>
                             <a:srgbClr val="14233A"/>
                           </a:solidFill>
@@ -26438,7 +27020,7 @@
                         </a:rPr>
                         <a:t>-6.068</a:t>
                       </a:r>
-                      <a:endParaRPr lang="en-US" sz="1058" dirty="0">
+                      <a:endParaRPr lang="en-US" sz="1000" dirty="0">
                         <a:latin typeface="Tahoma" charset="0"/>
                         <a:ea typeface="Tahoma" charset="0"/>
                         <a:cs typeface="Tahoma" charset="0"/>
@@ -26494,12 +27076,12 @@
                     <a:p>
                       <a:pPr algn="ctr" indent="0" marL="0">
                         <a:lnSpc>
-                          <a:spcPts val="1480"/>
+                          <a:spcPts val="1391"/>
                         </a:lnSpc>
                         <a:buNone/>
                       </a:pPr>
                       <a:r>
-                        <a:rPr lang="en-US" sz="1058" dirty="0">
+                        <a:rPr lang="en-US" sz="1000" dirty="0">
                           <a:solidFill>
                             <a:srgbClr val="14233A"/>
                           </a:solidFill>
@@ -26509,7 +27091,7 @@
                         </a:rPr>
                         <a:t>7</a:t>
                       </a:r>
-                      <a:endParaRPr lang="en-US" sz="1058" dirty="0">
+                      <a:endParaRPr lang="en-US" sz="1000" dirty="0">
                         <a:latin typeface="Tahoma" charset="0"/>
                         <a:ea typeface="Tahoma" charset="0"/>
                         <a:cs typeface="Tahoma" charset="0"/>
@@ -26565,12 +27147,12 @@
                     <a:p>
                       <a:pPr algn="ctr" indent="0" marL="0">
                         <a:lnSpc>
-                          <a:spcPts val="1480"/>
+                          <a:spcPts val="1391"/>
                         </a:lnSpc>
                         <a:buNone/>
                       </a:pPr>
                       <a:r>
-                        <a:rPr lang="en-US" sz="1058" dirty="0">
+                        <a:rPr lang="en-US" sz="1000" dirty="0">
                           <a:solidFill>
                             <a:srgbClr val="9A5B00"/>
                           </a:solidFill>
@@ -26580,7 +27162,7 @@
                         </a:rPr>
                         <a:t>.001</a:t>
                       </a:r>
-                      <a:endParaRPr lang="en-US" sz="1058" dirty="0">
+                      <a:endParaRPr lang="en-US" sz="1000" dirty="0">
                         <a:latin typeface="Tahoma" charset="0"/>
                         <a:ea typeface="Tahoma" charset="0"/>
                         <a:cs typeface="Tahoma" charset="0"/>
@@ -26837,6 +27419,200 @@
   <p:clrMapOvr>
     <a:masterClrMapping/>
   </p:clrMapOvr>
+  <p:timing>
+    <p:tnLst>
+      <p:par>
+        <p:cTn id="1" dur="indefinite" restart="never" nodeType="tmRoot">
+          <p:childTnLst>
+            <p:seq concurrent="1" nextAc="seek">
+              <p:cTn id="2" dur="indefinite" nodeType="mainSeq">
+                <p:childTnLst>
+                  <p:par>
+                    <p:cTn id="3" fill="hold">
+                      <p:stCondLst>
+                        <p:cond delay="indefinite"/>
+                      </p:stCondLst>
+                      <p:childTnLst>
+                        <p:par>
+                          <p:cTn id="4" fill="hold">
+                            <p:stCondLst>
+                              <p:cond delay="0"/>
+                            </p:stCondLst>
+                            <p:childTnLst>
+                              <p:par>
+                                <p:cTn id="5" presetID="10" presetClass="entr" presetSubtype="0" fill="hold" grpId="0" nodeType="clickEffect">
+                                  <p:stCondLst>
+                                    <p:cond delay="0"/>
+                                  </p:stCondLst>
+                                  <p:childTnLst>
+                                    <p:set>
+                                      <p:cBhvr>
+                                        <p:cTn id="105" dur="1" fill="hold">
+                                          <p:stCondLst>
+                                            <p:cond delay="0"/>
+                                          </p:stCondLst>
+                                        </p:cTn>
+                                        <p:tgtEl>
+                                          <p:spTgt spid="3"/>
+                                        </p:tgtEl>
+                                        <p:attrNameLst>
+                                          <p:attrName>style.visibility</p:attrName>
+                                        </p:attrNameLst>
+                                      </p:cBhvr>
+                                      <p:to>
+                                        <p:strVal val="visible"/>
+                                      </p:to>
+                                    </p:set>
+                                    <p:animEffect transition="in" filter="fade">
+                                      <p:cBhvr>
+                                        <p:cTn id="6" dur="500"/>
+                                        <p:tgtEl>
+                                          <p:spTgt spid="3"/>
+                                        </p:tgtEl>
+                                      </p:cBhvr>
+                                    </p:animEffect>
+                                  </p:childTnLst>
+                                </p:cTn>
+                              </p:par>
+                              <p:par>
+                                <p:cTn id="7" presetID="10" presetClass="entr" presetSubtype="0" fill="hold" grpId="0" nodeType="withEffect">
+                                  <p:stCondLst>
+                                    <p:cond delay="0"/>
+                                  </p:stCondLst>
+                                  <p:childTnLst>
+                                    <p:set>
+                                      <p:cBhvr>
+                                        <p:cTn id="107" dur="1" fill="hold">
+                                          <p:stCondLst>
+                                            <p:cond delay="0"/>
+                                          </p:stCondLst>
+                                        </p:cTn>
+                                        <p:tgtEl>
+                                          <p:spTgt spid="16"/>
+                                        </p:tgtEl>
+                                        <p:attrNameLst>
+                                          <p:attrName>style.visibility</p:attrName>
+                                        </p:attrNameLst>
+                                      </p:cBhvr>
+                                      <p:to>
+                                        <p:strVal val="visible"/>
+                                      </p:to>
+                                    </p:set>
+                                    <p:animEffect transition="in" filter="fade">
+                                      <p:cBhvr>
+                                        <p:cTn id="8" dur="500"/>
+                                        <p:tgtEl>
+                                          <p:spTgt spid="16"/>
+                                        </p:tgtEl>
+                                      </p:cBhvr>
+                                    </p:animEffect>
+                                  </p:childTnLst>
+                                </p:cTn>
+                              </p:par>
+                              <p:par>
+                                <p:cTn id="9" presetID="10" presetClass="entr" presetSubtype="0" fill="hold" grpId="0" nodeType="withEffect">
+                                  <p:stCondLst>
+                                    <p:cond delay="0"/>
+                                  </p:stCondLst>
+                                  <p:childTnLst>
+                                    <p:set>
+                                      <p:cBhvr>
+                                        <p:cTn id="109" dur="1" fill="hold">
+                                          <p:stCondLst>
+                                            <p:cond delay="0"/>
+                                          </p:stCondLst>
+                                        </p:cTn>
+                                        <p:tgtEl>
+                                          <p:spTgt spid="17"/>
+                                        </p:tgtEl>
+                                        <p:attrNameLst>
+                                          <p:attrName>style.visibility</p:attrName>
+                                        </p:attrNameLst>
+                                      </p:cBhvr>
+                                      <p:to>
+                                        <p:strVal val="visible"/>
+                                      </p:to>
+                                    </p:set>
+                                    <p:animEffect transition="in" filter="fade">
+                                      <p:cBhvr>
+                                        <p:cTn id="10" dur="500"/>
+                                        <p:tgtEl>
+                                          <p:spTgt spid="17"/>
+                                        </p:tgtEl>
+                                      </p:cBhvr>
+                                    </p:animEffect>
+                                  </p:childTnLst>
+                                </p:cTn>
+                              </p:par>
+                              <p:par>
+                                <p:cTn id="11" presetID="10" presetClass="entr" presetSubtype="0" fill="hold" grpId="0" nodeType="withEffect">
+                                  <p:stCondLst>
+                                    <p:cond delay="0"/>
+                                  </p:stCondLst>
+                                  <p:childTnLst>
+                                    <p:set>
+                                      <p:cBhvr>
+                                        <p:cTn id="111" dur="1" fill="hold">
+                                          <p:stCondLst>
+                                            <p:cond delay="0"/>
+                                          </p:stCondLst>
+                                        </p:cTn>
+                                        <p:tgtEl>
+                                          <p:spTgt spid="18"/>
+                                        </p:tgtEl>
+                                        <p:attrNameLst>
+                                          <p:attrName>style.visibility</p:attrName>
+                                        </p:attrNameLst>
+                                      </p:cBhvr>
+                                      <p:to>
+                                        <p:strVal val="visible"/>
+                                      </p:to>
+                                    </p:set>
+                                    <p:animEffect transition="in" filter="fade">
+                                      <p:cBhvr>
+                                        <p:cTn id="12" dur="500"/>
+                                        <p:tgtEl>
+                                          <p:spTgt spid="18"/>
+                                        </p:tgtEl>
+                                      </p:cBhvr>
+                                    </p:animEffect>
+                                  </p:childTnLst>
+                                </p:cTn>
+                              </p:par>
+                            </p:childTnLst>
+                          </p:cTn>
+                        </p:par>
+                      </p:childTnLst>
+                    </p:cTn>
+                  </p:par>
+                </p:childTnLst>
+              </p:cTn>
+              <p:prevCondLst>
+                <p:cond evt="onPrev" delay="0">
+                  <p:tgtEl>
+                    <p:sldTgt/>
+                  </p:tgtEl>
+                </p:cond>
+              </p:prevCondLst>
+              <p:nextCondLst>
+                <p:cond evt="onNext" delay="0">
+                  <p:tgtEl>
+                    <p:sldTgt/>
+                  </p:tgtEl>
+                </p:cond>
+              </p:nextCondLst>
+            </p:seq>
+          </p:childTnLst>
+        </p:cTn>
+      </p:par>
+    </p:tnLst>
+    <p:bldLst>
+      <p:bldP spid="3" grpId="0" animBg="1"/>
+      <p:bldP spid="16" grpId="0" animBg="1"/>
+      <p:bldP spid="17" grpId="0" animBg="1"/>
+      <p:bldP spid="18" grpId="0" animBg="1"/>
+    </p:bldLst>
+  </p:timing>
 </p:sld>
 </file>
 
@@ -27674,11 +28450,11 @@
                     <a:p>
                       <a:pPr indent="0" marL="0">
                         <a:lnSpc>
-                          <a:spcPts val="1680"/>
+                          <a:spcPts val="1579"/>
                         </a:lnSpc>
                         <a:buNone/>
                       </a:pPr>
-                      <a:endParaRPr lang="en-US" sz="1200" dirty="0">
+                      <a:endParaRPr lang="en-US" sz="1150" dirty="0">
                         <a:latin typeface="Tahoma" charset="0"/>
                         <a:ea typeface="Tahoma" charset="0"/>
                         <a:cs typeface="Tahoma" charset="0"/>
@@ -27722,12 +28498,12 @@
                     <a:p>
                       <a:pPr algn="ctr" indent="0" marL="0">
                         <a:lnSpc>
-                          <a:spcPts val="1680"/>
+                          <a:spcPts val="1579"/>
                         </a:lnSpc>
                         <a:buNone/>
                       </a:pPr>
                       <a:r>
-                        <a:rPr lang="en-US" sz="1200" b="1" dirty="0">
+                        <a:rPr lang="en-US" sz="1150" b="1" dirty="0">
                           <a:solidFill>
                             <a:srgbClr val="F6F4EF"/>
                           </a:solidFill>
@@ -27737,7 +28513,7 @@
                         </a:rPr>
                         <a:t>N</a:t>
                       </a:r>
-                      <a:endParaRPr lang="en-US" sz="1200" dirty="0">
+                      <a:endParaRPr lang="en-US" sz="1150" dirty="0">
                         <a:latin typeface="Tahoma" charset="0"/>
                         <a:ea typeface="Tahoma" charset="0"/>
                         <a:cs typeface="Tahoma" charset="0"/>
@@ -27787,12 +28563,12 @@
                     <a:p>
                       <a:pPr algn="ctr" indent="0" marL="0">
                         <a:lnSpc>
-                          <a:spcPts val="1680"/>
+                          <a:spcPts val="1579"/>
                         </a:lnSpc>
                         <a:buNone/>
                       </a:pPr>
                       <a:r>
-                        <a:rPr lang="en-US" sz="1200" b="1" dirty="0">
+                        <a:rPr lang="en-US" sz="1150" b="1" dirty="0">
                           <a:solidFill>
                             <a:srgbClr val="F6F4EF"/>
                           </a:solidFill>
@@ -27802,7 +28578,7 @@
                         </a:rPr>
                         <a:t>Mean</a:t>
                       </a:r>
-                      <a:endParaRPr lang="en-US" sz="1200" dirty="0">
+                      <a:endParaRPr lang="en-US" sz="1150" dirty="0">
                         <a:latin typeface="Tahoma" charset="0"/>
                         <a:ea typeface="Tahoma" charset="0"/>
                         <a:cs typeface="Tahoma" charset="0"/>
@@ -27852,12 +28628,12 @@
                     <a:p>
                       <a:pPr algn="ctr" indent="0" marL="0">
                         <a:lnSpc>
-                          <a:spcPts val="1680"/>
+                          <a:spcPts val="1579"/>
                         </a:lnSpc>
                         <a:buNone/>
                       </a:pPr>
                       <a:r>
-                        <a:rPr lang="en-US" sz="1200" b="1" dirty="0">
+                        <a:rPr lang="en-US" sz="1150" b="1" dirty="0">
                           <a:solidFill>
                             <a:srgbClr val="F6F4EF"/>
                           </a:solidFill>
@@ -27867,7 +28643,7 @@
                         </a:rPr>
                         <a:t>Std. Deviation</a:t>
                       </a:r>
-                      <a:endParaRPr lang="en-US" sz="1200" dirty="0">
+                      <a:endParaRPr lang="en-US" sz="1150" dirty="0">
                         <a:latin typeface="Tahoma" charset="0"/>
                         <a:ea typeface="Tahoma" charset="0"/>
                         <a:cs typeface="Tahoma" charset="0"/>
@@ -27917,12 +28693,12 @@
                     <a:p>
                       <a:pPr algn="ctr" indent="0" marL="0">
                         <a:lnSpc>
-                          <a:spcPts val="1680"/>
+                          <a:spcPts val="1579"/>
                         </a:lnSpc>
                         <a:buNone/>
                       </a:pPr>
                       <a:r>
-                        <a:rPr lang="en-US" sz="1200" b="1" dirty="0">
+                        <a:rPr lang="en-US" sz="1150" b="1" dirty="0">
                           <a:solidFill>
                             <a:srgbClr val="F6F4EF"/>
                           </a:solidFill>
@@ -27932,7 +28708,7 @@
                         </a:rPr>
                         <a:t>Std. Error Mean</a:t>
                       </a:r>
-                      <a:endParaRPr lang="en-US" sz="1200" dirty="0">
+                      <a:endParaRPr lang="en-US" sz="1150" dirty="0">
                         <a:latin typeface="Tahoma" charset="0"/>
                         <a:ea typeface="Tahoma" charset="0"/>
                         <a:cs typeface="Tahoma" charset="0"/>
@@ -27984,12 +28760,12 @@
                     <a:p>
                       <a:pPr indent="0" marL="0">
                         <a:lnSpc>
-                          <a:spcPts val="1680"/>
+                          <a:spcPts val="1579"/>
                         </a:lnSpc>
                         <a:buNone/>
                       </a:pPr>
                       <a:r>
-                        <a:rPr lang="en-US" sz="1200" dirty="0">
+                        <a:rPr lang="en-US" sz="1150" dirty="0">
                           <a:solidFill>
                             <a:srgbClr val="14233A"/>
                           </a:solidFill>
@@ -27999,7 +28775,7 @@
                         </a:rPr>
                         <a:t>wage</a:t>
                       </a:r>
-                      <a:endParaRPr lang="en-US" sz="1200" dirty="0">
+                      <a:endParaRPr lang="en-US" sz="1150" dirty="0">
                         <a:latin typeface="Tahoma" charset="0"/>
                         <a:ea typeface="Tahoma" charset="0"/>
                         <a:cs typeface="Tahoma" charset="0"/>
@@ -28049,12 +28825,12 @@
                     <a:p>
                       <a:pPr algn="ctr" indent="0" marL="0">
                         <a:lnSpc>
-                          <a:spcPts val="1680"/>
+                          <a:spcPts val="1579"/>
                         </a:lnSpc>
                         <a:buNone/>
                       </a:pPr>
                       <a:r>
-                        <a:rPr lang="en-US" sz="1200" dirty="0">
+                        <a:rPr lang="en-US" sz="1150" dirty="0">
                           <a:solidFill>
                             <a:srgbClr val="14233A"/>
                           </a:solidFill>
@@ -28064,7 +28840,7 @@
                         </a:rPr>
                         <a:t>10</a:t>
                       </a:r>
-                      <a:endParaRPr lang="en-US" sz="1200" dirty="0">
+                      <a:endParaRPr lang="en-US" sz="1150" dirty="0">
                         <a:latin typeface="Tahoma" charset="0"/>
                         <a:ea typeface="Tahoma" charset="0"/>
                         <a:cs typeface="Tahoma" charset="0"/>
@@ -28120,12 +28896,12 @@
                     <a:p>
                       <a:pPr algn="ctr" indent="0" marL="0">
                         <a:lnSpc>
-                          <a:spcPts val="1680"/>
+                          <a:spcPts val="1579"/>
                         </a:lnSpc>
                         <a:buNone/>
                       </a:pPr>
                       <a:r>
-                        <a:rPr lang="en-US" sz="1200" dirty="0">
+                        <a:rPr lang="en-US" sz="1150" dirty="0">
                           <a:solidFill>
                             <a:srgbClr val="14233A"/>
                           </a:solidFill>
@@ -28135,7 +28911,7 @@
                         </a:rPr>
                         <a:t>407.80</a:t>
                       </a:r>
-                      <a:endParaRPr lang="en-US" sz="1200" dirty="0">
+                      <a:endParaRPr lang="en-US" sz="1150" dirty="0">
                         <a:latin typeface="Tahoma" charset="0"/>
                         <a:ea typeface="Tahoma" charset="0"/>
                         <a:cs typeface="Tahoma" charset="0"/>
@@ -28191,12 +28967,12 @@
                     <a:p>
                       <a:pPr algn="ctr" indent="0" marL="0">
                         <a:lnSpc>
-                          <a:spcPts val="1680"/>
+                          <a:spcPts val="1579"/>
                         </a:lnSpc>
                         <a:buNone/>
                       </a:pPr>
                       <a:r>
-                        <a:rPr lang="en-US" sz="1200" dirty="0">
+                        <a:rPr lang="en-US" sz="1150" dirty="0">
                           <a:solidFill>
                             <a:srgbClr val="14233A"/>
                           </a:solidFill>
@@ -28206,7 +28982,7 @@
                         </a:rPr>
                         <a:t>161.560</a:t>
                       </a:r>
-                      <a:endParaRPr lang="en-US" sz="1200" dirty="0">
+                      <a:endParaRPr lang="en-US" sz="1150" dirty="0">
                         <a:latin typeface="Tahoma" charset="0"/>
                         <a:ea typeface="Tahoma" charset="0"/>
                         <a:cs typeface="Tahoma" charset="0"/>
@@ -28262,12 +29038,12 @@
                     <a:p>
                       <a:pPr algn="ctr" indent="0" marL="0">
                         <a:lnSpc>
-                          <a:spcPts val="1680"/>
+                          <a:spcPts val="1579"/>
                         </a:lnSpc>
                         <a:buNone/>
                       </a:pPr>
                       <a:r>
-                        <a:rPr lang="en-US" sz="1200" dirty="0">
+                        <a:rPr lang="en-US" sz="1150" dirty="0">
                           <a:solidFill>
                             <a:srgbClr val="14233A"/>
                           </a:solidFill>
@@ -28277,7 +29053,7 @@
                         </a:rPr>
                         <a:t>51.090</a:t>
                       </a:r>
-                      <a:endParaRPr lang="en-US" sz="1200" dirty="0">
+                      <a:endParaRPr lang="en-US" sz="1150" dirty="0">
                         <a:latin typeface="Tahoma" charset="0"/>
                         <a:ea typeface="Tahoma" charset="0"/>
                         <a:cs typeface="Tahoma" charset="0"/>
@@ -28539,11 +29315,11 @@
                     <a:p>
                       <a:pPr indent="0" marL="0">
                         <a:lnSpc>
-                          <a:spcPts val="1680"/>
+                          <a:spcPts val="1579"/>
                         </a:lnSpc>
                         <a:buNone/>
                       </a:pPr>
-                      <a:endParaRPr lang="en-US" sz="1200" dirty="0">
+                      <a:endParaRPr lang="en-US" sz="1150" dirty="0">
                         <a:latin typeface="Tahoma" charset="0"/>
                         <a:ea typeface="Tahoma" charset="0"/>
                         <a:cs typeface="Tahoma" charset="0"/>
@@ -28587,12 +29363,12 @@
                     <a:p>
                       <a:pPr algn="ctr" indent="0" marL="0">
                         <a:lnSpc>
-                          <a:spcPts val="1680"/>
+                          <a:spcPts val="1579"/>
                         </a:lnSpc>
                         <a:buNone/>
                       </a:pPr>
                       <a:r>
-                        <a:rPr lang="en-US" sz="1200" b="1" dirty="0">
+                        <a:rPr lang="en-US" sz="1150" b="1" dirty="0">
                           <a:solidFill>
                             <a:srgbClr val="F6F4EF"/>
                           </a:solidFill>
@@ -28602,7 +29378,7 @@
                         </a:rPr>
                         <a:t>t</a:t>
                       </a:r>
-                      <a:endParaRPr lang="en-US" sz="1200" dirty="0">
+                      <a:endParaRPr lang="en-US" sz="1150" dirty="0">
                         <a:latin typeface="Tahoma" charset="0"/>
                         <a:ea typeface="Tahoma" charset="0"/>
                         <a:cs typeface="Tahoma" charset="0"/>
@@ -28652,12 +29428,12 @@
                     <a:p>
                       <a:pPr algn="ctr" indent="0" marL="0">
                         <a:lnSpc>
-                          <a:spcPts val="1680"/>
+                          <a:spcPts val="1579"/>
                         </a:lnSpc>
                         <a:buNone/>
                       </a:pPr>
                       <a:r>
-                        <a:rPr lang="en-US" sz="1200" b="1" dirty="0">
+                        <a:rPr lang="en-US" sz="1150" b="1" dirty="0">
                           <a:solidFill>
                             <a:srgbClr val="F6F4EF"/>
                           </a:solidFill>
@@ -28667,7 +29443,7 @@
                         </a:rPr>
                         <a:t>df</a:t>
                       </a:r>
-                      <a:endParaRPr lang="en-US" sz="1200" dirty="0">
+                      <a:endParaRPr lang="en-US" sz="1150" dirty="0">
                         <a:latin typeface="Tahoma" charset="0"/>
                         <a:ea typeface="Tahoma" charset="0"/>
                         <a:cs typeface="Tahoma" charset="0"/>
@@ -28717,12 +29493,12 @@
                     <a:p>
                       <a:pPr algn="ctr" indent="0" marL="0">
                         <a:lnSpc>
-                          <a:spcPts val="1680"/>
+                          <a:spcPts val="1579"/>
                         </a:lnSpc>
                         <a:buNone/>
                       </a:pPr>
                       <a:r>
-                        <a:rPr lang="en-US" sz="1200" b="1" dirty="0">
+                        <a:rPr lang="en-US" sz="1150" b="1" dirty="0">
                           <a:solidFill>
                             <a:srgbClr val="F6F4EF"/>
                           </a:solidFill>
@@ -28732,7 +29508,7 @@
                         </a:rPr>
                         <a:t>Sig. (2-tailed)</a:t>
                       </a:r>
-                      <a:endParaRPr lang="en-US" sz="1200" dirty="0">
+                      <a:endParaRPr lang="en-US" sz="1150" dirty="0">
                         <a:latin typeface="Tahoma" charset="0"/>
                         <a:ea typeface="Tahoma" charset="0"/>
                         <a:cs typeface="Tahoma" charset="0"/>
@@ -28782,12 +29558,12 @@
                     <a:p>
                       <a:pPr algn="ctr" indent="0" marL="0">
                         <a:lnSpc>
-                          <a:spcPts val="1680"/>
+                          <a:spcPts val="1579"/>
                         </a:lnSpc>
                         <a:buNone/>
                       </a:pPr>
                       <a:r>
-                        <a:rPr lang="en-US" sz="1200" b="1" dirty="0">
+                        <a:rPr lang="en-US" sz="1150" b="1" dirty="0">
                           <a:solidFill>
                             <a:srgbClr val="F6F4EF"/>
                           </a:solidFill>
@@ -28797,7 +29573,7 @@
                         </a:rPr>
                         <a:t>Mean Difference</a:t>
                       </a:r>
-                      <a:endParaRPr lang="en-US" sz="1200" dirty="0">
+                      <a:endParaRPr lang="en-US" sz="1150" dirty="0">
                         <a:latin typeface="Tahoma" charset="0"/>
                         <a:ea typeface="Tahoma" charset="0"/>
                         <a:cs typeface="Tahoma" charset="0"/>
@@ -28847,12 +29623,12 @@
                     <a:p>
                       <a:pPr algn="ctr" indent="0" marL="0">
                         <a:lnSpc>
-                          <a:spcPts val="1680"/>
+                          <a:spcPts val="1579"/>
                         </a:lnSpc>
                         <a:buNone/>
                       </a:pPr>
                       <a:r>
-                        <a:rPr lang="en-US" sz="1200" b="1" dirty="0">
+                        <a:rPr lang="en-US" sz="1150" b="1" dirty="0">
                           <a:solidFill>
                             <a:srgbClr val="F6F4EF"/>
                           </a:solidFill>
@@ -28862,7 +29638,7 @@
                         </a:rPr>
                         <a:t>99% CI Lower</a:t>
                       </a:r>
-                      <a:endParaRPr lang="en-US" sz="1200" dirty="0">
+                      <a:endParaRPr lang="en-US" sz="1150" dirty="0">
                         <a:latin typeface="Tahoma" charset="0"/>
                         <a:ea typeface="Tahoma" charset="0"/>
                         <a:cs typeface="Tahoma" charset="0"/>
@@ -28912,12 +29688,12 @@
                     <a:p>
                       <a:pPr algn="ctr" indent="0" marL="0">
                         <a:lnSpc>
-                          <a:spcPts val="1680"/>
+                          <a:spcPts val="1579"/>
                         </a:lnSpc>
                         <a:buNone/>
                       </a:pPr>
                       <a:r>
-                        <a:rPr lang="en-US" sz="1200" b="1" dirty="0">
+                        <a:rPr lang="en-US" sz="1150" b="1" dirty="0">
                           <a:solidFill>
                             <a:srgbClr val="F6F4EF"/>
                           </a:solidFill>
@@ -28927,7 +29703,7 @@
                         </a:rPr>
                         <a:t>99% CI Upper</a:t>
                       </a:r>
-                      <a:endParaRPr lang="en-US" sz="1200" dirty="0">
+                      <a:endParaRPr lang="en-US" sz="1150" dirty="0">
                         <a:latin typeface="Tahoma" charset="0"/>
                         <a:ea typeface="Tahoma" charset="0"/>
                         <a:cs typeface="Tahoma" charset="0"/>
@@ -28979,12 +29755,12 @@
                     <a:p>
                       <a:pPr indent="0" marL="0">
                         <a:lnSpc>
-                          <a:spcPts val="1680"/>
+                          <a:spcPts val="1579"/>
                         </a:lnSpc>
                         <a:buNone/>
                       </a:pPr>
                       <a:r>
-                        <a:rPr lang="en-US" sz="1200" dirty="0">
+                        <a:rPr lang="en-US" sz="1150" dirty="0">
                           <a:solidFill>
                             <a:srgbClr val="14233A"/>
                           </a:solidFill>
@@ -28994,7 +29770,7 @@
                         </a:rPr>
                         <a:t>wage</a:t>
                       </a:r>
-                      <a:endParaRPr lang="en-US" sz="1200" dirty="0">
+                      <a:endParaRPr lang="en-US" sz="1150" dirty="0">
                         <a:latin typeface="Tahoma" charset="0"/>
                         <a:ea typeface="Tahoma" charset="0"/>
                         <a:cs typeface="Tahoma" charset="0"/>
@@ -29044,12 +29820,12 @@
                     <a:p>
                       <a:pPr algn="ctr" indent="0" marL="0">
                         <a:lnSpc>
-                          <a:spcPts val="1680"/>
+                          <a:spcPts val="1579"/>
                         </a:lnSpc>
                         <a:buNone/>
                       </a:pPr>
                       <a:r>
-                        <a:rPr lang="en-US" sz="1200" dirty="0">
+                        <a:rPr lang="en-US" sz="1150" dirty="0">
                           <a:solidFill>
                             <a:srgbClr val="14233A"/>
                           </a:solidFill>
@@ -29059,7 +29835,7 @@
                         </a:rPr>
                         <a:t>2.110</a:t>
                       </a:r>
-                      <a:endParaRPr lang="en-US" sz="1200" dirty="0">
+                      <a:endParaRPr lang="en-US" sz="1150" dirty="0">
                         <a:latin typeface="Tahoma" charset="0"/>
                         <a:ea typeface="Tahoma" charset="0"/>
                         <a:cs typeface="Tahoma" charset="0"/>
@@ -29115,12 +29891,12 @@
                     <a:p>
                       <a:pPr algn="ctr" indent="0" marL="0">
                         <a:lnSpc>
-                          <a:spcPts val="1680"/>
+                          <a:spcPts val="1579"/>
                         </a:lnSpc>
                         <a:buNone/>
                       </a:pPr>
                       <a:r>
-                        <a:rPr lang="en-US" sz="1200" dirty="0">
+                        <a:rPr lang="en-US" sz="1150" dirty="0">
                           <a:solidFill>
                             <a:srgbClr val="14233A"/>
                           </a:solidFill>
@@ -29130,7 +29906,7 @@
                         </a:rPr>
                         <a:t>9</a:t>
                       </a:r>
-                      <a:endParaRPr lang="en-US" sz="1200" dirty="0">
+                      <a:endParaRPr lang="en-US" sz="1150" dirty="0">
                         <a:latin typeface="Tahoma" charset="0"/>
                         <a:ea typeface="Tahoma" charset="0"/>
                         <a:cs typeface="Tahoma" charset="0"/>
@@ -29186,12 +29962,12 @@
                     <a:p>
                       <a:pPr algn="ctr" indent="0" marL="0">
                         <a:lnSpc>
-                          <a:spcPts val="1680"/>
+                          <a:spcPts val="1579"/>
                         </a:lnSpc>
                         <a:buNone/>
                       </a:pPr>
                       <a:r>
-                        <a:rPr lang="en-US" sz="1200" dirty="0">
+                        <a:rPr lang="en-US" sz="1150" dirty="0">
                           <a:solidFill>
                             <a:srgbClr val="9A5B00"/>
                           </a:solidFill>
@@ -29201,7 +29977,7 @@
                         </a:rPr>
                         <a:t>.064</a:t>
                       </a:r>
-                      <a:endParaRPr lang="en-US" sz="1200" dirty="0">
+                      <a:endParaRPr lang="en-US" sz="1150" dirty="0">
                         <a:latin typeface="Tahoma" charset="0"/>
                         <a:ea typeface="Tahoma" charset="0"/>
                         <a:cs typeface="Tahoma" charset="0"/>
@@ -29257,12 +30033,12 @@
                     <a:p>
                       <a:pPr algn="ctr" indent="0" marL="0">
                         <a:lnSpc>
-                          <a:spcPts val="1680"/>
+                          <a:spcPts val="1579"/>
                         </a:lnSpc>
                         <a:buNone/>
                       </a:pPr>
                       <a:r>
-                        <a:rPr lang="en-US" sz="1200" dirty="0">
+                        <a:rPr lang="en-US" sz="1150" dirty="0">
                           <a:solidFill>
                             <a:srgbClr val="14233A"/>
                           </a:solidFill>
@@ -29272,7 +30048,7 @@
                         </a:rPr>
                         <a:t>107.800</a:t>
                       </a:r>
-                      <a:endParaRPr lang="en-US" sz="1200" dirty="0">
+                      <a:endParaRPr lang="en-US" sz="1150" dirty="0">
                         <a:latin typeface="Tahoma" charset="0"/>
                         <a:ea typeface="Tahoma" charset="0"/>
                         <a:cs typeface="Tahoma" charset="0"/>
@@ -29328,12 +30104,12 @@
                     <a:p>
                       <a:pPr algn="ctr" indent="0" marL="0">
                         <a:lnSpc>
-                          <a:spcPts val="1680"/>
+                          <a:spcPts val="1579"/>
                         </a:lnSpc>
                         <a:buNone/>
                       </a:pPr>
                       <a:r>
-                        <a:rPr lang="en-US" sz="1200" dirty="0">
+                        <a:rPr lang="en-US" sz="1150" dirty="0">
                           <a:solidFill>
                             <a:srgbClr val="14233A"/>
                           </a:solidFill>
@@ -29343,7 +30119,7 @@
                         </a:rPr>
                         <a:t>-58.23</a:t>
                       </a:r>
-                      <a:endParaRPr lang="en-US" sz="1200" dirty="0">
+                      <a:endParaRPr lang="en-US" sz="1150" dirty="0">
                         <a:latin typeface="Tahoma" charset="0"/>
                         <a:ea typeface="Tahoma" charset="0"/>
                         <a:cs typeface="Tahoma" charset="0"/>
@@ -29399,12 +30175,12 @@
                     <a:p>
                       <a:pPr algn="ctr" indent="0" marL="0">
                         <a:lnSpc>
-                          <a:spcPts val="1680"/>
+                          <a:spcPts val="1579"/>
                         </a:lnSpc>
                         <a:buNone/>
                       </a:pPr>
                       <a:r>
-                        <a:rPr lang="en-US" sz="1200" dirty="0">
+                        <a:rPr lang="en-US" sz="1150" dirty="0">
                           <a:solidFill>
                             <a:srgbClr val="14233A"/>
                           </a:solidFill>
@@ -29414,7 +30190,7 @@
                         </a:rPr>
                         <a:t>273.83</a:t>
                       </a:r>
-                      <a:endParaRPr lang="en-US" sz="1200" dirty="0">
+                      <a:endParaRPr lang="en-US" sz="1150" dirty="0">
                         <a:latin typeface="Tahoma" charset="0"/>
                         <a:ea typeface="Tahoma" charset="0"/>
                         <a:cs typeface="Tahoma" charset="0"/>
@@ -29520,12 +30296,12 @@
           <a:p>
             <a:pPr indent="0" marL="0" rtl="1" algn="r">
               <a:lnSpc>
-                <a:spcPts val="1820"/>
+                <a:spcPts val="1765"/>
               </a:lnSpc>
               <a:buNone/>
             </a:pPr>
             <a:r>
-              <a:rPr lang="ar-EG" sz="1400" dirty="0">
+              <a:rPr lang="ar-EG" sz="1350" dirty="0">
                 <a:solidFill>
                   <a:srgbClr val="14233A"/>
                 </a:solidFill>
@@ -29535,7 +30311,7 @@
               </a:rPr>
               <a:t>كمي، Nominal</a:t>
             </a:r>
-            <a:endParaRPr lang="ar-EG" sz="1400" dirty="0"/>
+            <a:endParaRPr lang="ar-EG" sz="1350" dirty="0"/>
           </a:p>
         </p:txBody>
       </p:sp>
@@ -29639,12 +30415,12 @@
           <a:p>
             <a:pPr indent="0" marL="0" rtl="1" algn="r">
               <a:lnSpc>
-                <a:spcPts val="1820"/>
+                <a:spcPts val="1711"/>
               </a:lnSpc>
               <a:buNone/>
             </a:pPr>
             <a:r>
-              <a:rPr lang="ar-EG" sz="1400" dirty="0">
+              <a:rPr lang="ar-EG" sz="1300" dirty="0">
                 <a:solidFill>
                   <a:srgbClr val="14233A"/>
                 </a:solidFill>
@@ -29654,7 +30430,7 @@
               </a:rPr>
               <a:t>وصفي، Ordinal</a:t>
             </a:r>
-            <a:endParaRPr lang="ar-EG" sz="1400" dirty="0"/>
+            <a:endParaRPr lang="ar-EG" sz="1300" dirty="0"/>
           </a:p>
         </p:txBody>
       </p:sp>
@@ -29784,12 +30560,12 @@
           <a:p>
             <a:pPr indent="0" marL="0" rtl="1" algn="r">
               <a:lnSpc>
-                <a:spcPts val="1820"/>
+                <a:spcPts val="1711"/>
               </a:lnSpc>
               <a:buNone/>
             </a:pPr>
             <a:r>
-              <a:rPr lang="ar-EG" sz="1400" dirty="0">
+              <a:rPr lang="ar-EG" sz="1300" dirty="0">
                 <a:solidFill>
                   <a:srgbClr val="14233A"/>
                 </a:solidFill>
@@ -29799,7 +30575,7 @@
               </a:rPr>
               <a:t>وصفي، Nominal</a:t>
             </a:r>
-            <a:endParaRPr lang="ar-EG" sz="1400" dirty="0"/>
+            <a:endParaRPr lang="ar-EG" sz="1300" dirty="0"/>
           </a:p>
         </p:txBody>
       </p:sp>
@@ -32711,11 +33487,11 @@
                     <a:p>
                       <a:pPr indent="0" marL="0">
                         <a:lnSpc>
-                          <a:spcPts val="1680"/>
+                          <a:spcPts val="1579"/>
                         </a:lnSpc>
                         <a:buNone/>
                       </a:pPr>
-                      <a:endParaRPr lang="en-US" sz="1200" dirty="0">
+                      <a:endParaRPr lang="en-US" sz="1150" dirty="0">
                         <a:latin typeface="Tahoma" charset="0"/>
                         <a:ea typeface="Tahoma" charset="0"/>
                         <a:cs typeface="Tahoma" charset="0"/>
@@ -32759,12 +33535,12 @@
                     <a:p>
                       <a:pPr algn="ctr" indent="0" marL="0">
                         <a:lnSpc>
-                          <a:spcPts val="1680"/>
+                          <a:spcPts val="1579"/>
                         </a:lnSpc>
                         <a:buNone/>
                       </a:pPr>
                       <a:r>
-                        <a:rPr lang="en-US" sz="1200" b="1" dirty="0">
+                        <a:rPr lang="en-US" sz="1150" b="1" dirty="0">
                           <a:solidFill>
                             <a:srgbClr val="F6F4EF"/>
                           </a:solidFill>
@@ -32774,7 +33550,7 @@
                         </a:rPr>
                         <a:t>N</a:t>
                       </a:r>
-                      <a:endParaRPr lang="en-US" sz="1200" dirty="0">
+                      <a:endParaRPr lang="en-US" sz="1150" dirty="0">
                         <a:latin typeface="Tahoma" charset="0"/>
                         <a:ea typeface="Tahoma" charset="0"/>
                         <a:cs typeface="Tahoma" charset="0"/>
@@ -32824,12 +33600,12 @@
                     <a:p>
                       <a:pPr algn="ctr" indent="0" marL="0">
                         <a:lnSpc>
-                          <a:spcPts val="1680"/>
+                          <a:spcPts val="1579"/>
                         </a:lnSpc>
                         <a:buNone/>
                       </a:pPr>
                       <a:r>
-                        <a:rPr lang="en-US" sz="1200" b="1" dirty="0">
+                        <a:rPr lang="en-US" sz="1150" b="1" dirty="0">
                           <a:solidFill>
                             <a:srgbClr val="F6F4EF"/>
                           </a:solidFill>
@@ -32839,7 +33615,7 @@
                         </a:rPr>
                         <a:t>Mean</a:t>
                       </a:r>
-                      <a:endParaRPr lang="en-US" sz="1200" dirty="0">
+                      <a:endParaRPr lang="en-US" sz="1150" dirty="0">
                         <a:latin typeface="Tahoma" charset="0"/>
                         <a:ea typeface="Tahoma" charset="0"/>
                         <a:cs typeface="Tahoma" charset="0"/>
@@ -32889,12 +33665,12 @@
                     <a:p>
                       <a:pPr algn="ctr" indent="0" marL="0">
                         <a:lnSpc>
-                          <a:spcPts val="1680"/>
+                          <a:spcPts val="1579"/>
                         </a:lnSpc>
                         <a:buNone/>
                       </a:pPr>
                       <a:r>
-                        <a:rPr lang="en-US" sz="1200" b="1" dirty="0">
+                        <a:rPr lang="en-US" sz="1150" b="1" dirty="0">
                           <a:solidFill>
                             <a:srgbClr val="F6F4EF"/>
                           </a:solidFill>
@@ -32904,7 +33680,7 @@
                         </a:rPr>
                         <a:t>Std. Deviation</a:t>
                       </a:r>
-                      <a:endParaRPr lang="en-US" sz="1200" dirty="0">
+                      <a:endParaRPr lang="en-US" sz="1150" dirty="0">
                         <a:latin typeface="Tahoma" charset="0"/>
                         <a:ea typeface="Tahoma" charset="0"/>
                         <a:cs typeface="Tahoma" charset="0"/>
@@ -32954,12 +33730,12 @@
                     <a:p>
                       <a:pPr algn="ctr" indent="0" marL="0">
                         <a:lnSpc>
-                          <a:spcPts val="1680"/>
+                          <a:spcPts val="1579"/>
                         </a:lnSpc>
                         <a:buNone/>
                       </a:pPr>
                       <a:r>
-                        <a:rPr lang="en-US" sz="1200" b="1" dirty="0">
+                        <a:rPr lang="en-US" sz="1150" b="1" dirty="0">
                           <a:solidFill>
                             <a:srgbClr val="F6F4EF"/>
                           </a:solidFill>
@@ -32969,7 +33745,7 @@
                         </a:rPr>
                         <a:t>Std. Error Mean</a:t>
                       </a:r>
-                      <a:endParaRPr lang="en-US" sz="1200" dirty="0">
+                      <a:endParaRPr lang="en-US" sz="1150" dirty="0">
                         <a:latin typeface="Tahoma" charset="0"/>
                         <a:ea typeface="Tahoma" charset="0"/>
                         <a:cs typeface="Tahoma" charset="0"/>
@@ -33021,12 +33797,12 @@
                     <a:p>
                       <a:pPr indent="0" marL="0">
                         <a:lnSpc>
-                          <a:spcPts val="1680"/>
+                          <a:spcPts val="1579"/>
                         </a:lnSpc>
                         <a:buNone/>
                       </a:pPr>
                       <a:r>
-                        <a:rPr lang="en-US" sz="1200" dirty="0">
+                        <a:rPr lang="en-US" sz="1150" dirty="0">
                           <a:solidFill>
                             <a:srgbClr val="14233A"/>
                           </a:solidFill>
@@ -33036,7 +33812,7 @@
                         </a:rPr>
                         <a:t>wage</a:t>
                       </a:r>
-                      <a:endParaRPr lang="en-US" sz="1200" dirty="0">
+                      <a:endParaRPr lang="en-US" sz="1150" dirty="0">
                         <a:latin typeface="Tahoma" charset="0"/>
                         <a:ea typeface="Tahoma" charset="0"/>
                         <a:cs typeface="Tahoma" charset="0"/>
@@ -33086,12 +33862,12 @@
                     <a:p>
                       <a:pPr algn="ctr" indent="0" marL="0">
                         <a:lnSpc>
-                          <a:spcPts val="1680"/>
+                          <a:spcPts val="1579"/>
                         </a:lnSpc>
                         <a:buNone/>
                       </a:pPr>
                       <a:r>
-                        <a:rPr lang="en-US" sz="1200" dirty="0">
+                        <a:rPr lang="en-US" sz="1150" dirty="0">
                           <a:solidFill>
                             <a:srgbClr val="14233A"/>
                           </a:solidFill>
@@ -33101,7 +33877,7 @@
                         </a:rPr>
                         <a:t>10</a:t>
                       </a:r>
-                      <a:endParaRPr lang="en-US" sz="1200" dirty="0">
+                      <a:endParaRPr lang="en-US" sz="1150" dirty="0">
                         <a:latin typeface="Tahoma" charset="0"/>
                         <a:ea typeface="Tahoma" charset="0"/>
                         <a:cs typeface="Tahoma" charset="0"/>
@@ -33157,12 +33933,12 @@
                     <a:p>
                       <a:pPr algn="ctr" indent="0" marL="0">
                         <a:lnSpc>
-                          <a:spcPts val="1680"/>
+                          <a:spcPts val="1579"/>
                         </a:lnSpc>
                         <a:buNone/>
                       </a:pPr>
                       <a:r>
-                        <a:rPr lang="en-US" sz="1200" dirty="0">
+                        <a:rPr lang="en-US" sz="1150" dirty="0">
                           <a:solidFill>
                             <a:srgbClr val="14233A"/>
                           </a:solidFill>
@@ -33172,7 +33948,7 @@
                         </a:rPr>
                         <a:t>407.80</a:t>
                       </a:r>
-                      <a:endParaRPr lang="en-US" sz="1200" dirty="0">
+                      <a:endParaRPr lang="en-US" sz="1150" dirty="0">
                         <a:latin typeface="Tahoma" charset="0"/>
                         <a:ea typeface="Tahoma" charset="0"/>
                         <a:cs typeface="Tahoma" charset="0"/>
@@ -33228,12 +34004,12 @@
                     <a:p>
                       <a:pPr algn="ctr" indent="0" marL="0">
                         <a:lnSpc>
-                          <a:spcPts val="1680"/>
+                          <a:spcPts val="1579"/>
                         </a:lnSpc>
                         <a:buNone/>
                       </a:pPr>
                       <a:r>
-                        <a:rPr lang="en-US" sz="1200" dirty="0">
+                        <a:rPr lang="en-US" sz="1150" dirty="0">
                           <a:solidFill>
                             <a:srgbClr val="14233A"/>
                           </a:solidFill>
@@ -33243,7 +34019,7 @@
                         </a:rPr>
                         <a:t>161.560</a:t>
                       </a:r>
-                      <a:endParaRPr lang="en-US" sz="1200" dirty="0">
+                      <a:endParaRPr lang="en-US" sz="1150" dirty="0">
                         <a:latin typeface="Tahoma" charset="0"/>
                         <a:ea typeface="Tahoma" charset="0"/>
                         <a:cs typeface="Tahoma" charset="0"/>
@@ -33299,12 +34075,12 @@
                     <a:p>
                       <a:pPr algn="ctr" indent="0" marL="0">
                         <a:lnSpc>
-                          <a:spcPts val="1680"/>
+                          <a:spcPts val="1579"/>
                         </a:lnSpc>
                         <a:buNone/>
                       </a:pPr>
                       <a:r>
-                        <a:rPr lang="en-US" sz="1200" dirty="0">
+                        <a:rPr lang="en-US" sz="1150" dirty="0">
                           <a:solidFill>
                             <a:srgbClr val="14233A"/>
                           </a:solidFill>
@@ -33314,7 +34090,7 @@
                         </a:rPr>
                         <a:t>51.090</a:t>
                       </a:r>
-                      <a:endParaRPr lang="en-US" sz="1200" dirty="0">
+                      <a:endParaRPr lang="en-US" sz="1150" dirty="0">
                         <a:latin typeface="Tahoma" charset="0"/>
                         <a:ea typeface="Tahoma" charset="0"/>
                         <a:cs typeface="Tahoma" charset="0"/>
@@ -33576,11 +34352,11 @@
                     <a:p>
                       <a:pPr indent="0" marL="0">
                         <a:lnSpc>
-                          <a:spcPts val="1680"/>
+                          <a:spcPts val="1579"/>
                         </a:lnSpc>
                         <a:buNone/>
                       </a:pPr>
-                      <a:endParaRPr lang="en-US" sz="1200" dirty="0">
+                      <a:endParaRPr lang="en-US" sz="1150" dirty="0">
                         <a:latin typeface="Tahoma" charset="0"/>
                         <a:ea typeface="Tahoma" charset="0"/>
                         <a:cs typeface="Tahoma" charset="0"/>
@@ -33624,12 +34400,12 @@
                     <a:p>
                       <a:pPr algn="ctr" indent="0" marL="0">
                         <a:lnSpc>
-                          <a:spcPts val="1680"/>
+                          <a:spcPts val="1579"/>
                         </a:lnSpc>
                         <a:buNone/>
                       </a:pPr>
                       <a:r>
-                        <a:rPr lang="en-US" sz="1200" b="1" dirty="0">
+                        <a:rPr lang="en-US" sz="1150" b="1" dirty="0">
                           <a:solidFill>
                             <a:srgbClr val="F6F4EF"/>
                           </a:solidFill>
@@ -33639,7 +34415,7 @@
                         </a:rPr>
                         <a:t>t</a:t>
                       </a:r>
-                      <a:endParaRPr lang="en-US" sz="1200" dirty="0">
+                      <a:endParaRPr lang="en-US" sz="1150" dirty="0">
                         <a:latin typeface="Tahoma" charset="0"/>
                         <a:ea typeface="Tahoma" charset="0"/>
                         <a:cs typeface="Tahoma" charset="0"/>
@@ -33689,12 +34465,12 @@
                     <a:p>
                       <a:pPr algn="ctr" indent="0" marL="0">
                         <a:lnSpc>
-                          <a:spcPts val="1680"/>
+                          <a:spcPts val="1579"/>
                         </a:lnSpc>
                         <a:buNone/>
                       </a:pPr>
                       <a:r>
-                        <a:rPr lang="en-US" sz="1200" b="1" dirty="0">
+                        <a:rPr lang="en-US" sz="1150" b="1" dirty="0">
                           <a:solidFill>
                             <a:srgbClr val="F6F4EF"/>
                           </a:solidFill>
@@ -33704,7 +34480,7 @@
                         </a:rPr>
                         <a:t>df</a:t>
                       </a:r>
-                      <a:endParaRPr lang="en-US" sz="1200" dirty="0">
+                      <a:endParaRPr lang="en-US" sz="1150" dirty="0">
                         <a:latin typeface="Tahoma" charset="0"/>
                         <a:ea typeface="Tahoma" charset="0"/>
                         <a:cs typeface="Tahoma" charset="0"/>
@@ -33754,12 +34530,12 @@
                     <a:p>
                       <a:pPr algn="ctr" indent="0" marL="0">
                         <a:lnSpc>
-                          <a:spcPts val="1680"/>
+                          <a:spcPts val="1579"/>
                         </a:lnSpc>
                         <a:buNone/>
                       </a:pPr>
                       <a:r>
-                        <a:rPr lang="en-US" sz="1200" b="1" dirty="0">
+                        <a:rPr lang="en-US" sz="1150" b="1" dirty="0">
                           <a:solidFill>
                             <a:srgbClr val="F6F4EF"/>
                           </a:solidFill>
@@ -33769,7 +34545,7 @@
                         </a:rPr>
                         <a:t>Sig. (2-tailed)</a:t>
                       </a:r>
-                      <a:endParaRPr lang="en-US" sz="1200" dirty="0">
+                      <a:endParaRPr lang="en-US" sz="1150" dirty="0">
                         <a:latin typeface="Tahoma" charset="0"/>
                         <a:ea typeface="Tahoma" charset="0"/>
                         <a:cs typeface="Tahoma" charset="0"/>
@@ -33819,12 +34595,12 @@
                     <a:p>
                       <a:pPr algn="ctr" indent="0" marL="0">
                         <a:lnSpc>
-                          <a:spcPts val="1680"/>
+                          <a:spcPts val="1579"/>
                         </a:lnSpc>
                         <a:buNone/>
                       </a:pPr>
                       <a:r>
-                        <a:rPr lang="en-US" sz="1200" b="1" dirty="0">
+                        <a:rPr lang="en-US" sz="1150" b="1" dirty="0">
                           <a:solidFill>
                             <a:srgbClr val="F6F4EF"/>
                           </a:solidFill>
@@ -33834,7 +34610,7 @@
                         </a:rPr>
                         <a:t>Mean Difference</a:t>
                       </a:r>
-                      <a:endParaRPr lang="en-US" sz="1200" dirty="0">
+                      <a:endParaRPr lang="en-US" sz="1150" dirty="0">
                         <a:latin typeface="Tahoma" charset="0"/>
                         <a:ea typeface="Tahoma" charset="0"/>
                         <a:cs typeface="Tahoma" charset="0"/>
@@ -33884,12 +34660,12 @@
                     <a:p>
                       <a:pPr algn="ctr" indent="0" marL="0">
                         <a:lnSpc>
-                          <a:spcPts val="1680"/>
+                          <a:spcPts val="1579"/>
                         </a:lnSpc>
                         <a:buNone/>
                       </a:pPr>
                       <a:r>
-                        <a:rPr lang="en-US" sz="1200" b="1" dirty="0">
+                        <a:rPr lang="en-US" sz="1150" b="1" dirty="0">
                           <a:solidFill>
                             <a:srgbClr val="F6F4EF"/>
                           </a:solidFill>
@@ -33899,7 +34675,7 @@
                         </a:rPr>
                         <a:t>99% CI Lower</a:t>
                       </a:r>
-                      <a:endParaRPr lang="en-US" sz="1200" dirty="0">
+                      <a:endParaRPr lang="en-US" sz="1150" dirty="0">
                         <a:latin typeface="Tahoma" charset="0"/>
                         <a:ea typeface="Tahoma" charset="0"/>
                         <a:cs typeface="Tahoma" charset="0"/>
@@ -33949,12 +34725,12 @@
                     <a:p>
                       <a:pPr algn="ctr" indent="0" marL="0">
                         <a:lnSpc>
-                          <a:spcPts val="1680"/>
+                          <a:spcPts val="1579"/>
                         </a:lnSpc>
                         <a:buNone/>
                       </a:pPr>
                       <a:r>
-                        <a:rPr lang="en-US" sz="1200" b="1" dirty="0">
+                        <a:rPr lang="en-US" sz="1150" b="1" dirty="0">
                           <a:solidFill>
                             <a:srgbClr val="F6F4EF"/>
                           </a:solidFill>
@@ -33964,7 +34740,7 @@
                         </a:rPr>
                         <a:t>99% CI Upper</a:t>
                       </a:r>
-                      <a:endParaRPr lang="en-US" sz="1200" dirty="0">
+                      <a:endParaRPr lang="en-US" sz="1150" dirty="0">
                         <a:latin typeface="Tahoma" charset="0"/>
                         <a:ea typeface="Tahoma" charset="0"/>
                         <a:cs typeface="Tahoma" charset="0"/>
@@ -34016,12 +34792,12 @@
                     <a:p>
                       <a:pPr indent="0" marL="0">
                         <a:lnSpc>
-                          <a:spcPts val="1680"/>
+                          <a:spcPts val="1579"/>
                         </a:lnSpc>
                         <a:buNone/>
                       </a:pPr>
                       <a:r>
-                        <a:rPr lang="en-US" sz="1200" dirty="0">
+                        <a:rPr lang="en-US" sz="1150" dirty="0">
                           <a:solidFill>
                             <a:srgbClr val="14233A"/>
                           </a:solidFill>
@@ -34031,7 +34807,7 @@
                         </a:rPr>
                         <a:t>wage</a:t>
                       </a:r>
-                      <a:endParaRPr lang="en-US" sz="1200" dirty="0">
+                      <a:endParaRPr lang="en-US" sz="1150" dirty="0">
                         <a:latin typeface="Tahoma" charset="0"/>
                         <a:ea typeface="Tahoma" charset="0"/>
                         <a:cs typeface="Tahoma" charset="0"/>
@@ -34081,12 +34857,12 @@
                     <a:p>
                       <a:pPr algn="ctr" indent="0" marL="0">
                         <a:lnSpc>
-                          <a:spcPts val="1680"/>
+                          <a:spcPts val="1579"/>
                         </a:lnSpc>
                         <a:buNone/>
                       </a:pPr>
                       <a:r>
-                        <a:rPr lang="en-US" sz="1200" dirty="0">
+                        <a:rPr lang="en-US" sz="1150" dirty="0">
                           <a:solidFill>
                             <a:srgbClr val="14233A"/>
                           </a:solidFill>
@@ -34096,7 +34872,7 @@
                         </a:rPr>
                         <a:t>2.110</a:t>
                       </a:r>
-                      <a:endParaRPr lang="en-US" sz="1200" dirty="0">
+                      <a:endParaRPr lang="en-US" sz="1150" dirty="0">
                         <a:latin typeface="Tahoma" charset="0"/>
                         <a:ea typeface="Tahoma" charset="0"/>
                         <a:cs typeface="Tahoma" charset="0"/>
@@ -34152,12 +34928,12 @@
                     <a:p>
                       <a:pPr algn="ctr" indent="0" marL="0">
                         <a:lnSpc>
-                          <a:spcPts val="1680"/>
+                          <a:spcPts val="1579"/>
                         </a:lnSpc>
                         <a:buNone/>
                       </a:pPr>
                       <a:r>
-                        <a:rPr lang="en-US" sz="1200" dirty="0">
+                        <a:rPr lang="en-US" sz="1150" dirty="0">
                           <a:solidFill>
                             <a:srgbClr val="14233A"/>
                           </a:solidFill>
@@ -34167,7 +34943,7 @@
                         </a:rPr>
                         <a:t>9</a:t>
                       </a:r>
-                      <a:endParaRPr lang="en-US" sz="1200" dirty="0">
+                      <a:endParaRPr lang="en-US" sz="1150" dirty="0">
                         <a:latin typeface="Tahoma" charset="0"/>
                         <a:ea typeface="Tahoma" charset="0"/>
                         <a:cs typeface="Tahoma" charset="0"/>
@@ -34223,12 +34999,12 @@
                     <a:p>
                       <a:pPr algn="ctr" indent="0" marL="0">
                         <a:lnSpc>
-                          <a:spcPts val="1680"/>
+                          <a:spcPts val="1579"/>
                         </a:lnSpc>
                         <a:buNone/>
                       </a:pPr>
                       <a:r>
-                        <a:rPr lang="en-US" sz="1200" dirty="0">
+                        <a:rPr lang="en-US" sz="1150" dirty="0">
                           <a:solidFill>
                             <a:srgbClr val="9A5B00"/>
                           </a:solidFill>
@@ -34238,7 +35014,7 @@
                         </a:rPr>
                         <a:t>.064</a:t>
                       </a:r>
-                      <a:endParaRPr lang="en-US" sz="1200" dirty="0">
+                      <a:endParaRPr lang="en-US" sz="1150" dirty="0">
                         <a:latin typeface="Tahoma" charset="0"/>
                         <a:ea typeface="Tahoma" charset="0"/>
                         <a:cs typeface="Tahoma" charset="0"/>
@@ -34294,12 +35070,12 @@
                     <a:p>
                       <a:pPr algn="ctr" indent="0" marL="0">
                         <a:lnSpc>
-                          <a:spcPts val="1680"/>
+                          <a:spcPts val="1579"/>
                         </a:lnSpc>
                         <a:buNone/>
                       </a:pPr>
                       <a:r>
-                        <a:rPr lang="en-US" sz="1200" dirty="0">
+                        <a:rPr lang="en-US" sz="1150" dirty="0">
                           <a:solidFill>
                             <a:srgbClr val="14233A"/>
                           </a:solidFill>
@@ -34309,7 +35085,7 @@
                         </a:rPr>
                         <a:t>107.800</a:t>
                       </a:r>
-                      <a:endParaRPr lang="en-US" sz="1200" dirty="0">
+                      <a:endParaRPr lang="en-US" sz="1150" dirty="0">
                         <a:latin typeface="Tahoma" charset="0"/>
                         <a:ea typeface="Tahoma" charset="0"/>
                         <a:cs typeface="Tahoma" charset="0"/>
@@ -34365,12 +35141,12 @@
                     <a:p>
                       <a:pPr algn="ctr" indent="0" marL="0">
                         <a:lnSpc>
-                          <a:spcPts val="1680"/>
+                          <a:spcPts val="1579"/>
                         </a:lnSpc>
                         <a:buNone/>
                       </a:pPr>
                       <a:r>
-                        <a:rPr lang="en-US" sz="1200" dirty="0">
+                        <a:rPr lang="en-US" sz="1150" dirty="0">
                           <a:solidFill>
                             <a:srgbClr val="14233A"/>
                           </a:solidFill>
@@ -34380,7 +35156,7 @@
                         </a:rPr>
                         <a:t>-58.23</a:t>
                       </a:r>
-                      <a:endParaRPr lang="en-US" sz="1200" dirty="0">
+                      <a:endParaRPr lang="en-US" sz="1150" dirty="0">
                         <a:latin typeface="Tahoma" charset="0"/>
                         <a:ea typeface="Tahoma" charset="0"/>
                         <a:cs typeface="Tahoma" charset="0"/>
@@ -34436,12 +35212,12 @@
                     <a:p>
                       <a:pPr algn="ctr" indent="0" marL="0">
                         <a:lnSpc>
-                          <a:spcPts val="1680"/>
+                          <a:spcPts val="1579"/>
                         </a:lnSpc>
                         <a:buNone/>
                       </a:pPr>
                       <a:r>
-                        <a:rPr lang="en-US" sz="1200" dirty="0">
+                        <a:rPr lang="en-US" sz="1150" dirty="0">
                           <a:solidFill>
                             <a:srgbClr val="14233A"/>
                           </a:solidFill>
@@ -34451,7 +35227,7 @@
                         </a:rPr>
                         <a:t>273.83</a:t>
                       </a:r>
-                      <a:endParaRPr lang="en-US" sz="1200" dirty="0">
+                      <a:endParaRPr lang="en-US" sz="1150" dirty="0">
                         <a:latin typeface="Tahoma" charset="0"/>
                         <a:ea typeface="Tahoma" charset="0"/>
                         <a:cs typeface="Tahoma" charset="0"/>
@@ -35533,12 +36309,12 @@
           <a:p>
             <a:pPr indent="0" marL="0" rtl="1" algn="r">
               <a:lnSpc>
-                <a:spcPts val="1820"/>
+                <a:spcPts val="1656"/>
               </a:lnSpc>
               <a:buNone/>
             </a:pPr>
             <a:r>
-              <a:rPr lang="ar-EG" sz="1400" dirty="0">
+              <a:rPr lang="ar-EG" sz="1250" dirty="0">
                 <a:solidFill>
                   <a:srgbClr val="14233A"/>
                 </a:solidFill>
@@ -35548,7 +36324,7 @@
               </a:rPr>
               <a:t>رفض الفرض العدمي وقبول البديل</a:t>
             </a:r>
-            <a:endParaRPr lang="ar-EG" sz="1400" dirty="0"/>
+            <a:endParaRPr lang="ar-EG" sz="1250" dirty="0"/>
           </a:p>
         </p:txBody>
       </p:sp>
@@ -35678,12 +36454,12 @@
           <a:p>
             <a:pPr indent="0" marL="0" rtl="1" algn="r">
               <a:lnSpc>
-                <a:spcPts val="1820"/>
+                <a:spcPts val="1656"/>
               </a:lnSpc>
               <a:buNone/>
             </a:pPr>
             <a:r>
-              <a:rPr lang="ar-EG" sz="1400" dirty="0">
+              <a:rPr lang="ar-EG" sz="1250" dirty="0">
                 <a:solidFill>
                   <a:srgbClr val="14233A"/>
                 </a:solidFill>
@@ -35693,7 +36469,7 @@
               </a:rPr>
               <a:t>قبول الفرض العدمي ورفض البديل</a:t>
             </a:r>
-            <a:endParaRPr lang="ar-EG" sz="1400" dirty="0"/>
+            <a:endParaRPr lang="ar-EG" sz="1250" dirty="0"/>
           </a:p>
         </p:txBody>
       </p:sp>
@@ -36518,12 +37294,12 @@
                     <a:p>
                       <a:pPr indent="0" marL="0">
                         <a:lnSpc>
-                          <a:spcPts val="1543"/>
+                          <a:spcPts val="1450"/>
                         </a:lnSpc>
                         <a:buNone/>
                       </a:pPr>
                       <a:r>
-                        <a:rPr lang="en-US" sz="1103" b="1" dirty="0">
+                        <a:rPr lang="en-US" sz="1050" b="1" dirty="0">
                           <a:solidFill>
                             <a:srgbClr val="F6F4EF"/>
                           </a:solidFill>
@@ -36533,7 +37309,7 @@
                         </a:rPr>
                         <a:t>Pair 1</a:t>
                       </a:r>
-                      <a:endParaRPr lang="en-US" sz="1103" dirty="0">
+                      <a:endParaRPr lang="en-US" sz="1050" dirty="0">
                         <a:latin typeface="Tahoma" charset="0"/>
                         <a:ea typeface="Tahoma" charset="0"/>
                         <a:cs typeface="Tahoma" charset="0"/>
@@ -36577,12 +37353,12 @@
                     <a:p>
                       <a:pPr algn="ctr" indent="0" marL="0">
                         <a:lnSpc>
-                          <a:spcPts val="1543"/>
+                          <a:spcPts val="1450"/>
                         </a:lnSpc>
                         <a:buNone/>
                       </a:pPr>
                       <a:r>
-                        <a:rPr lang="en-US" sz="1103" b="1" dirty="0">
+                        <a:rPr lang="en-US" sz="1050" b="1" dirty="0">
                           <a:solidFill>
                             <a:srgbClr val="F6F4EF"/>
                           </a:solidFill>
@@ -36592,7 +37368,7 @@
                         </a:rPr>
                         <a:t>Mean</a:t>
                       </a:r>
-                      <a:endParaRPr lang="en-US" sz="1103" dirty="0">
+                      <a:endParaRPr lang="en-US" sz="1050" dirty="0">
                         <a:latin typeface="Tahoma" charset="0"/>
                         <a:ea typeface="Tahoma" charset="0"/>
                         <a:cs typeface="Tahoma" charset="0"/>
@@ -36642,12 +37418,12 @@
                     <a:p>
                       <a:pPr algn="ctr" indent="0" marL="0">
                         <a:lnSpc>
-                          <a:spcPts val="1543"/>
+                          <a:spcPts val="1450"/>
                         </a:lnSpc>
                         <a:buNone/>
                       </a:pPr>
                       <a:r>
-                        <a:rPr lang="en-US" sz="1103" b="1" dirty="0">
+                        <a:rPr lang="en-US" sz="1050" b="1" dirty="0">
                           <a:solidFill>
                             <a:srgbClr val="F6F4EF"/>
                           </a:solidFill>
@@ -36657,7 +37433,7 @@
                         </a:rPr>
                         <a:t>N</a:t>
                       </a:r>
-                      <a:endParaRPr lang="en-US" sz="1103" dirty="0">
+                      <a:endParaRPr lang="en-US" sz="1050" dirty="0">
                         <a:latin typeface="Tahoma" charset="0"/>
                         <a:ea typeface="Tahoma" charset="0"/>
                         <a:cs typeface="Tahoma" charset="0"/>
@@ -36707,12 +37483,12 @@
                     <a:p>
                       <a:pPr algn="ctr" indent="0" marL="0">
                         <a:lnSpc>
-                          <a:spcPts val="1543"/>
+                          <a:spcPts val="1450"/>
                         </a:lnSpc>
                         <a:buNone/>
                       </a:pPr>
                       <a:r>
-                        <a:rPr lang="en-US" sz="1103" b="1" dirty="0">
+                        <a:rPr lang="en-US" sz="1050" b="1" dirty="0">
                           <a:solidFill>
                             <a:srgbClr val="F6F4EF"/>
                           </a:solidFill>
@@ -36722,7 +37498,7 @@
                         </a:rPr>
                         <a:t>Std. Deviation</a:t>
                       </a:r>
-                      <a:endParaRPr lang="en-US" sz="1103" dirty="0">
+                      <a:endParaRPr lang="en-US" sz="1050" dirty="0">
                         <a:latin typeface="Tahoma" charset="0"/>
                         <a:ea typeface="Tahoma" charset="0"/>
                         <a:cs typeface="Tahoma" charset="0"/>
@@ -36772,12 +37548,12 @@
                     <a:p>
                       <a:pPr algn="ctr" indent="0" marL="0">
                         <a:lnSpc>
-                          <a:spcPts val="1543"/>
+                          <a:spcPts val="1450"/>
                         </a:lnSpc>
                         <a:buNone/>
                       </a:pPr>
                       <a:r>
-                        <a:rPr lang="en-US" sz="1103" b="1" dirty="0">
+                        <a:rPr lang="en-US" sz="1050" b="1" dirty="0">
                           <a:solidFill>
                             <a:srgbClr val="F6F4EF"/>
                           </a:solidFill>
@@ -36787,7 +37563,7 @@
                         </a:rPr>
                         <a:t>Std. Error Mean</a:t>
                       </a:r>
-                      <a:endParaRPr lang="en-US" sz="1103" dirty="0">
+                      <a:endParaRPr lang="en-US" sz="1050" dirty="0">
                         <a:latin typeface="Tahoma" charset="0"/>
                         <a:ea typeface="Tahoma" charset="0"/>
                         <a:cs typeface="Tahoma" charset="0"/>
@@ -36839,12 +37615,12 @@
                     <a:p>
                       <a:pPr indent="0" marL="0">
                         <a:lnSpc>
-                          <a:spcPts val="1543"/>
+                          <a:spcPts val="1450"/>
                         </a:lnSpc>
                         <a:buNone/>
                       </a:pPr>
                       <a:r>
-                        <a:rPr lang="en-US" sz="1103" dirty="0">
+                        <a:rPr lang="en-US" sz="1050" dirty="0">
                           <a:solidFill>
                             <a:srgbClr val="14233A"/>
                           </a:solidFill>
@@ -36854,7 +37630,7 @@
                         </a:rPr>
                         <a:t>before</a:t>
                       </a:r>
-                      <a:endParaRPr lang="en-US" sz="1103" dirty="0">
+                      <a:endParaRPr lang="en-US" sz="1050" dirty="0">
                         <a:latin typeface="Tahoma" charset="0"/>
                         <a:ea typeface="Tahoma" charset="0"/>
                         <a:cs typeface="Tahoma" charset="0"/>
@@ -36904,12 +37680,12 @@
                     <a:p>
                       <a:pPr algn="ctr" indent="0" marL="0">
                         <a:lnSpc>
-                          <a:spcPts val="1543"/>
+                          <a:spcPts val="1450"/>
                         </a:lnSpc>
                         <a:buNone/>
                       </a:pPr>
                       <a:r>
-                        <a:rPr lang="en-US" sz="1103" dirty="0">
+                        <a:rPr lang="en-US" sz="1050" dirty="0">
                           <a:solidFill>
                             <a:srgbClr val="14233A"/>
                           </a:solidFill>
@@ -36919,7 +37695,7 @@
                         </a:rPr>
                         <a:t>15.67</a:t>
                       </a:r>
-                      <a:endParaRPr lang="en-US" sz="1103" dirty="0">
+                      <a:endParaRPr lang="en-US" sz="1050" dirty="0">
                         <a:latin typeface="Tahoma" charset="0"/>
                         <a:ea typeface="Tahoma" charset="0"/>
                         <a:cs typeface="Tahoma" charset="0"/>
@@ -36975,12 +37751,12 @@
                     <a:p>
                       <a:pPr algn="ctr" indent="0" marL="0">
                         <a:lnSpc>
-                          <a:spcPts val="1543"/>
+                          <a:spcPts val="1450"/>
                         </a:lnSpc>
                         <a:buNone/>
                       </a:pPr>
                       <a:r>
-                        <a:rPr lang="en-US" sz="1103" dirty="0">
+                        <a:rPr lang="en-US" sz="1050" dirty="0">
                           <a:solidFill>
                             <a:srgbClr val="14233A"/>
                           </a:solidFill>
@@ -36990,7 +37766,7 @@
                         </a:rPr>
                         <a:t>6</a:t>
                       </a:r>
-                      <a:endParaRPr lang="en-US" sz="1103" dirty="0">
+                      <a:endParaRPr lang="en-US" sz="1050" dirty="0">
                         <a:latin typeface="Tahoma" charset="0"/>
                         <a:ea typeface="Tahoma" charset="0"/>
                         <a:cs typeface="Tahoma" charset="0"/>
@@ -37046,12 +37822,12 @@
                     <a:p>
                       <a:pPr algn="ctr" indent="0" marL="0">
                         <a:lnSpc>
-                          <a:spcPts val="1543"/>
+                          <a:spcPts val="1450"/>
                         </a:lnSpc>
                         <a:buNone/>
                       </a:pPr>
                       <a:r>
-                        <a:rPr lang="en-US" sz="1103" dirty="0">
+                        <a:rPr lang="en-US" sz="1050" dirty="0">
                           <a:solidFill>
                             <a:srgbClr val="14233A"/>
                           </a:solidFill>
@@ -37061,7 +37837,7 @@
                         </a:rPr>
                         <a:t>5.538</a:t>
                       </a:r>
-                      <a:endParaRPr lang="en-US" sz="1103" dirty="0">
+                      <a:endParaRPr lang="en-US" sz="1050" dirty="0">
                         <a:latin typeface="Tahoma" charset="0"/>
                         <a:ea typeface="Tahoma" charset="0"/>
                         <a:cs typeface="Tahoma" charset="0"/>
@@ -37117,12 +37893,12 @@
                     <a:p>
                       <a:pPr algn="ctr" indent="0" marL="0">
                         <a:lnSpc>
-                          <a:spcPts val="1543"/>
+                          <a:spcPts val="1450"/>
                         </a:lnSpc>
                         <a:buNone/>
                       </a:pPr>
                       <a:r>
-                        <a:rPr lang="en-US" sz="1103" dirty="0">
+                        <a:rPr lang="en-US" sz="1050" dirty="0">
                           <a:solidFill>
                             <a:srgbClr val="14233A"/>
                           </a:solidFill>
@@ -37132,7 +37908,7 @@
                         </a:rPr>
                         <a:t>2.261</a:t>
                       </a:r>
-                      <a:endParaRPr lang="en-US" sz="1103" dirty="0">
+                      <a:endParaRPr lang="en-US" sz="1050" dirty="0">
                         <a:latin typeface="Tahoma" charset="0"/>
                         <a:ea typeface="Tahoma" charset="0"/>
                         <a:cs typeface="Tahoma" charset="0"/>
@@ -37190,12 +37966,12 @@
                     <a:p>
                       <a:pPr indent="0" marL="0">
                         <a:lnSpc>
-                          <a:spcPts val="1543"/>
+                          <a:spcPts val="1450"/>
                         </a:lnSpc>
                         <a:buNone/>
                       </a:pPr>
                       <a:r>
-                        <a:rPr lang="en-US" sz="1103" dirty="0">
+                        <a:rPr lang="en-US" sz="1050" dirty="0">
                           <a:solidFill>
                             <a:srgbClr val="14233A"/>
                           </a:solidFill>
@@ -37205,7 +37981,7 @@
                         </a:rPr>
                         <a:t>after</a:t>
                       </a:r>
-                      <a:endParaRPr lang="en-US" sz="1103" dirty="0">
+                      <a:endParaRPr lang="en-US" sz="1050" dirty="0">
                         <a:latin typeface="Tahoma" charset="0"/>
                         <a:ea typeface="Tahoma" charset="0"/>
                         <a:cs typeface="Tahoma" charset="0"/>
@@ -37255,12 +38031,12 @@
                     <a:p>
                       <a:pPr algn="ctr" indent="0" marL="0">
                         <a:lnSpc>
-                          <a:spcPts val="1543"/>
+                          <a:spcPts val="1450"/>
                         </a:lnSpc>
                         <a:buNone/>
                       </a:pPr>
                       <a:r>
-                        <a:rPr lang="en-US" sz="1103" dirty="0">
+                        <a:rPr lang="en-US" sz="1050" dirty="0">
                           <a:solidFill>
                             <a:srgbClr val="14233A"/>
                           </a:solidFill>
@@ -37270,7 +38046,7 @@
                         </a:rPr>
                         <a:t>19.83</a:t>
                       </a:r>
-                      <a:endParaRPr lang="en-US" sz="1103" dirty="0">
+                      <a:endParaRPr lang="en-US" sz="1050" dirty="0">
                         <a:latin typeface="Tahoma" charset="0"/>
                         <a:ea typeface="Tahoma" charset="0"/>
                         <a:cs typeface="Tahoma" charset="0"/>
@@ -37326,12 +38102,12 @@
                     <a:p>
                       <a:pPr algn="ctr" indent="0" marL="0">
                         <a:lnSpc>
-                          <a:spcPts val="1543"/>
+                          <a:spcPts val="1450"/>
                         </a:lnSpc>
                         <a:buNone/>
                       </a:pPr>
                       <a:r>
-                        <a:rPr lang="en-US" sz="1103" dirty="0">
+                        <a:rPr lang="en-US" sz="1050" dirty="0">
                           <a:solidFill>
                             <a:srgbClr val="14233A"/>
                           </a:solidFill>
@@ -37341,7 +38117,7 @@
                         </a:rPr>
                         <a:t>6</a:t>
                       </a:r>
-                      <a:endParaRPr lang="en-US" sz="1103" dirty="0">
+                      <a:endParaRPr lang="en-US" sz="1050" dirty="0">
                         <a:latin typeface="Tahoma" charset="0"/>
                         <a:ea typeface="Tahoma" charset="0"/>
                         <a:cs typeface="Tahoma" charset="0"/>
@@ -37397,12 +38173,12 @@
                     <a:p>
                       <a:pPr algn="ctr" indent="0" marL="0">
                         <a:lnSpc>
-                          <a:spcPts val="1543"/>
+                          <a:spcPts val="1450"/>
                         </a:lnSpc>
                         <a:buNone/>
                       </a:pPr>
                       <a:r>
-                        <a:rPr lang="en-US" sz="1103" dirty="0">
+                        <a:rPr lang="en-US" sz="1050" dirty="0">
                           <a:solidFill>
                             <a:srgbClr val="14233A"/>
                           </a:solidFill>
@@ -37412,7 +38188,7 @@
                         </a:rPr>
                         <a:t>3.817</a:t>
                       </a:r>
-                      <a:endParaRPr lang="en-US" sz="1103" dirty="0">
+                      <a:endParaRPr lang="en-US" sz="1050" dirty="0">
                         <a:latin typeface="Tahoma" charset="0"/>
                         <a:ea typeface="Tahoma" charset="0"/>
                         <a:cs typeface="Tahoma" charset="0"/>
@@ -37468,12 +38244,12 @@
                     <a:p>
                       <a:pPr algn="ctr" indent="0" marL="0">
                         <a:lnSpc>
-                          <a:spcPts val="1543"/>
+                          <a:spcPts val="1450"/>
                         </a:lnSpc>
                         <a:buNone/>
                       </a:pPr>
                       <a:r>
-                        <a:rPr lang="en-US" sz="1103" dirty="0">
+                        <a:rPr lang="en-US" sz="1050" dirty="0">
                           <a:solidFill>
                             <a:srgbClr val="14233A"/>
                           </a:solidFill>
@@ -37483,7 +38259,7 @@
                         </a:rPr>
                         <a:t>1.558</a:t>
                       </a:r>
-                      <a:endParaRPr lang="en-US" sz="1103" dirty="0">
+                      <a:endParaRPr lang="en-US" sz="1050" dirty="0">
                         <a:latin typeface="Tahoma" charset="0"/>
                         <a:ea typeface="Tahoma" charset="0"/>
                         <a:cs typeface="Tahoma" charset="0"/>
@@ -37747,12 +38523,12 @@
                     <a:p>
                       <a:pPr indent="0" marL="0">
                         <a:lnSpc>
-                          <a:spcPts val="1554"/>
+                          <a:spcPts val="1461"/>
                         </a:lnSpc>
                         <a:buNone/>
                       </a:pPr>
                       <a:r>
-                        <a:rPr lang="en-US" sz="1110" b="1" dirty="0">
+                        <a:rPr lang="en-US" sz="1050" b="1" dirty="0">
                           <a:solidFill>
                             <a:srgbClr val="F6F4EF"/>
                           </a:solidFill>
@@ -37762,7 +38538,7 @@
                         </a:rPr>
                         <a:t>Pair 1</a:t>
                       </a:r>
-                      <a:endParaRPr lang="en-US" sz="1110" dirty="0">
+                      <a:endParaRPr lang="en-US" sz="1050" dirty="0">
                         <a:latin typeface="Tahoma" charset="0"/>
                         <a:ea typeface="Tahoma" charset="0"/>
                         <a:cs typeface="Tahoma" charset="0"/>
@@ -37806,12 +38582,12 @@
                     <a:p>
                       <a:pPr algn="ctr" indent="0" marL="0">
                         <a:lnSpc>
-                          <a:spcPts val="1554"/>
+                          <a:spcPts val="1461"/>
                         </a:lnSpc>
                         <a:buNone/>
                       </a:pPr>
                       <a:r>
-                        <a:rPr lang="en-US" sz="1110" b="1" dirty="0">
+                        <a:rPr lang="en-US" sz="1050" b="1" dirty="0">
                           <a:solidFill>
                             <a:srgbClr val="F6F4EF"/>
                           </a:solidFill>
@@ -37821,7 +38597,7 @@
                         </a:rPr>
                         <a:t>Mean</a:t>
                       </a:r>
-                      <a:endParaRPr lang="en-US" sz="1110" dirty="0">
+                      <a:endParaRPr lang="en-US" sz="1050" dirty="0">
                         <a:latin typeface="Tahoma" charset="0"/>
                         <a:ea typeface="Tahoma" charset="0"/>
                         <a:cs typeface="Tahoma" charset="0"/>
@@ -37871,12 +38647,12 @@
                     <a:p>
                       <a:pPr algn="ctr" indent="0" marL="0">
                         <a:lnSpc>
-                          <a:spcPts val="1554"/>
+                          <a:spcPts val="1461"/>
                         </a:lnSpc>
                         <a:buNone/>
                       </a:pPr>
                       <a:r>
-                        <a:rPr lang="en-US" sz="1110" b="1" dirty="0">
+                        <a:rPr lang="en-US" sz="1050" b="1" dirty="0">
                           <a:solidFill>
                             <a:srgbClr val="F6F4EF"/>
                           </a:solidFill>
@@ -37886,7 +38662,7 @@
                         </a:rPr>
                         <a:t>Std. Deviation</a:t>
                       </a:r>
-                      <a:endParaRPr lang="en-US" sz="1110" dirty="0">
+                      <a:endParaRPr lang="en-US" sz="1050" dirty="0">
                         <a:latin typeface="Tahoma" charset="0"/>
                         <a:ea typeface="Tahoma" charset="0"/>
                         <a:cs typeface="Tahoma" charset="0"/>
@@ -37936,12 +38712,12 @@
                     <a:p>
                       <a:pPr algn="ctr" indent="0" marL="0">
                         <a:lnSpc>
-                          <a:spcPts val="1554"/>
+                          <a:spcPts val="1461"/>
                         </a:lnSpc>
                         <a:buNone/>
                       </a:pPr>
                       <a:r>
-                        <a:rPr lang="en-US" sz="1110" b="1" dirty="0">
+                        <a:rPr lang="en-US" sz="1050" b="1" dirty="0">
                           <a:solidFill>
                             <a:srgbClr val="F6F4EF"/>
                           </a:solidFill>
@@ -37951,7 +38727,7 @@
                         </a:rPr>
                         <a:t>Std. Error Mean</a:t>
                       </a:r>
-                      <a:endParaRPr lang="en-US" sz="1110" dirty="0">
+                      <a:endParaRPr lang="en-US" sz="1050" dirty="0">
                         <a:latin typeface="Tahoma" charset="0"/>
                         <a:ea typeface="Tahoma" charset="0"/>
                         <a:cs typeface="Tahoma" charset="0"/>
@@ -38001,12 +38777,12 @@
                     <a:p>
                       <a:pPr algn="ctr" indent="0" marL="0">
                         <a:lnSpc>
-                          <a:spcPts val="1554"/>
+                          <a:spcPts val="1461"/>
                         </a:lnSpc>
                         <a:buNone/>
                       </a:pPr>
                       <a:r>
-                        <a:rPr lang="en-US" sz="1110" b="1" dirty="0">
+                        <a:rPr lang="en-US" sz="1050" b="1" dirty="0">
                           <a:solidFill>
                             <a:srgbClr val="F6F4EF"/>
                           </a:solidFill>
@@ -38016,7 +38792,7 @@
                         </a:rPr>
                         <a:t>95% CI Lower</a:t>
                       </a:r>
-                      <a:endParaRPr lang="en-US" sz="1110" dirty="0">
+                      <a:endParaRPr lang="en-US" sz="1050" dirty="0">
                         <a:latin typeface="Tahoma" charset="0"/>
                         <a:ea typeface="Tahoma" charset="0"/>
                         <a:cs typeface="Tahoma" charset="0"/>
@@ -38066,12 +38842,12 @@
                     <a:p>
                       <a:pPr algn="ctr" indent="0" marL="0">
                         <a:lnSpc>
-                          <a:spcPts val="1554"/>
+                          <a:spcPts val="1461"/>
                         </a:lnSpc>
                         <a:buNone/>
                       </a:pPr>
                       <a:r>
-                        <a:rPr lang="en-US" sz="1110" b="1" dirty="0">
+                        <a:rPr lang="en-US" sz="1050" b="1" dirty="0">
                           <a:solidFill>
                             <a:srgbClr val="F6F4EF"/>
                           </a:solidFill>
@@ -38081,7 +38857,7 @@
                         </a:rPr>
                         <a:t>95% CI Upper</a:t>
                       </a:r>
-                      <a:endParaRPr lang="en-US" sz="1110" dirty="0">
+                      <a:endParaRPr lang="en-US" sz="1050" dirty="0">
                         <a:latin typeface="Tahoma" charset="0"/>
                         <a:ea typeface="Tahoma" charset="0"/>
                         <a:cs typeface="Tahoma" charset="0"/>
@@ -38131,12 +38907,12 @@
                     <a:p>
                       <a:pPr algn="ctr" indent="0" marL="0">
                         <a:lnSpc>
-                          <a:spcPts val="1554"/>
+                          <a:spcPts val="1461"/>
                         </a:lnSpc>
                         <a:buNone/>
                       </a:pPr>
                       <a:r>
-                        <a:rPr lang="en-US" sz="1110" b="1" dirty="0">
+                        <a:rPr lang="en-US" sz="1050" b="1" dirty="0">
                           <a:solidFill>
                             <a:srgbClr val="F6F4EF"/>
                           </a:solidFill>
@@ -38146,7 +38922,7 @@
                         </a:rPr>
                         <a:t>t</a:t>
                       </a:r>
-                      <a:endParaRPr lang="en-US" sz="1110" dirty="0">
+                      <a:endParaRPr lang="en-US" sz="1050" dirty="0">
                         <a:latin typeface="Tahoma" charset="0"/>
                         <a:ea typeface="Tahoma" charset="0"/>
                         <a:cs typeface="Tahoma" charset="0"/>
@@ -38196,12 +38972,12 @@
                     <a:p>
                       <a:pPr algn="ctr" indent="0" marL="0">
                         <a:lnSpc>
-                          <a:spcPts val="1554"/>
+                          <a:spcPts val="1461"/>
                         </a:lnSpc>
                         <a:buNone/>
                       </a:pPr>
                       <a:r>
-                        <a:rPr lang="en-US" sz="1110" b="1" dirty="0">
+                        <a:rPr lang="en-US" sz="1050" b="1" dirty="0">
                           <a:solidFill>
                             <a:srgbClr val="F6F4EF"/>
                           </a:solidFill>
@@ -38211,7 +38987,7 @@
                         </a:rPr>
                         <a:t>df</a:t>
                       </a:r>
-                      <a:endParaRPr lang="en-US" sz="1110" dirty="0">
+                      <a:endParaRPr lang="en-US" sz="1050" dirty="0">
                         <a:latin typeface="Tahoma" charset="0"/>
                         <a:ea typeface="Tahoma" charset="0"/>
                         <a:cs typeface="Tahoma" charset="0"/>
@@ -38261,12 +39037,12 @@
                     <a:p>
                       <a:pPr algn="ctr" indent="0" marL="0">
                         <a:lnSpc>
-                          <a:spcPts val="1554"/>
+                          <a:spcPts val="1461"/>
                         </a:lnSpc>
                         <a:buNone/>
                       </a:pPr>
                       <a:r>
-                        <a:rPr lang="en-US" sz="1110" b="1" dirty="0">
+                        <a:rPr lang="en-US" sz="1050" b="1" dirty="0">
                           <a:solidFill>
                             <a:srgbClr val="F6F4EF"/>
                           </a:solidFill>
@@ -38276,7 +39052,7 @@
                         </a:rPr>
                         <a:t>Sig. (2-tailed)</a:t>
                       </a:r>
-                      <a:endParaRPr lang="en-US" sz="1110" dirty="0">
+                      <a:endParaRPr lang="en-US" sz="1050" dirty="0">
                         <a:latin typeface="Tahoma" charset="0"/>
                         <a:ea typeface="Tahoma" charset="0"/>
                         <a:cs typeface="Tahoma" charset="0"/>
@@ -38328,12 +39104,12 @@
                     <a:p>
                       <a:pPr indent="0" marL="0">
                         <a:lnSpc>
-                          <a:spcPts val="1554"/>
+                          <a:spcPts val="1461"/>
                         </a:lnSpc>
                         <a:buNone/>
                       </a:pPr>
                       <a:r>
-                        <a:rPr lang="en-US" sz="1110" dirty="0">
+                        <a:rPr lang="en-US" sz="1050" dirty="0">
                           <a:solidFill>
                             <a:srgbClr val="14233A"/>
                           </a:solidFill>
@@ -38343,7 +39119,7 @@
                         </a:rPr>
                         <a:t>before - after</a:t>
                       </a:r>
-                      <a:endParaRPr lang="en-US" sz="1110" dirty="0">
+                      <a:endParaRPr lang="en-US" sz="1050" dirty="0">
                         <a:latin typeface="Tahoma" charset="0"/>
                         <a:ea typeface="Tahoma" charset="0"/>
                         <a:cs typeface="Tahoma" charset="0"/>
@@ -38393,12 +39169,12 @@
                     <a:p>
                       <a:pPr algn="ctr" indent="0" marL="0">
                         <a:lnSpc>
-                          <a:spcPts val="1554"/>
+                          <a:spcPts val="1461"/>
                         </a:lnSpc>
                         <a:buNone/>
                       </a:pPr>
                       <a:r>
-                        <a:rPr lang="en-US" sz="1110" dirty="0">
+                        <a:rPr lang="en-US" sz="1050" dirty="0">
                           <a:solidFill>
                             <a:srgbClr val="14233A"/>
                           </a:solidFill>
@@ -38408,7 +39184,7 @@
                         </a:rPr>
                         <a:t>-4.167</a:t>
                       </a:r>
-                      <a:endParaRPr lang="en-US" sz="1110" dirty="0">
+                      <a:endParaRPr lang="en-US" sz="1050" dirty="0">
                         <a:latin typeface="Tahoma" charset="0"/>
                         <a:ea typeface="Tahoma" charset="0"/>
                         <a:cs typeface="Tahoma" charset="0"/>
@@ -38464,12 +39240,12 @@
                     <a:p>
                       <a:pPr algn="ctr" indent="0" marL="0">
                         <a:lnSpc>
-                          <a:spcPts val="1554"/>
+                          <a:spcPts val="1461"/>
                         </a:lnSpc>
                         <a:buNone/>
                       </a:pPr>
                       <a:r>
-                        <a:rPr lang="en-US" sz="1110" dirty="0">
+                        <a:rPr lang="en-US" sz="1050" dirty="0">
                           <a:solidFill>
                             <a:srgbClr val="14233A"/>
                           </a:solidFill>
@@ -38479,7 +39255,7 @@
                         </a:rPr>
                         <a:t>2.639</a:t>
                       </a:r>
-                      <a:endParaRPr lang="en-US" sz="1110" dirty="0">
+                      <a:endParaRPr lang="en-US" sz="1050" dirty="0">
                         <a:latin typeface="Tahoma" charset="0"/>
                         <a:ea typeface="Tahoma" charset="0"/>
                         <a:cs typeface="Tahoma" charset="0"/>
@@ -38535,12 +39311,12 @@
                     <a:p>
                       <a:pPr algn="ctr" indent="0" marL="0">
                         <a:lnSpc>
-                          <a:spcPts val="1554"/>
+                          <a:spcPts val="1461"/>
                         </a:lnSpc>
                         <a:buNone/>
                       </a:pPr>
                       <a:r>
-                        <a:rPr lang="en-US" sz="1110" dirty="0">
+                        <a:rPr lang="en-US" sz="1050" dirty="0">
                           <a:solidFill>
                             <a:srgbClr val="14233A"/>
                           </a:solidFill>
@@ -38550,7 +39326,7 @@
                         </a:rPr>
                         <a:t>1.078</a:t>
                       </a:r>
-                      <a:endParaRPr lang="en-US" sz="1110" dirty="0">
+                      <a:endParaRPr lang="en-US" sz="1050" dirty="0">
                         <a:latin typeface="Tahoma" charset="0"/>
                         <a:ea typeface="Tahoma" charset="0"/>
                         <a:cs typeface="Tahoma" charset="0"/>
@@ -38606,12 +39382,12 @@
                     <a:p>
                       <a:pPr algn="ctr" indent="0" marL="0">
                         <a:lnSpc>
-                          <a:spcPts val="1554"/>
+                          <a:spcPts val="1461"/>
                         </a:lnSpc>
                         <a:buNone/>
                       </a:pPr>
                       <a:r>
-                        <a:rPr lang="en-US" sz="1110" dirty="0">
+                        <a:rPr lang="en-US" sz="1050" dirty="0">
                           <a:solidFill>
                             <a:srgbClr val="14233A"/>
                           </a:solidFill>
@@ -38621,7 +39397,7 @@
                         </a:rPr>
                         <a:t>-6.937</a:t>
                       </a:r>
-                      <a:endParaRPr lang="en-US" sz="1110" dirty="0">
+                      <a:endParaRPr lang="en-US" sz="1050" dirty="0">
                         <a:latin typeface="Tahoma" charset="0"/>
                         <a:ea typeface="Tahoma" charset="0"/>
                         <a:cs typeface="Tahoma" charset="0"/>
@@ -38677,12 +39453,12 @@
                     <a:p>
                       <a:pPr algn="ctr" indent="0" marL="0">
                         <a:lnSpc>
-                          <a:spcPts val="1554"/>
+                          <a:spcPts val="1461"/>
                         </a:lnSpc>
                         <a:buNone/>
                       </a:pPr>
                       <a:r>
-                        <a:rPr lang="en-US" sz="1110" dirty="0">
+                        <a:rPr lang="en-US" sz="1050" dirty="0">
                           <a:solidFill>
                             <a:srgbClr val="14233A"/>
                           </a:solidFill>
@@ -38692,7 +39468,7 @@
                         </a:rPr>
                         <a:t>-1.397</a:t>
                       </a:r>
-                      <a:endParaRPr lang="en-US" sz="1110" dirty="0">
+                      <a:endParaRPr lang="en-US" sz="1050" dirty="0">
                         <a:latin typeface="Tahoma" charset="0"/>
                         <a:ea typeface="Tahoma" charset="0"/>
                         <a:cs typeface="Tahoma" charset="0"/>
@@ -38748,12 +39524,12 @@
                     <a:p>
                       <a:pPr algn="ctr" indent="0" marL="0">
                         <a:lnSpc>
-                          <a:spcPts val="1554"/>
+                          <a:spcPts val="1461"/>
                         </a:lnSpc>
                         <a:buNone/>
                       </a:pPr>
                       <a:r>
-                        <a:rPr lang="en-US" sz="1110" dirty="0">
+                        <a:rPr lang="en-US" sz="1050" dirty="0">
                           <a:solidFill>
                             <a:srgbClr val="14233A"/>
                           </a:solidFill>
@@ -38763,7 +39539,7 @@
                         </a:rPr>
                         <a:t>-3.867</a:t>
                       </a:r>
-                      <a:endParaRPr lang="en-US" sz="1110" dirty="0">
+                      <a:endParaRPr lang="en-US" sz="1050" dirty="0">
                         <a:latin typeface="Tahoma" charset="0"/>
                         <a:ea typeface="Tahoma" charset="0"/>
                         <a:cs typeface="Tahoma" charset="0"/>
@@ -38819,12 +39595,12 @@
                     <a:p>
                       <a:pPr algn="ctr" indent="0" marL="0">
                         <a:lnSpc>
-                          <a:spcPts val="1554"/>
+                          <a:spcPts val="1461"/>
                         </a:lnSpc>
                         <a:buNone/>
                       </a:pPr>
                       <a:r>
-                        <a:rPr lang="en-US" sz="1110" dirty="0">
+                        <a:rPr lang="en-US" sz="1050" dirty="0">
                           <a:solidFill>
                             <a:srgbClr val="14233A"/>
                           </a:solidFill>
@@ -38834,7 +39610,7 @@
                         </a:rPr>
                         <a:t>5</a:t>
                       </a:r>
-                      <a:endParaRPr lang="en-US" sz="1110" dirty="0">
+                      <a:endParaRPr lang="en-US" sz="1050" dirty="0">
                         <a:latin typeface="Tahoma" charset="0"/>
                         <a:ea typeface="Tahoma" charset="0"/>
                         <a:cs typeface="Tahoma" charset="0"/>
@@ -38890,12 +39666,12 @@
                     <a:p>
                       <a:pPr algn="ctr" indent="0" marL="0">
                         <a:lnSpc>
-                          <a:spcPts val="1554"/>
+                          <a:spcPts val="1461"/>
                         </a:lnSpc>
                         <a:buNone/>
                       </a:pPr>
                       <a:r>
-                        <a:rPr lang="en-US" sz="1110" dirty="0">
+                        <a:rPr lang="en-US" sz="1050" dirty="0">
                           <a:solidFill>
                             <a:srgbClr val="9A5B00"/>
                           </a:solidFill>
@@ -38905,7 +39681,7 @@
                         </a:rPr>
                         <a:t>.012</a:t>
                       </a:r>
-                      <a:endParaRPr lang="en-US" sz="1110" dirty="0">
+                      <a:endParaRPr lang="en-US" sz="1050" dirty="0">
                         <a:latin typeface="Tahoma" charset="0"/>
                         <a:ea typeface="Tahoma" charset="0"/>
                         <a:cs typeface="Tahoma" charset="0"/>
@@ -41500,12 +42276,12 @@
                     <a:p>
                       <a:pPr indent="0" marL="0">
                         <a:lnSpc>
-                          <a:spcPts val="1570"/>
+                          <a:spcPts val="1476"/>
                         </a:lnSpc>
                         <a:buNone/>
                       </a:pPr>
                       <a:r>
-                        <a:rPr lang="en-US" sz="1121" b="1" dirty="0">
+                        <a:rPr lang="en-US" sz="1050" b="1" dirty="0">
                           <a:solidFill>
                             <a:srgbClr val="F6F4EF"/>
                           </a:solidFill>
@@ -41515,7 +42291,7 @@
                         </a:rPr>
                         <a:t>Pair 1</a:t>
                       </a:r>
-                      <a:endParaRPr lang="en-US" sz="1121" dirty="0">
+                      <a:endParaRPr lang="en-US" sz="1050" dirty="0">
                         <a:latin typeface="Tahoma" charset="0"/>
                         <a:ea typeface="Tahoma" charset="0"/>
                         <a:cs typeface="Tahoma" charset="0"/>
@@ -41559,12 +42335,12 @@
                     <a:p>
                       <a:pPr algn="ctr" indent="0" marL="0">
                         <a:lnSpc>
-                          <a:spcPts val="1570"/>
+                          <a:spcPts val="1476"/>
                         </a:lnSpc>
                         <a:buNone/>
                       </a:pPr>
                       <a:r>
-                        <a:rPr lang="en-US" sz="1121" b="1" dirty="0">
+                        <a:rPr lang="en-US" sz="1050" b="1" dirty="0">
                           <a:solidFill>
                             <a:srgbClr val="F6F4EF"/>
                           </a:solidFill>
@@ -41574,7 +42350,7 @@
                         </a:rPr>
                         <a:t>Mean</a:t>
                       </a:r>
-                      <a:endParaRPr lang="en-US" sz="1121" dirty="0">
+                      <a:endParaRPr lang="en-US" sz="1050" dirty="0">
                         <a:latin typeface="Tahoma" charset="0"/>
                         <a:ea typeface="Tahoma" charset="0"/>
                         <a:cs typeface="Tahoma" charset="0"/>
@@ -41624,12 +42400,12 @@
                     <a:p>
                       <a:pPr algn="ctr" indent="0" marL="0">
                         <a:lnSpc>
-                          <a:spcPts val="1570"/>
+                          <a:spcPts val="1476"/>
                         </a:lnSpc>
                         <a:buNone/>
                       </a:pPr>
                       <a:r>
-                        <a:rPr lang="en-US" sz="1121" b="1" dirty="0">
+                        <a:rPr lang="en-US" sz="1050" b="1" dirty="0">
                           <a:solidFill>
                             <a:srgbClr val="F6F4EF"/>
                           </a:solidFill>
@@ -41639,7 +42415,7 @@
                         </a:rPr>
                         <a:t>N</a:t>
                       </a:r>
-                      <a:endParaRPr lang="en-US" sz="1121" dirty="0">
+                      <a:endParaRPr lang="en-US" sz="1050" dirty="0">
                         <a:latin typeface="Tahoma" charset="0"/>
                         <a:ea typeface="Tahoma" charset="0"/>
                         <a:cs typeface="Tahoma" charset="0"/>
@@ -41689,12 +42465,12 @@
                     <a:p>
                       <a:pPr algn="ctr" indent="0" marL="0">
                         <a:lnSpc>
-                          <a:spcPts val="1570"/>
+                          <a:spcPts val="1476"/>
                         </a:lnSpc>
                         <a:buNone/>
                       </a:pPr>
                       <a:r>
-                        <a:rPr lang="en-US" sz="1121" b="1" dirty="0">
+                        <a:rPr lang="en-US" sz="1050" b="1" dirty="0">
                           <a:solidFill>
                             <a:srgbClr val="F6F4EF"/>
                           </a:solidFill>
@@ -41704,7 +42480,7 @@
                         </a:rPr>
                         <a:t>Std. Deviation</a:t>
                       </a:r>
-                      <a:endParaRPr lang="en-US" sz="1121" dirty="0">
+                      <a:endParaRPr lang="en-US" sz="1050" dirty="0">
                         <a:latin typeface="Tahoma" charset="0"/>
                         <a:ea typeface="Tahoma" charset="0"/>
                         <a:cs typeface="Tahoma" charset="0"/>
@@ -41754,12 +42530,12 @@
                     <a:p>
                       <a:pPr algn="ctr" indent="0" marL="0">
                         <a:lnSpc>
-                          <a:spcPts val="1570"/>
+                          <a:spcPts val="1476"/>
                         </a:lnSpc>
                         <a:buNone/>
                       </a:pPr>
                       <a:r>
-                        <a:rPr lang="en-US" sz="1121" b="1" dirty="0">
+                        <a:rPr lang="en-US" sz="1050" b="1" dirty="0">
                           <a:solidFill>
                             <a:srgbClr val="F6F4EF"/>
                           </a:solidFill>
@@ -41769,7 +42545,7 @@
                         </a:rPr>
                         <a:t>Std. Error Mean</a:t>
                       </a:r>
-                      <a:endParaRPr lang="en-US" sz="1121" dirty="0">
+                      <a:endParaRPr lang="en-US" sz="1050" dirty="0">
                         <a:latin typeface="Tahoma" charset="0"/>
                         <a:ea typeface="Tahoma" charset="0"/>
                         <a:cs typeface="Tahoma" charset="0"/>
@@ -41821,12 +42597,12 @@
                     <a:p>
                       <a:pPr indent="0" marL="0">
                         <a:lnSpc>
-                          <a:spcPts val="1570"/>
+                          <a:spcPts val="1476"/>
                         </a:lnSpc>
                         <a:buNone/>
                       </a:pPr>
                       <a:r>
-                        <a:rPr lang="en-US" sz="1121" dirty="0">
+                        <a:rPr lang="en-US" sz="1050" dirty="0">
                           <a:solidFill>
                             <a:srgbClr val="14233A"/>
                           </a:solidFill>
@@ -41836,7 +42612,7 @@
                         </a:rPr>
                         <a:t>before</a:t>
                       </a:r>
-                      <a:endParaRPr lang="en-US" sz="1121" dirty="0">
+                      <a:endParaRPr lang="en-US" sz="1050" dirty="0">
                         <a:latin typeface="Tahoma" charset="0"/>
                         <a:ea typeface="Tahoma" charset="0"/>
                         <a:cs typeface="Tahoma" charset="0"/>
@@ -41886,12 +42662,12 @@
                     <a:p>
                       <a:pPr algn="ctr" indent="0" marL="0">
                         <a:lnSpc>
-                          <a:spcPts val="1570"/>
+                          <a:spcPts val="1476"/>
                         </a:lnSpc>
                         <a:buNone/>
                       </a:pPr>
                       <a:r>
-                        <a:rPr lang="en-US" sz="1121" dirty="0">
+                        <a:rPr lang="en-US" sz="1050" dirty="0">
                           <a:solidFill>
                             <a:srgbClr val="14233A"/>
                           </a:solidFill>
@@ -41901,7 +42677,7 @@
                         </a:rPr>
                         <a:t>15.67</a:t>
                       </a:r>
-                      <a:endParaRPr lang="en-US" sz="1121" dirty="0">
+                      <a:endParaRPr lang="en-US" sz="1050" dirty="0">
                         <a:latin typeface="Tahoma" charset="0"/>
                         <a:ea typeface="Tahoma" charset="0"/>
                         <a:cs typeface="Tahoma" charset="0"/>
@@ -41957,12 +42733,12 @@
                     <a:p>
                       <a:pPr algn="ctr" indent="0" marL="0">
                         <a:lnSpc>
-                          <a:spcPts val="1570"/>
+                          <a:spcPts val="1476"/>
                         </a:lnSpc>
                         <a:buNone/>
                       </a:pPr>
                       <a:r>
-                        <a:rPr lang="en-US" sz="1121" dirty="0">
+                        <a:rPr lang="en-US" sz="1050" dirty="0">
                           <a:solidFill>
                             <a:srgbClr val="14233A"/>
                           </a:solidFill>
@@ -41972,7 +42748,7 @@
                         </a:rPr>
                         <a:t>6</a:t>
                       </a:r>
-                      <a:endParaRPr lang="en-US" sz="1121" dirty="0">
+                      <a:endParaRPr lang="en-US" sz="1050" dirty="0">
                         <a:latin typeface="Tahoma" charset="0"/>
                         <a:ea typeface="Tahoma" charset="0"/>
                         <a:cs typeface="Tahoma" charset="0"/>
@@ -42028,12 +42804,12 @@
                     <a:p>
                       <a:pPr algn="ctr" indent="0" marL="0">
                         <a:lnSpc>
-                          <a:spcPts val="1570"/>
+                          <a:spcPts val="1476"/>
                         </a:lnSpc>
                         <a:buNone/>
                       </a:pPr>
                       <a:r>
-                        <a:rPr lang="en-US" sz="1121" dirty="0">
+                        <a:rPr lang="en-US" sz="1050" dirty="0">
                           <a:solidFill>
                             <a:srgbClr val="14233A"/>
                           </a:solidFill>
@@ -42043,7 +42819,7 @@
                         </a:rPr>
                         <a:t>5.538</a:t>
                       </a:r>
-                      <a:endParaRPr lang="en-US" sz="1121" dirty="0">
+                      <a:endParaRPr lang="en-US" sz="1050" dirty="0">
                         <a:latin typeface="Tahoma" charset="0"/>
                         <a:ea typeface="Tahoma" charset="0"/>
                         <a:cs typeface="Tahoma" charset="0"/>
@@ -42099,12 +42875,12 @@
                     <a:p>
                       <a:pPr algn="ctr" indent="0" marL="0">
                         <a:lnSpc>
-                          <a:spcPts val="1570"/>
+                          <a:spcPts val="1476"/>
                         </a:lnSpc>
                         <a:buNone/>
                       </a:pPr>
                       <a:r>
-                        <a:rPr lang="en-US" sz="1121" dirty="0">
+                        <a:rPr lang="en-US" sz="1050" dirty="0">
                           <a:solidFill>
                             <a:srgbClr val="14233A"/>
                           </a:solidFill>
@@ -42114,7 +42890,7 @@
                         </a:rPr>
                         <a:t>2.261</a:t>
                       </a:r>
-                      <a:endParaRPr lang="en-US" sz="1121" dirty="0">
+                      <a:endParaRPr lang="en-US" sz="1050" dirty="0">
                         <a:latin typeface="Tahoma" charset="0"/>
                         <a:ea typeface="Tahoma" charset="0"/>
                         <a:cs typeface="Tahoma" charset="0"/>
@@ -42172,12 +42948,12 @@
                     <a:p>
                       <a:pPr indent="0" marL="0">
                         <a:lnSpc>
-                          <a:spcPts val="1570"/>
+                          <a:spcPts val="1476"/>
                         </a:lnSpc>
                         <a:buNone/>
                       </a:pPr>
                       <a:r>
-                        <a:rPr lang="en-US" sz="1121" dirty="0">
+                        <a:rPr lang="en-US" sz="1050" dirty="0">
                           <a:solidFill>
                             <a:srgbClr val="14233A"/>
                           </a:solidFill>
@@ -42187,7 +42963,7 @@
                         </a:rPr>
                         <a:t>after</a:t>
                       </a:r>
-                      <a:endParaRPr lang="en-US" sz="1121" dirty="0">
+                      <a:endParaRPr lang="en-US" sz="1050" dirty="0">
                         <a:latin typeface="Tahoma" charset="0"/>
                         <a:ea typeface="Tahoma" charset="0"/>
                         <a:cs typeface="Tahoma" charset="0"/>
@@ -42237,12 +43013,12 @@
                     <a:p>
                       <a:pPr algn="ctr" indent="0" marL="0">
                         <a:lnSpc>
-                          <a:spcPts val="1570"/>
+                          <a:spcPts val="1476"/>
                         </a:lnSpc>
                         <a:buNone/>
                       </a:pPr>
                       <a:r>
-                        <a:rPr lang="en-US" sz="1121" dirty="0">
+                        <a:rPr lang="en-US" sz="1050" dirty="0">
                           <a:solidFill>
                             <a:srgbClr val="14233A"/>
                           </a:solidFill>
@@ -42252,7 +43028,7 @@
                         </a:rPr>
                         <a:t>19.83</a:t>
                       </a:r>
-                      <a:endParaRPr lang="en-US" sz="1121" dirty="0">
+                      <a:endParaRPr lang="en-US" sz="1050" dirty="0">
                         <a:latin typeface="Tahoma" charset="0"/>
                         <a:ea typeface="Tahoma" charset="0"/>
                         <a:cs typeface="Tahoma" charset="0"/>
@@ -42308,12 +43084,12 @@
                     <a:p>
                       <a:pPr algn="ctr" indent="0" marL="0">
                         <a:lnSpc>
-                          <a:spcPts val="1570"/>
+                          <a:spcPts val="1476"/>
                         </a:lnSpc>
                         <a:buNone/>
                       </a:pPr>
                       <a:r>
-                        <a:rPr lang="en-US" sz="1121" dirty="0">
+                        <a:rPr lang="en-US" sz="1050" dirty="0">
                           <a:solidFill>
                             <a:srgbClr val="14233A"/>
                           </a:solidFill>
@@ -42323,7 +43099,7 @@
                         </a:rPr>
                         <a:t>6</a:t>
                       </a:r>
-                      <a:endParaRPr lang="en-US" sz="1121" dirty="0">
+                      <a:endParaRPr lang="en-US" sz="1050" dirty="0">
                         <a:latin typeface="Tahoma" charset="0"/>
                         <a:ea typeface="Tahoma" charset="0"/>
                         <a:cs typeface="Tahoma" charset="0"/>
@@ -42379,12 +43155,12 @@
                     <a:p>
                       <a:pPr algn="ctr" indent="0" marL="0">
                         <a:lnSpc>
-                          <a:spcPts val="1570"/>
+                          <a:spcPts val="1476"/>
                         </a:lnSpc>
                         <a:buNone/>
                       </a:pPr>
                       <a:r>
-                        <a:rPr lang="en-US" sz="1121" dirty="0">
+                        <a:rPr lang="en-US" sz="1050" dirty="0">
                           <a:solidFill>
                             <a:srgbClr val="14233A"/>
                           </a:solidFill>
@@ -42394,7 +43170,7 @@
                         </a:rPr>
                         <a:t>3.817</a:t>
                       </a:r>
-                      <a:endParaRPr lang="en-US" sz="1121" dirty="0">
+                      <a:endParaRPr lang="en-US" sz="1050" dirty="0">
                         <a:latin typeface="Tahoma" charset="0"/>
                         <a:ea typeface="Tahoma" charset="0"/>
                         <a:cs typeface="Tahoma" charset="0"/>
@@ -42450,12 +43226,12 @@
                     <a:p>
                       <a:pPr algn="ctr" indent="0" marL="0">
                         <a:lnSpc>
-                          <a:spcPts val="1570"/>
+                          <a:spcPts val="1476"/>
                         </a:lnSpc>
                         <a:buNone/>
                       </a:pPr>
                       <a:r>
-                        <a:rPr lang="en-US" sz="1121" dirty="0">
+                        <a:rPr lang="en-US" sz="1050" dirty="0">
                           <a:solidFill>
                             <a:srgbClr val="14233A"/>
                           </a:solidFill>
@@ -42465,7 +43241,7 @@
                         </a:rPr>
                         <a:t>1.558</a:t>
                       </a:r>
-                      <a:endParaRPr lang="en-US" sz="1121" dirty="0">
+                      <a:endParaRPr lang="en-US" sz="1050" dirty="0">
                         <a:latin typeface="Tahoma" charset="0"/>
                         <a:ea typeface="Tahoma" charset="0"/>
                         <a:cs typeface="Tahoma" charset="0"/>
@@ -42729,12 +43505,12 @@
                     <a:p>
                       <a:pPr indent="0" marL="0">
                         <a:lnSpc>
-                          <a:spcPts val="1575"/>
+                          <a:spcPts val="1480"/>
                         </a:lnSpc>
                         <a:buNone/>
                       </a:pPr>
                       <a:r>
-                        <a:rPr lang="en-US" sz="1125" b="1" dirty="0">
+                        <a:rPr lang="en-US" sz="1050" b="1" dirty="0">
                           <a:solidFill>
                             <a:srgbClr val="F6F4EF"/>
                           </a:solidFill>
@@ -42744,7 +43520,7 @@
                         </a:rPr>
                         <a:t>Pair 1</a:t>
                       </a:r>
-                      <a:endParaRPr lang="en-US" sz="1125" dirty="0">
+                      <a:endParaRPr lang="en-US" sz="1050" dirty="0">
                         <a:latin typeface="Tahoma" charset="0"/>
                         <a:ea typeface="Tahoma" charset="0"/>
                         <a:cs typeface="Tahoma" charset="0"/>
@@ -42788,12 +43564,12 @@
                     <a:p>
                       <a:pPr algn="ctr" indent="0" marL="0">
                         <a:lnSpc>
-                          <a:spcPts val="1575"/>
+                          <a:spcPts val="1480"/>
                         </a:lnSpc>
                         <a:buNone/>
                       </a:pPr>
                       <a:r>
-                        <a:rPr lang="en-US" sz="1125" b="1" dirty="0">
+                        <a:rPr lang="en-US" sz="1050" b="1" dirty="0">
                           <a:solidFill>
                             <a:srgbClr val="F6F4EF"/>
                           </a:solidFill>
@@ -42803,7 +43579,7 @@
                         </a:rPr>
                         <a:t>Mean</a:t>
                       </a:r>
-                      <a:endParaRPr lang="en-US" sz="1125" dirty="0">
+                      <a:endParaRPr lang="en-US" sz="1050" dirty="0">
                         <a:latin typeface="Tahoma" charset="0"/>
                         <a:ea typeface="Tahoma" charset="0"/>
                         <a:cs typeface="Tahoma" charset="0"/>
@@ -42853,12 +43629,12 @@
                     <a:p>
                       <a:pPr algn="ctr" indent="0" marL="0">
                         <a:lnSpc>
-                          <a:spcPts val="1575"/>
+                          <a:spcPts val="1480"/>
                         </a:lnSpc>
                         <a:buNone/>
                       </a:pPr>
                       <a:r>
-                        <a:rPr lang="en-US" sz="1125" b="1" dirty="0">
+                        <a:rPr lang="en-US" sz="1050" b="1" dirty="0">
                           <a:solidFill>
                             <a:srgbClr val="F6F4EF"/>
                           </a:solidFill>
@@ -42868,7 +43644,7 @@
                         </a:rPr>
                         <a:t>Std. Deviation</a:t>
                       </a:r>
-                      <a:endParaRPr lang="en-US" sz="1125" dirty="0">
+                      <a:endParaRPr lang="en-US" sz="1050" dirty="0">
                         <a:latin typeface="Tahoma" charset="0"/>
                         <a:ea typeface="Tahoma" charset="0"/>
                         <a:cs typeface="Tahoma" charset="0"/>
@@ -42918,12 +43694,12 @@
                     <a:p>
                       <a:pPr algn="ctr" indent="0" marL="0">
                         <a:lnSpc>
-                          <a:spcPts val="1575"/>
+                          <a:spcPts val="1480"/>
                         </a:lnSpc>
                         <a:buNone/>
                       </a:pPr>
                       <a:r>
-                        <a:rPr lang="en-US" sz="1125" b="1" dirty="0">
+                        <a:rPr lang="en-US" sz="1050" b="1" dirty="0">
                           <a:solidFill>
                             <a:srgbClr val="F6F4EF"/>
                           </a:solidFill>
@@ -42933,7 +43709,7 @@
                         </a:rPr>
                         <a:t>Std. Error Mean</a:t>
                       </a:r>
-                      <a:endParaRPr lang="en-US" sz="1125" dirty="0">
+                      <a:endParaRPr lang="en-US" sz="1050" dirty="0">
                         <a:latin typeface="Tahoma" charset="0"/>
                         <a:ea typeface="Tahoma" charset="0"/>
                         <a:cs typeface="Tahoma" charset="0"/>
@@ -42983,12 +43759,12 @@
                     <a:p>
                       <a:pPr algn="ctr" indent="0" marL="0">
                         <a:lnSpc>
-                          <a:spcPts val="1575"/>
+                          <a:spcPts val="1480"/>
                         </a:lnSpc>
                         <a:buNone/>
                       </a:pPr>
                       <a:r>
-                        <a:rPr lang="en-US" sz="1125" b="1" dirty="0">
+                        <a:rPr lang="en-US" sz="1050" b="1" dirty="0">
                           <a:solidFill>
                             <a:srgbClr val="F6F4EF"/>
                           </a:solidFill>
@@ -42998,7 +43774,7 @@
                         </a:rPr>
                         <a:t>95% CI Lower</a:t>
                       </a:r>
-                      <a:endParaRPr lang="en-US" sz="1125" dirty="0">
+                      <a:endParaRPr lang="en-US" sz="1050" dirty="0">
                         <a:latin typeface="Tahoma" charset="0"/>
                         <a:ea typeface="Tahoma" charset="0"/>
                         <a:cs typeface="Tahoma" charset="0"/>
@@ -43048,12 +43824,12 @@
                     <a:p>
                       <a:pPr algn="ctr" indent="0" marL="0">
                         <a:lnSpc>
-                          <a:spcPts val="1575"/>
+                          <a:spcPts val="1480"/>
                         </a:lnSpc>
                         <a:buNone/>
                       </a:pPr>
                       <a:r>
-                        <a:rPr lang="en-US" sz="1125" b="1" dirty="0">
+                        <a:rPr lang="en-US" sz="1050" b="1" dirty="0">
                           <a:solidFill>
                             <a:srgbClr val="F6F4EF"/>
                           </a:solidFill>
@@ -43063,7 +43839,7 @@
                         </a:rPr>
                         <a:t>95% CI Upper</a:t>
                       </a:r>
-                      <a:endParaRPr lang="en-US" sz="1125" dirty="0">
+                      <a:endParaRPr lang="en-US" sz="1050" dirty="0">
                         <a:latin typeface="Tahoma" charset="0"/>
                         <a:ea typeface="Tahoma" charset="0"/>
                         <a:cs typeface="Tahoma" charset="0"/>
@@ -43113,12 +43889,12 @@
                     <a:p>
                       <a:pPr algn="ctr" indent="0" marL="0">
                         <a:lnSpc>
-                          <a:spcPts val="1575"/>
+                          <a:spcPts val="1480"/>
                         </a:lnSpc>
                         <a:buNone/>
                       </a:pPr>
                       <a:r>
-                        <a:rPr lang="en-US" sz="1125" b="1" dirty="0">
+                        <a:rPr lang="en-US" sz="1050" b="1" dirty="0">
                           <a:solidFill>
                             <a:srgbClr val="F6F4EF"/>
                           </a:solidFill>
@@ -43128,7 +43904,7 @@
                         </a:rPr>
                         <a:t>t</a:t>
                       </a:r>
-                      <a:endParaRPr lang="en-US" sz="1125" dirty="0">
+                      <a:endParaRPr lang="en-US" sz="1050" dirty="0">
                         <a:latin typeface="Tahoma" charset="0"/>
                         <a:ea typeface="Tahoma" charset="0"/>
                         <a:cs typeface="Tahoma" charset="0"/>
@@ -43178,12 +43954,12 @@
                     <a:p>
                       <a:pPr algn="ctr" indent="0" marL="0">
                         <a:lnSpc>
-                          <a:spcPts val="1575"/>
+                          <a:spcPts val="1480"/>
                         </a:lnSpc>
                         <a:buNone/>
                       </a:pPr>
                       <a:r>
-                        <a:rPr lang="en-US" sz="1125" b="1" dirty="0">
+                        <a:rPr lang="en-US" sz="1050" b="1" dirty="0">
                           <a:solidFill>
                             <a:srgbClr val="F6F4EF"/>
                           </a:solidFill>
@@ -43193,7 +43969,7 @@
                         </a:rPr>
                         <a:t>df</a:t>
                       </a:r>
-                      <a:endParaRPr lang="en-US" sz="1125" dirty="0">
+                      <a:endParaRPr lang="en-US" sz="1050" dirty="0">
                         <a:latin typeface="Tahoma" charset="0"/>
                         <a:ea typeface="Tahoma" charset="0"/>
                         <a:cs typeface="Tahoma" charset="0"/>
@@ -43243,12 +44019,12 @@
                     <a:p>
                       <a:pPr algn="ctr" indent="0" marL="0">
                         <a:lnSpc>
-                          <a:spcPts val="1575"/>
+                          <a:spcPts val="1480"/>
                         </a:lnSpc>
                         <a:buNone/>
                       </a:pPr>
                       <a:r>
-                        <a:rPr lang="en-US" sz="1125" b="1" dirty="0">
+                        <a:rPr lang="en-US" sz="1050" b="1" dirty="0">
                           <a:solidFill>
                             <a:srgbClr val="F6F4EF"/>
                           </a:solidFill>
@@ -43258,7 +44034,7 @@
                         </a:rPr>
                         <a:t>Sig. (2-tailed)</a:t>
                       </a:r>
-                      <a:endParaRPr lang="en-US" sz="1125" dirty="0">
+                      <a:endParaRPr lang="en-US" sz="1050" dirty="0">
                         <a:latin typeface="Tahoma" charset="0"/>
                         <a:ea typeface="Tahoma" charset="0"/>
                         <a:cs typeface="Tahoma" charset="0"/>
@@ -43310,12 +44086,12 @@
                     <a:p>
                       <a:pPr indent="0" marL="0">
                         <a:lnSpc>
-                          <a:spcPts val="1575"/>
+                          <a:spcPts val="1480"/>
                         </a:lnSpc>
                         <a:buNone/>
                       </a:pPr>
                       <a:r>
-                        <a:rPr lang="en-US" sz="1125" dirty="0">
+                        <a:rPr lang="en-US" sz="1050" dirty="0">
                           <a:solidFill>
                             <a:srgbClr val="14233A"/>
                           </a:solidFill>
@@ -43325,7 +44101,7 @@
                         </a:rPr>
                         <a:t>before - after</a:t>
                       </a:r>
-                      <a:endParaRPr lang="en-US" sz="1125" dirty="0">
+                      <a:endParaRPr lang="en-US" sz="1050" dirty="0">
                         <a:latin typeface="Tahoma" charset="0"/>
                         <a:ea typeface="Tahoma" charset="0"/>
                         <a:cs typeface="Tahoma" charset="0"/>
@@ -43375,12 +44151,12 @@
                     <a:p>
                       <a:pPr algn="ctr" indent="0" marL="0">
                         <a:lnSpc>
-                          <a:spcPts val="1575"/>
+                          <a:spcPts val="1480"/>
                         </a:lnSpc>
                         <a:buNone/>
                       </a:pPr>
                       <a:r>
-                        <a:rPr lang="en-US" sz="1125" dirty="0">
+                        <a:rPr lang="en-US" sz="1050" dirty="0">
                           <a:solidFill>
                             <a:srgbClr val="14233A"/>
                           </a:solidFill>
@@ -43390,7 +44166,7 @@
                         </a:rPr>
                         <a:t>-4.167</a:t>
                       </a:r>
-                      <a:endParaRPr lang="en-US" sz="1125" dirty="0">
+                      <a:endParaRPr lang="en-US" sz="1050" dirty="0">
                         <a:latin typeface="Tahoma" charset="0"/>
                         <a:ea typeface="Tahoma" charset="0"/>
                         <a:cs typeface="Tahoma" charset="0"/>
@@ -43446,12 +44222,12 @@
                     <a:p>
                       <a:pPr algn="ctr" indent="0" marL="0">
                         <a:lnSpc>
-                          <a:spcPts val="1575"/>
+                          <a:spcPts val="1480"/>
                         </a:lnSpc>
                         <a:buNone/>
                       </a:pPr>
                       <a:r>
-                        <a:rPr lang="en-US" sz="1125" dirty="0">
+                        <a:rPr lang="en-US" sz="1050" dirty="0">
                           <a:solidFill>
                             <a:srgbClr val="14233A"/>
                           </a:solidFill>
@@ -43461,7 +44237,7 @@
                         </a:rPr>
                         <a:t>2.639</a:t>
                       </a:r>
-                      <a:endParaRPr lang="en-US" sz="1125" dirty="0">
+                      <a:endParaRPr lang="en-US" sz="1050" dirty="0">
                         <a:latin typeface="Tahoma" charset="0"/>
                         <a:ea typeface="Tahoma" charset="0"/>
                         <a:cs typeface="Tahoma" charset="0"/>
@@ -43517,12 +44293,12 @@
                     <a:p>
                       <a:pPr algn="ctr" indent="0" marL="0">
                         <a:lnSpc>
-                          <a:spcPts val="1575"/>
+                          <a:spcPts val="1480"/>
                         </a:lnSpc>
                         <a:buNone/>
                       </a:pPr>
                       <a:r>
-                        <a:rPr lang="en-US" sz="1125" dirty="0">
+                        <a:rPr lang="en-US" sz="1050" dirty="0">
                           <a:solidFill>
                             <a:srgbClr val="14233A"/>
                           </a:solidFill>
@@ -43532,7 +44308,7 @@
                         </a:rPr>
                         <a:t>1.078</a:t>
                       </a:r>
-                      <a:endParaRPr lang="en-US" sz="1125" dirty="0">
+                      <a:endParaRPr lang="en-US" sz="1050" dirty="0">
                         <a:latin typeface="Tahoma" charset="0"/>
                         <a:ea typeface="Tahoma" charset="0"/>
                         <a:cs typeface="Tahoma" charset="0"/>
@@ -43588,12 +44364,12 @@
                     <a:p>
                       <a:pPr algn="ctr" indent="0" marL="0">
                         <a:lnSpc>
-                          <a:spcPts val="1575"/>
+                          <a:spcPts val="1480"/>
                         </a:lnSpc>
                         <a:buNone/>
                       </a:pPr>
                       <a:r>
-                        <a:rPr lang="en-US" sz="1125" dirty="0">
+                        <a:rPr lang="en-US" sz="1050" dirty="0">
                           <a:solidFill>
                             <a:srgbClr val="14233A"/>
                           </a:solidFill>
@@ -43603,7 +44379,7 @@
                         </a:rPr>
                         <a:t>-6.937</a:t>
                       </a:r>
-                      <a:endParaRPr lang="en-US" sz="1125" dirty="0">
+                      <a:endParaRPr lang="en-US" sz="1050" dirty="0">
                         <a:latin typeface="Tahoma" charset="0"/>
                         <a:ea typeface="Tahoma" charset="0"/>
                         <a:cs typeface="Tahoma" charset="0"/>
@@ -43659,12 +44435,12 @@
                     <a:p>
                       <a:pPr algn="ctr" indent="0" marL="0">
                         <a:lnSpc>
-                          <a:spcPts val="1575"/>
+                          <a:spcPts val="1480"/>
                         </a:lnSpc>
                         <a:buNone/>
                       </a:pPr>
                       <a:r>
-                        <a:rPr lang="en-US" sz="1125" dirty="0">
+                        <a:rPr lang="en-US" sz="1050" dirty="0">
                           <a:solidFill>
                             <a:srgbClr val="14233A"/>
                           </a:solidFill>
@@ -43674,7 +44450,7 @@
                         </a:rPr>
                         <a:t>-1.397</a:t>
                       </a:r>
-                      <a:endParaRPr lang="en-US" sz="1125" dirty="0">
+                      <a:endParaRPr lang="en-US" sz="1050" dirty="0">
                         <a:latin typeface="Tahoma" charset="0"/>
                         <a:ea typeface="Tahoma" charset="0"/>
                         <a:cs typeface="Tahoma" charset="0"/>
@@ -43730,12 +44506,12 @@
                     <a:p>
                       <a:pPr algn="ctr" indent="0" marL="0">
                         <a:lnSpc>
-                          <a:spcPts val="1575"/>
+                          <a:spcPts val="1480"/>
                         </a:lnSpc>
                         <a:buNone/>
                       </a:pPr>
                       <a:r>
-                        <a:rPr lang="en-US" sz="1125" dirty="0">
+                        <a:rPr lang="en-US" sz="1050" dirty="0">
                           <a:solidFill>
                             <a:srgbClr val="14233A"/>
                           </a:solidFill>
@@ -43745,7 +44521,7 @@
                         </a:rPr>
                         <a:t>-3.867</a:t>
                       </a:r>
-                      <a:endParaRPr lang="en-US" sz="1125" dirty="0">
+                      <a:endParaRPr lang="en-US" sz="1050" dirty="0">
                         <a:latin typeface="Tahoma" charset="0"/>
                         <a:ea typeface="Tahoma" charset="0"/>
                         <a:cs typeface="Tahoma" charset="0"/>
@@ -43801,12 +44577,12 @@
                     <a:p>
                       <a:pPr algn="ctr" indent="0" marL="0">
                         <a:lnSpc>
-                          <a:spcPts val="1575"/>
+                          <a:spcPts val="1480"/>
                         </a:lnSpc>
                         <a:buNone/>
                       </a:pPr>
                       <a:r>
-                        <a:rPr lang="en-US" sz="1125" dirty="0">
+                        <a:rPr lang="en-US" sz="1050" dirty="0">
                           <a:solidFill>
                             <a:srgbClr val="14233A"/>
                           </a:solidFill>
@@ -43816,7 +44592,7 @@
                         </a:rPr>
                         <a:t>5</a:t>
                       </a:r>
-                      <a:endParaRPr lang="en-US" sz="1125" dirty="0">
+                      <a:endParaRPr lang="en-US" sz="1050" dirty="0">
                         <a:latin typeface="Tahoma" charset="0"/>
                         <a:ea typeface="Tahoma" charset="0"/>
                         <a:cs typeface="Tahoma" charset="0"/>
@@ -43872,12 +44648,12 @@
                     <a:p>
                       <a:pPr algn="ctr" indent="0" marL="0">
                         <a:lnSpc>
-                          <a:spcPts val="1575"/>
+                          <a:spcPts val="1480"/>
                         </a:lnSpc>
                         <a:buNone/>
                       </a:pPr>
                       <a:r>
-                        <a:rPr lang="en-US" sz="1125" dirty="0">
+                        <a:rPr lang="en-US" sz="1050" dirty="0">
                           <a:solidFill>
                             <a:srgbClr val="9A5B00"/>
                           </a:solidFill>
@@ -43887,7 +44663,7 @@
                         </a:rPr>
                         <a:t>.012</a:t>
                       </a:r>
-                      <a:endParaRPr lang="en-US" sz="1125" dirty="0">
+                      <a:endParaRPr lang="en-US" sz="1050" dirty="0">
                         <a:latin typeface="Tahoma" charset="0"/>
                         <a:ea typeface="Tahoma" charset="0"/>
                         <a:cs typeface="Tahoma" charset="0"/>
@@ -44349,12 +45125,12 @@
           <a:p>
             <a:pPr indent="0" marL="0" rtl="1" algn="r">
               <a:lnSpc>
-                <a:spcPts val="1820"/>
+                <a:spcPts val="1656"/>
               </a:lnSpc>
               <a:buNone/>
             </a:pPr>
             <a:r>
-              <a:rPr lang="ar-EG" sz="1400" dirty="0">
+              <a:rPr lang="ar-EG" sz="1250" dirty="0">
                 <a:solidFill>
                   <a:srgbClr val="14233A"/>
                 </a:solidFill>
@@ -44364,7 +45140,7 @@
               </a:rPr>
               <a:t>رفض الفرض العدمي وقبول البديل</a:t>
             </a:r>
-            <a:endParaRPr lang="ar-EG" sz="1400" dirty="0"/>
+            <a:endParaRPr lang="ar-EG" sz="1250" dirty="0"/>
           </a:p>
         </p:txBody>
       </p:sp>
@@ -44494,12 +45270,12 @@
           <a:p>
             <a:pPr indent="0" marL="0" rtl="1" algn="r">
               <a:lnSpc>
-                <a:spcPts val="1820"/>
+                <a:spcPts val="1656"/>
               </a:lnSpc>
               <a:buNone/>
             </a:pPr>
             <a:r>
-              <a:rPr lang="ar-EG" sz="1400" dirty="0">
+              <a:rPr lang="ar-EG" sz="1250" dirty="0">
                 <a:solidFill>
                   <a:srgbClr val="14233A"/>
                 </a:solidFill>
@@ -44509,7 +45285,7 @@
               </a:rPr>
               <a:t>قبول الفرض العدمي ورفض البديل</a:t>
             </a:r>
-            <a:endParaRPr lang="ar-EG" sz="1400" dirty="0"/>
+            <a:endParaRPr lang="ar-EG" sz="1250" dirty="0"/>
           </a:p>
         </p:txBody>
       </p:sp>
@@ -46898,12 +47674,12 @@
           <a:p>
             <a:pPr indent="0" marL="0" rtl="1" algn="r">
               <a:lnSpc>
-                <a:spcPts val="2030"/>
+                <a:spcPts val="1969"/>
               </a:lnSpc>
               <a:buNone/>
             </a:pPr>
             <a:r>
-              <a:rPr lang="ar-EG" sz="1400" dirty="0">
+              <a:rPr lang="ar-EG" sz="1350" dirty="0">
                 <a:solidFill>
                   <a:srgbClr val="46546B"/>
                 </a:solidFill>
@@ -46913,7 +47689,7 @@
               </a:rPr>
               <a:t>هل اتجاه الطلاب يختلف عن المحايد؟ وهل تجربة الدراسة أونلاين غيّرت رأيهم؟</a:t>
             </a:r>
-            <a:endParaRPr lang="ar-EG" sz="1400" dirty="0"/>
+            <a:endParaRPr lang="ar-EG" sz="1350" dirty="0"/>
           </a:p>
         </p:txBody>
       </p:sp>
